--- a/production/slides/03-ch3-energy-speed-slides.pptx
+++ b/production/slides/03-ch3-energy-speed-slides.pptx
@@ -3223,7 +3223,7 @@
                 </a:solidFill>
                 <a:latin typeface="Arial"/>
               </a:rPr>
-              <a:t>Chapter 3  ·  Grade 4  ·  Week 3</a:t>
+              <a:t>Chapter 3  ·  Grade 4  ·  Week 2</a:t>
             </a:r>
           </a:p>
         </p:txBody>
@@ -3561,7 +3561,7 @@
                 </a:solidFill>
                 <a:latin typeface="Arial"/>
               </a:rPr>
-              <a:t>Notebook — speed</a:t>
+              <a:t>Notes — speed</a:t>
             </a:r>
           </a:p>
         </p:txBody>
@@ -9402,7 +9402,7 @@
                 </a:solidFill>
                 <a:latin typeface="Arial"/>
               </a:rPr>
-              <a:t>NOTEBOOK</a:t>
+              <a:t>NOTES</a:t>
             </a:r>
           </a:p>
         </p:txBody>

--- a/production/slides/03-ch3-energy-speed-slides.pptx
+++ b/production/slides/03-ch3-energy-speed-slides.pptx
@@ -21,6 +21,7 @@
     <p:sldId id="269" r:id="rId20"/>
     <p:sldId id="270" r:id="rId21"/>
     <p:sldId id="271" r:id="rId22"/>
+    <p:sldId id="284" r:id="rId35"/>
     <p:sldId id="272" r:id="rId23"/>
     <p:sldId id="273" r:id="rId24"/>
     <p:sldId id="274" r:id="rId25"/>
@@ -9020,6 +9021,296 @@
                 <a:latin typeface="Arial"/>
               </a:rPr>
               <a:t>28</a:t>
+            </a:r>
+          </a:p>
+        </p:txBody>
+      </p:sp>
+    </p:spTree>
+  </p:cSld>
+  <p:clrMapOvr>
+    <a:masterClrMapping/>
+  </p:clrMapOvr>
+</p:sld>
+</file>
+
+<file path=ppt/slides/slide29.xml><?xml version="1.0" encoding="utf-8"?>
+<p:sld xmlns:a="http://schemas.openxmlformats.org/drawingml/2006/main" xmlns:p="http://schemas.openxmlformats.org/presentationml/2006/main" xmlns:r="http://schemas.openxmlformats.org/officeDocument/2006/relationships">
+  <p:cSld>
+    <p:spTree>
+      <p:nvGrpSpPr>
+        <p:cNvPr id="1" name=""/>
+        <p:cNvGrpSpPr/>
+        <p:nvPr/>
+      </p:nvGrpSpPr>
+      <p:grpSpPr/>
+      <p:sp>
+        <p:nvSpPr>
+          <p:cNvPr id="2" name="Title Bar"/>
+          <p:cNvSpPr/>
+          <p:nvPr/>
+        </p:nvSpPr>
+        <p:spPr>
+          <a:xfrm>
+            <a:off x="0" y="0"/>
+            <a:ext cx="12191695" cy="1417320"/>
+          </a:xfrm>
+          <a:prstGeom prst="roundRect">
+            <a:avLst/>
+          </a:prstGeom>
+          <a:solidFill>
+            <a:srgbClr val="1F3A5F"/>
+          </a:solidFill>
+          <a:ln>
+            <a:noFill/>
+          </a:ln>
+        </p:spPr>
+        <p:style>
+          <a:lnRef idx="1">
+            <a:schemeClr val="accent1"/>
+          </a:lnRef>
+          <a:fillRef idx="3">
+            <a:schemeClr val="accent1"/>
+          </a:fillRef>
+          <a:effectRef idx="2">
+            <a:schemeClr val="accent1"/>
+          </a:effectRef>
+          <a:fontRef idx="minor">
+            <a:schemeClr val="lt1"/>
+          </a:fontRef>
+        </p:style>
+        <p:txBody>
+          <a:bodyPr rtlCol="0" anchor="ctr" wrap="square"/>
+          <a:lstStyle/>
+          <a:p>
+            <a:pPr algn="ctr"/>
+          </a:p>
+        </p:txBody>
+      </p:sp>
+      <p:sp>
+        <p:nvSpPr>
+          <p:cNvPr id="3" name="Title"/>
+          <p:cNvSpPr txBox="1"/>
+          <p:nvPr/>
+        </p:nvSpPr>
+        <p:spPr>
+          <a:xfrm>
+            <a:off x="457200" y="109728"/>
+            <a:ext cx="9855190" cy="868680"/>
+          </a:xfrm>
+          <a:prstGeom prst="rect">
+            <a:avLst/>
+          </a:prstGeom>
+          <a:noFill/>
+        </p:spPr>
+        <p:txBody>
+          <a:bodyPr wrap="square" anchor="ctr">
+            <a:spAutoFit/>
+          </a:bodyPr>
+          <a:lstStyle/>
+          <a:p>
+            <a:pPr algn="l"/>
+            <a:r>
+              <a:rPr sz="3200" b="1">
+                <a:solidFill>
+                  <a:srgbClr val="FFFFFF"/>
+                </a:solidFill>
+                <a:latin typeface="Arial"/>
+              </a:rPr>
+              <a:t>WATCH — Ramp It Up in Action</a:t>
+            </a:r>
+          </a:p>
+        </p:txBody>
+      </p:sp>
+      <p:sp>
+        <p:nvSpPr>
+          <p:cNvPr id="4" name="Subtitle"/>
+          <p:cNvSpPr txBox="1"/>
+          <p:nvPr/>
+        </p:nvSpPr>
+        <p:spPr>
+          <a:xfrm>
+            <a:off x="457200" y="1024128"/>
+            <a:ext cx="9855190" cy="329184"/>
+          </a:xfrm>
+          <a:prstGeom prst="rect">
+            <a:avLst/>
+          </a:prstGeom>
+          <a:noFill/>
+        </p:spPr>
+        <p:txBody>
+          <a:bodyPr wrap="square" anchor="ctr">
+            <a:spAutoFit/>
+          </a:bodyPr>
+          <a:lstStyle/>
+          <a:p>
+            <a:pPr algn="l"/>
+            <a:r>
+              <a:rPr sz="1500" b="0">
+                <a:solidFill>
+                  <a:srgbClr val="C9D2E8"/>
+                </a:solidFill>
+                <a:latin typeface="Arial"/>
+              </a:rPr>
+              <a:t>Optional video · 2:29 · Week 2 · Ramp It Up 2.0</a:t>
+            </a:r>
+          </a:p>
+        </p:txBody>
+      </p:sp>
+      <p:sp>
+        <p:nvSpPr>
+          <p:cNvPr id="5" name="Watch Badge"/>
+          <p:cNvSpPr/>
+          <p:nvPr/>
+        </p:nvSpPr>
+        <p:spPr>
+          <a:xfrm>
+            <a:off x="10820400" y="256032"/>
+            <a:ext cx="1203960" cy="420624"/>
+          </a:xfrm>
+          <a:prstGeom prst="roundRect">
+            <a:avLst/>
+          </a:prstGeom>
+          <a:solidFill>
+            <a:srgbClr val="C05014"/>
+          </a:solidFill>
+          <a:ln>
+            <a:noFill/>
+          </a:ln>
+        </p:spPr>
+        <p:style>
+          <a:lnRef idx="1">
+            <a:schemeClr val="accent1"/>
+          </a:lnRef>
+          <a:fillRef idx="3">
+            <a:schemeClr val="accent1"/>
+          </a:fillRef>
+          <a:effectRef idx="2">
+            <a:schemeClr val="accent1"/>
+          </a:effectRef>
+          <a:fontRef idx="minor">
+            <a:schemeClr val="lt1"/>
+          </a:fontRef>
+        </p:style>
+        <p:txBody>
+          <a:bodyPr rtlCol="0" anchor="ctr" wrap="none"/>
+          <a:lstStyle/>
+          <a:p>
+            <a:pPr algn="ctr"/>
+            <a:r>
+              <a:rPr sz="1100" b="1">
+                <a:solidFill>
+                  <a:srgbClr val="FFFFFF"/>
+                </a:solidFill>
+                <a:latin typeface="Arial"/>
+              </a:rPr>
+              <a:t>WATCH</a:t>
+            </a:r>
+          </a:p>
+        </p:txBody>
+      </p:sp>
+      <p:pic>
+        <p:nvPicPr>
+          <p:cNvPr id="6" name="Video 1">
+            <a:extLst>
+              <a:ext uri="{DAA4B4D4-6D71-4841-9C94-3DE7FCFB9230}">
+                <p14:media xmlns:p14="http://schemas.microsoft.com/office/powerpoint/2010/main" r:embed="rId3"/>
+              </a:ext>
+            </a:extLst>
+          </p:cNvPr>
+          <p:cNvPicPr>
+            <a:picLocks noChangeAspect="1"/>
+          </p:cNvPicPr>
+          <p:nvPr>
+            <a:videoFile r:link="rId3"/>
+            <p:extLst>
+              <p:ext uri="{DAA4B4D4-6D71-4841-9C94-3DE7FCFB9230}">
+                <p14:media xmlns:p14="http://schemas.microsoft.com/office/powerpoint/2010/main" r:embed="rId3"/>
+              </p:ext>
+            </p:extLst>
+          </p:nvPr>
+        </p:nvPicPr>
+        <p:blipFill>
+          <a:blip r:embed="rId2"/>
+          <a:stretch>
+            <a:fillRect/>
+          </a:stretch>
+        </p:blipFill>
+        <p:spPr>
+          <a:xfrm>
+            <a:off x="1895847" y="1720000"/>
+            <a:ext cx="8400000" cy="4725000"/>
+          </a:xfrm>
+          <a:prstGeom prst="rect">
+            <a:avLst/>
+          </a:prstGeom>
+        </p:spPr>
+      </p:pic>
+      <p:sp>
+        <p:nvSpPr>
+          <p:cNvPr id="7" name="Prompt"/>
+          <p:cNvSpPr txBox="1"/>
+          <p:nvPr/>
+        </p:nvSpPr>
+        <p:spPr>
+          <a:xfrm>
+            <a:off x="457200" y="6500000"/>
+            <a:ext cx="11277295" cy="300000"/>
+          </a:xfrm>
+          <a:prstGeom prst="rect">
+            <a:avLst/>
+          </a:prstGeom>
+          <a:noFill/>
+        </p:spPr>
+        <p:txBody>
+          <a:bodyPr wrap="square" anchor="ctr">
+            <a:spAutoFit/>
+          </a:bodyPr>
+          <a:lstStyle/>
+          <a:p>
+            <a:pPr algn="ctr"/>
+            <a:r>
+              <a:rPr sz="1800" b="1">
+                <a:solidFill>
+                  <a:srgbClr val="1F3A5F"/>
+                </a:solidFill>
+                <a:latin typeface="Arial"/>
+              </a:rPr>
+              <a:t>THINK: Which variable changed, and which stayed the same?</a:t>
+            </a:r>
+          </a:p>
+        </p:txBody>
+      </p:sp>
+      <p:sp>
+        <p:nvSpPr>
+          <p:cNvPr id="8" name="Slide Number"/>
+          <p:cNvSpPr txBox="1"/>
+          <p:nvPr/>
+        </p:nvSpPr>
+        <p:spPr>
+          <a:xfrm>
+            <a:off x="11338560" y="6446520"/>
+            <a:ext cx="731520" cy="365760"/>
+          </a:xfrm>
+          <a:prstGeom prst="rect">
+            <a:avLst/>
+          </a:prstGeom>
+          <a:noFill/>
+        </p:spPr>
+        <p:txBody>
+          <a:bodyPr wrap="square" anchor="t">
+            <a:spAutoFit/>
+          </a:bodyPr>
+          <a:lstStyle/>
+          <a:p>
+            <a:pPr algn="r"/>
+            <a:r>
+              <a:rPr sz="1200" b="0">
+                <a:solidFill>
+                  <a:srgbClr val="555555"/>
+                </a:solidFill>
+                <a:latin typeface="Arial"/>
+              </a:rPr>
+              <a:t>17</a:t>
             </a:r>
           </a:p>
         </p:txBody>

--- a/production/slides/03-ch3-energy-speed-slides.pptx
+++ b/production/slides/03-ch3-energy-speed-slides.pptx
@@ -133,6 +133,441 @@
     </a:lvl9pPr>
   </p:defaultTextStyle>
 </p:presentation>
+</file>
+
+<file path=ppt/notesMasters/notesMaster1.xml><?xml version="1.0" encoding="utf-8"?>
+<p:notesMaster xmlns:a="http://schemas.openxmlformats.org/drawingml/2006/main" xmlns:p="http://schemas.openxmlformats.org/presentationml/2006/main" xmlns:r="http://schemas.openxmlformats.org/officeDocument/2006/relationships">
+  <p:cSld>
+    <p:bg>
+      <p:bgRef idx="1001">
+        <a:schemeClr val="bg1"/>
+      </p:bgRef>
+    </p:bg>
+    <p:spTree>
+      <p:nvGrpSpPr>
+        <p:cNvPr id="1" name=""/>
+        <p:cNvGrpSpPr/>
+        <p:nvPr/>
+      </p:nvGrpSpPr>
+      <p:grpSpPr>
+        <a:xfrm>
+          <a:off x="0" y="0"/>
+          <a:ext cx="0" cy="0"/>
+          <a:chOff x="0" y="0"/>
+          <a:chExt cx="0" cy="0"/>
+        </a:xfrm>
+      </p:grpSpPr>
+      <p:sp>
+        <p:nvSpPr>
+          <p:cNvPr id="2" name="Header Placeholder 1"/>
+          <p:cNvSpPr>
+            <a:spLocks noGrp="1"/>
+          </p:cNvSpPr>
+          <p:nvPr>
+            <p:ph type="hdr" sz="quarter"/>
+          </p:nvPr>
+        </p:nvSpPr>
+        <p:spPr>
+          <a:xfrm>
+            <a:off x="0" y="0"/>
+            <a:ext cx="2971800" cy="457200"/>
+          </a:xfrm>
+          <a:prstGeom prst="rect">
+            <a:avLst/>
+          </a:prstGeom>
+        </p:spPr>
+        <p:txBody>
+          <a:bodyPr vert="horz" lIns="91440" tIns="45720" rIns="91440" bIns="45720" rtlCol="0"/>
+          <a:lstStyle>
+            <a:lvl1pPr algn="l">
+              <a:defRPr sz="1200"/>
+            </a:lvl1pPr>
+          </a:lstStyle>
+          <a:p>
+            <a:endParaRPr lang="en-US"/>
+          </a:p>
+        </p:txBody>
+      </p:sp>
+      <p:sp>
+        <p:nvSpPr>
+          <p:cNvPr id="3" name="Date Placeholder 2"/>
+          <p:cNvSpPr>
+            <a:spLocks noGrp="1"/>
+          </p:cNvSpPr>
+          <p:nvPr>
+            <p:ph type="dt" idx="1"/>
+          </p:nvPr>
+        </p:nvSpPr>
+        <p:spPr>
+          <a:xfrm>
+            <a:off x="3884613" y="0"/>
+            <a:ext cx="2971800" cy="457200"/>
+          </a:xfrm>
+          <a:prstGeom prst="rect">
+            <a:avLst/>
+          </a:prstGeom>
+        </p:spPr>
+        <p:txBody>
+          <a:bodyPr vert="horz" lIns="91440" tIns="45720" rIns="91440" bIns="45720" rtlCol="0"/>
+          <a:lstStyle>
+            <a:lvl1pPr algn="r">
+              <a:defRPr sz="1200"/>
+            </a:lvl1pPr>
+          </a:lstStyle>
+          <a:p>
+            <a:fld id="{0F89C1C7-3DCD-1040-A9CF-14679D8B5DDD}" type="datetimeFigureOut">
+              <a:rPr lang="en-US" smtClean="0"/>
+              <a:t>10/17/16</a:t>
+            </a:fld>
+            <a:endParaRPr lang="en-US"/>
+          </a:p>
+        </p:txBody>
+      </p:sp>
+      <p:sp>
+        <p:nvSpPr>
+          <p:cNvPr id="4" name="Slide Image Placeholder 3"/>
+          <p:cNvSpPr>
+            <a:spLocks noGrp="1" noRot="1" noChangeAspect="1"/>
+          </p:cNvSpPr>
+          <p:nvPr>
+            <p:ph type="sldImg" idx="2"/>
+          </p:nvPr>
+        </p:nvSpPr>
+        <p:spPr>
+          <a:xfrm>
+            <a:off x="1143000" y="685800"/>
+            <a:ext cx="4572000" cy="3429000"/>
+          </a:xfrm>
+          <a:prstGeom prst="rect">
+            <a:avLst/>
+          </a:prstGeom>
+          <a:noFill/>
+          <a:ln w="12700">
+            <a:solidFill>
+              <a:prstClr val="black"/>
+            </a:solidFill>
+          </a:ln>
+        </p:spPr>
+        <p:txBody>
+          <a:bodyPr vert="horz" lIns="91440" tIns="45720" rIns="91440" bIns="45720" rtlCol="0" anchor="ctr"/>
+          <a:lstStyle/>
+          <a:p>
+            <a:endParaRPr lang="en-US"/>
+          </a:p>
+        </p:txBody>
+      </p:sp>
+      <p:sp>
+        <p:nvSpPr>
+          <p:cNvPr id="5" name="Notes Placeholder 4"/>
+          <p:cNvSpPr>
+            <a:spLocks noGrp="1"/>
+          </p:cNvSpPr>
+          <p:nvPr>
+            <p:ph type="body" sz="quarter" idx="3"/>
+          </p:nvPr>
+        </p:nvSpPr>
+        <p:spPr>
+          <a:xfrm>
+            <a:off x="685800" y="4343400"/>
+            <a:ext cx="5486400" cy="4114800"/>
+          </a:xfrm>
+          <a:prstGeom prst="rect">
+            <a:avLst/>
+          </a:prstGeom>
+        </p:spPr>
+        <p:txBody>
+          <a:bodyPr vert="horz" lIns="91440" tIns="45720" rIns="91440" bIns="45720" rtlCol="0"/>
+          <a:lstStyle/>
+          <a:p>
+            <a:pPr lvl="0"/>
+            <a:r>
+              <a:rPr lang="en-US" smtClean="0"/>
+              <a:t>Click to edit Master text styles</a:t>
+            </a:r>
+          </a:p>
+          <a:p>
+            <a:pPr lvl="1"/>
+            <a:r>
+              <a:rPr lang="en-US" smtClean="0"/>
+              <a:t>Second level</a:t>
+            </a:r>
+          </a:p>
+          <a:p>
+            <a:pPr lvl="2"/>
+            <a:r>
+              <a:rPr lang="en-US" smtClean="0"/>
+              <a:t>Third level</a:t>
+            </a:r>
+          </a:p>
+          <a:p>
+            <a:pPr lvl="3"/>
+            <a:r>
+              <a:rPr lang="en-US" smtClean="0"/>
+              <a:t>Fourth level</a:t>
+            </a:r>
+          </a:p>
+          <a:p>
+            <a:pPr lvl="4"/>
+            <a:r>
+              <a:rPr lang="en-US" smtClean="0"/>
+              <a:t>Fifth level</a:t>
+            </a:r>
+            <a:endParaRPr lang="en-US"/>
+          </a:p>
+        </p:txBody>
+      </p:sp>
+      <p:sp>
+        <p:nvSpPr>
+          <p:cNvPr id="6" name="Footer Placeholder 5"/>
+          <p:cNvSpPr>
+            <a:spLocks noGrp="1"/>
+          </p:cNvSpPr>
+          <p:nvPr>
+            <p:ph type="ftr" sz="quarter" idx="4"/>
+          </p:nvPr>
+        </p:nvSpPr>
+        <p:spPr>
+          <a:xfrm>
+            <a:off x="0" y="8685213"/>
+            <a:ext cx="2971800" cy="457200"/>
+          </a:xfrm>
+          <a:prstGeom prst="rect">
+            <a:avLst/>
+          </a:prstGeom>
+        </p:spPr>
+        <p:txBody>
+          <a:bodyPr vert="horz" lIns="91440" tIns="45720" rIns="91440" bIns="45720" rtlCol="0" anchor="b"/>
+          <a:lstStyle>
+            <a:lvl1pPr algn="l">
+              <a:defRPr sz="1200"/>
+            </a:lvl1pPr>
+          </a:lstStyle>
+          <a:p>
+            <a:endParaRPr lang="en-US"/>
+          </a:p>
+        </p:txBody>
+      </p:sp>
+      <p:sp>
+        <p:nvSpPr>
+          <p:cNvPr id="7" name="Slide Number Placeholder 6"/>
+          <p:cNvSpPr>
+            <a:spLocks noGrp="1"/>
+          </p:cNvSpPr>
+          <p:nvPr>
+            <p:ph type="sldNum" sz="quarter" idx="5"/>
+          </p:nvPr>
+        </p:nvSpPr>
+        <p:spPr>
+          <a:xfrm>
+            <a:off x="3884613" y="8685213"/>
+            <a:ext cx="2971800" cy="457200"/>
+          </a:xfrm>
+          <a:prstGeom prst="rect">
+            <a:avLst/>
+          </a:prstGeom>
+        </p:spPr>
+        <p:txBody>
+          <a:bodyPr vert="horz" lIns="91440" tIns="45720" rIns="91440" bIns="45720" rtlCol="0" anchor="b"/>
+          <a:lstStyle>
+            <a:lvl1pPr algn="r">
+              <a:defRPr sz="1200"/>
+            </a:lvl1pPr>
+          </a:lstStyle>
+          <a:p>
+            <a:fld id="{BB5E49A5-4136-284D-997B-48E1D791AD67}" type="slidenum">
+              <a:rPr lang="en-US" smtClean="0"/>
+              <a:t>‹#›</a:t>
+            </a:fld>
+            <a:endParaRPr lang="en-US"/>
+          </a:p>
+        </p:txBody>
+      </p:sp>
+    </p:spTree>
+    <p:extLst>
+      <p:ext uri="{BB962C8B-B14F-4D97-AF65-F5344CB8AC3E}">
+        <p14:creationId xmlns:p14="http://schemas.microsoft.com/office/powerpoint/2010/main" val="2623252185"/>
+      </p:ext>
+    </p:extLst>
+  </p:cSld>
+  <p:clrMap bg1="lt1" tx1="dk1" bg2="lt2" tx2="dk2" accent1="accent1" accent2="accent2" accent3="accent3" accent4="accent4" accent5="accent5" accent6="accent6" hlink="hlink" folHlink="folHlink"/>
+  <p:notesStyle>
+    <a:lvl1pPr marL="0" algn="l" defTabSz="457200" rtl="0" eaLnBrk="1" latinLnBrk="0" hangingPunct="1">
+      <a:defRPr sz="1200" kern="1200">
+        <a:solidFill>
+          <a:schemeClr val="tx1"/>
+        </a:solidFill>
+        <a:latin typeface="+mn-lt"/>
+        <a:ea typeface="+mn-ea"/>
+        <a:cs typeface="+mn-cs"/>
+      </a:defRPr>
+    </a:lvl1pPr>
+    <a:lvl2pPr marL="457200" algn="l" defTabSz="457200" rtl="0" eaLnBrk="1" latinLnBrk="0" hangingPunct="1">
+      <a:defRPr sz="1200" kern="1200">
+        <a:solidFill>
+          <a:schemeClr val="tx1"/>
+        </a:solidFill>
+        <a:latin typeface="+mn-lt"/>
+        <a:ea typeface="+mn-ea"/>
+        <a:cs typeface="+mn-cs"/>
+      </a:defRPr>
+    </a:lvl2pPr>
+    <a:lvl3pPr marL="914400" algn="l" defTabSz="457200" rtl="0" eaLnBrk="1" latinLnBrk="0" hangingPunct="1">
+      <a:defRPr sz="1200" kern="1200">
+        <a:solidFill>
+          <a:schemeClr val="tx1"/>
+        </a:solidFill>
+        <a:latin typeface="+mn-lt"/>
+        <a:ea typeface="+mn-ea"/>
+        <a:cs typeface="+mn-cs"/>
+      </a:defRPr>
+    </a:lvl3pPr>
+    <a:lvl4pPr marL="1371600" algn="l" defTabSz="457200" rtl="0" eaLnBrk="1" latinLnBrk="0" hangingPunct="1">
+      <a:defRPr sz="1200" kern="1200">
+        <a:solidFill>
+          <a:schemeClr val="tx1"/>
+        </a:solidFill>
+        <a:latin typeface="+mn-lt"/>
+        <a:ea typeface="+mn-ea"/>
+        <a:cs typeface="+mn-cs"/>
+      </a:defRPr>
+    </a:lvl4pPr>
+    <a:lvl5pPr marL="1828800" algn="l" defTabSz="457200" rtl="0" eaLnBrk="1" latinLnBrk="0" hangingPunct="1">
+      <a:defRPr sz="1200" kern="1200">
+        <a:solidFill>
+          <a:schemeClr val="tx1"/>
+        </a:solidFill>
+        <a:latin typeface="+mn-lt"/>
+        <a:ea typeface="+mn-ea"/>
+        <a:cs typeface="+mn-cs"/>
+      </a:defRPr>
+    </a:lvl5pPr>
+    <a:lvl6pPr marL="2286000" algn="l" defTabSz="457200" rtl="0" eaLnBrk="1" latinLnBrk="0" hangingPunct="1">
+      <a:defRPr sz="1200" kern="1200">
+        <a:solidFill>
+          <a:schemeClr val="tx1"/>
+        </a:solidFill>
+        <a:latin typeface="+mn-lt"/>
+        <a:ea typeface="+mn-ea"/>
+        <a:cs typeface="+mn-cs"/>
+      </a:defRPr>
+    </a:lvl6pPr>
+    <a:lvl7pPr marL="2743200" algn="l" defTabSz="457200" rtl="0" eaLnBrk="1" latinLnBrk="0" hangingPunct="1">
+      <a:defRPr sz="1200" kern="1200">
+        <a:solidFill>
+          <a:schemeClr val="tx1"/>
+        </a:solidFill>
+        <a:latin typeface="+mn-lt"/>
+        <a:ea typeface="+mn-ea"/>
+        <a:cs typeface="+mn-cs"/>
+      </a:defRPr>
+    </a:lvl7pPr>
+    <a:lvl8pPr marL="3200400" algn="l" defTabSz="457200" rtl="0" eaLnBrk="1" latinLnBrk="0" hangingPunct="1">
+      <a:defRPr sz="1200" kern="1200">
+        <a:solidFill>
+          <a:schemeClr val="tx1"/>
+        </a:solidFill>
+        <a:latin typeface="+mn-lt"/>
+        <a:ea typeface="+mn-ea"/>
+        <a:cs typeface="+mn-cs"/>
+      </a:defRPr>
+    </a:lvl8pPr>
+    <a:lvl9pPr marL="3657600" algn="l" defTabSz="457200" rtl="0" eaLnBrk="1" latinLnBrk="0" hangingPunct="1">
+      <a:defRPr sz="1200" kern="1200">
+        <a:solidFill>
+          <a:schemeClr val="tx1"/>
+        </a:solidFill>
+        <a:latin typeface="+mn-lt"/>
+        <a:ea typeface="+mn-ea"/>
+        <a:cs typeface="+mn-cs"/>
+      </a:defRPr>
+    </a:lvl9pPr>
+  </p:notesStyle>
+</p:notesMaster>
+</file>
+
+<file path=ppt/notesSlides/notesSlide1.xml><?xml version="1.0" encoding="utf-8"?>
+<p:notes xmlns:a="http://schemas.openxmlformats.org/drawingml/2006/main" xmlns:p="http://schemas.openxmlformats.org/presentationml/2006/main" xmlns:r="http://schemas.openxmlformats.org/officeDocument/2006/relationships">
+  <p:cSld>
+    <p:spTree>
+      <p:nvGrpSpPr>
+        <p:cNvPr id="1" name=""/>
+        <p:cNvGrpSpPr/>
+        <p:nvPr/>
+      </p:nvGrpSpPr>
+      <p:grpSpPr>
+        <a:xfrm>
+          <a:off x="0" y="0"/>
+          <a:ext cx="0" cy="0"/>
+          <a:chOff x="0" y="0"/>
+          <a:chExt cx="0" cy="0"/>
+        </a:xfrm>
+      </p:grpSpPr>
+      <p:sp>
+        <p:nvSpPr>
+          <p:cNvPr id="2" name="Slide Image Placeholder 1"/>
+          <p:cNvSpPr>
+            <a:spLocks noGrp="1"/>
+          </p:cNvSpPr>
+          <p:nvPr>
+            <p:ph type="sldImg" idx="2"/>
+          </p:nvPr>
+        </p:nvSpPr>
+        <p:spPr/>
+      </p:sp>
+      <p:sp>
+        <p:nvSpPr>
+          <p:cNvPr id="3" name="Notes Placeholder 2"/>
+          <p:cNvSpPr>
+            <a:spLocks noGrp="1"/>
+          </p:cNvSpPr>
+          <p:nvPr>
+            <p:ph type="body" idx="3" sz="quarter"/>
+          </p:nvPr>
+        </p:nvSpPr>
+        <p:spPr/>
+        <p:txBody>
+          <a:bodyPr/>
+          <a:lstStyle/>
+          <a:p>
+            <a:r>
+              <a:t>ROLE: SUPPORT</a:t>
+            </a:r>
+          </a:p>
+          <a:p>
+            <a:r>
+              <a:t>PLAY: Week 2 Wednesday — after “Procedure”, before the data table.</a:t>
+            </a:r>
+          </a:p>
+          <a:p>
+            <a:r>
+              <a:t>PURPOSE: Model the Ramp It Up fair test so students see the same-object speed comparison before collecting their own data.</a:t>
+            </a:r>
+          </a:p>
+          <a:p>
+            <a:r>
+              <a:t>SKIP IF: Skip if students already ran the investigation and need the time for data collection.</a:t>
+            </a:r>
+          </a:p>
+        </p:txBody>
+      </p:sp>
+      <p:sp>
+        <p:nvSpPr>
+          <p:cNvPr id="4" name="Slide Number Placeholder 3"/>
+          <p:cNvSpPr>
+            <a:spLocks noGrp="1"/>
+          </p:cNvSpPr>
+          <p:nvPr>
+            <p:ph type="sldNum" idx="5" sz="quarter"/>
+          </p:nvPr>
+        </p:nvSpPr>
+        <p:spPr/>
+      </p:sp>
+    </p:spTree>
+  </p:cSld>
+  <p:clrMapOvr>
+    <a:masterClrMapping/>
+  </p:clrMapOvr>
+</p:notes>
 </file>
 
 <file path=ppt/slideLayouts/slideLayout1.xml><?xml version="1.0" encoding="utf-8"?>
@@ -5367,3684 +5802,6 @@
       <p:grpSpPr/>
       <p:sp>
         <p:nvSpPr>
-          <p:cNvPr id="2" name="Rounded Rectangle 1"/>
-          <p:cNvSpPr/>
-          <p:nvPr/>
-        </p:nvSpPr>
-        <p:spPr>
-          <a:xfrm>
-            <a:off x="0" y="0"/>
-            <a:ext cx="12191695" cy="1051560"/>
-          </a:xfrm>
-          <a:prstGeom prst="roundRect">
-            <a:avLst/>
-          </a:prstGeom>
-          <a:solidFill>
-            <a:srgbClr val="1F3A5F"/>
-          </a:solidFill>
-          <a:ln>
-            <a:noFill/>
-          </a:ln>
-        </p:spPr>
-        <p:style>
-          <a:lnRef idx="1">
-            <a:schemeClr val="accent1"/>
-          </a:lnRef>
-          <a:fillRef idx="3">
-            <a:schemeClr val="accent1"/>
-          </a:fillRef>
-          <a:effectRef idx="2">
-            <a:schemeClr val="accent1"/>
-          </a:effectRef>
-          <a:fontRef idx="minor">
-            <a:schemeClr val="lt1"/>
-          </a:fontRef>
-        </p:style>
-        <p:txBody>
-          <a:bodyPr rtlCol="0" anchor="ctr" wrap="square"/>
-          <a:lstStyle/>
-          <a:p>
-            <a:pPr algn="ctr"/>
-          </a:p>
-        </p:txBody>
-      </p:sp>
-      <p:sp>
-        <p:nvSpPr>
-          <p:cNvPr id="3" name="TextBox 2"/>
-          <p:cNvSpPr txBox="1"/>
-          <p:nvPr/>
-        </p:nvSpPr>
-        <p:spPr>
-          <a:xfrm>
-            <a:off x="457200" y="146304"/>
-            <a:ext cx="11247120" cy="777240"/>
-          </a:xfrm>
-          <a:prstGeom prst="rect">
-            <a:avLst/>
-          </a:prstGeom>
-          <a:noFill/>
-        </p:spPr>
-        <p:txBody>
-          <a:bodyPr wrap="square" anchor="ctr">
-            <a:spAutoFit/>
-          </a:bodyPr>
-          <a:lstStyle/>
-          <a:p>
-            <a:pPr algn="l"/>
-            <a:r>
-              <a:rPr sz="3400" b="1">
-                <a:solidFill>
-                  <a:srgbClr val="FFFFFF"/>
-                </a:solidFill>
-                <a:latin typeface="Arial"/>
-              </a:rPr>
-              <a:t>Data table</a:t>
-            </a:r>
-          </a:p>
-        </p:txBody>
-      </p:sp>
-      <p:sp>
-        <p:nvSpPr>
-          <p:cNvPr id="4" name="Rounded Rectangle 3"/>
-          <p:cNvSpPr/>
-          <p:nvPr/>
-        </p:nvSpPr>
-        <p:spPr>
-          <a:xfrm>
-            <a:off x="9692640" y="256032"/>
-            <a:ext cx="2194560" cy="548640"/>
-          </a:xfrm>
-          <a:prstGeom prst="roundRect">
-            <a:avLst/>
-          </a:prstGeom>
-          <a:solidFill>
-            <a:srgbClr val="C05014"/>
-          </a:solidFill>
-          <a:ln>
-            <a:noFill/>
-          </a:ln>
-        </p:spPr>
-        <p:style>
-          <a:lnRef idx="1">
-            <a:schemeClr val="accent1"/>
-          </a:lnRef>
-          <a:fillRef idx="3">
-            <a:schemeClr val="accent1"/>
-          </a:fillRef>
-          <a:effectRef idx="2">
-            <a:schemeClr val="accent1"/>
-          </a:effectRef>
-          <a:fontRef idx="minor">
-            <a:schemeClr val="lt1"/>
-          </a:fontRef>
-        </p:style>
-        <p:txBody>
-          <a:bodyPr rtlCol="0" anchor="ctr" wrap="square"/>
-          <a:lstStyle/>
-          <a:p>
-            <a:pPr algn="ctr"/>
-            <a:r>
-              <a:rPr sz="1400" b="1">
-                <a:solidFill>
-                  <a:srgbClr val="FFFFFF"/>
-                </a:solidFill>
-                <a:latin typeface="Arial"/>
-              </a:rPr>
-              <a:t>WRITE</a:t>
-            </a:r>
-          </a:p>
-        </p:txBody>
-      </p:sp>
-      <p:sp>
-        <p:nvSpPr>
-          <p:cNvPr id="5" name="Rounded Rectangle 4"/>
-          <p:cNvSpPr/>
-          <p:nvPr/>
-        </p:nvSpPr>
-        <p:spPr>
-          <a:xfrm>
-            <a:off x="1097280" y="2194560"/>
-            <a:ext cx="9966960" cy="1005840"/>
-          </a:xfrm>
-          <a:prstGeom prst="roundRect">
-            <a:avLst/>
-          </a:prstGeom>
-          <a:solidFill>
-            <a:srgbClr val="E8EDF4"/>
-          </a:solidFill>
-          <a:ln>
-            <a:noFill/>
-          </a:ln>
-        </p:spPr>
-        <p:style>
-          <a:lnRef idx="1">
-            <a:schemeClr val="accent1"/>
-          </a:lnRef>
-          <a:fillRef idx="3">
-            <a:schemeClr val="accent1"/>
-          </a:fillRef>
-          <a:effectRef idx="2">
-            <a:schemeClr val="accent1"/>
-          </a:effectRef>
-          <a:fontRef idx="minor">
-            <a:schemeClr val="lt1"/>
-          </a:fontRef>
-        </p:style>
-        <p:txBody>
-          <a:bodyPr rtlCol="0" anchor="ctr" wrap="square"/>
-          <a:lstStyle/>
-          <a:p>
-            <a:pPr algn="ctr"/>
-            <a:r>
-              <a:rPr sz="2400" b="1">
-                <a:solidFill>
-                  <a:srgbClr val="1F3A5F"/>
-                </a:solidFill>
-                <a:latin typeface="Arial"/>
-              </a:rPr>
-              <a:t>Ramp Height | Trial 1 | Trial 2 | Trial 3 | Average (cm)</a:t>
-            </a:r>
-          </a:p>
-        </p:txBody>
-      </p:sp>
-      <p:sp>
-        <p:nvSpPr>
-          <p:cNvPr id="6" name="Rounded Rectangle 5"/>
-          <p:cNvSpPr/>
-          <p:nvPr/>
-        </p:nvSpPr>
-        <p:spPr>
-          <a:xfrm>
-            <a:off x="1097280" y="3566160"/>
-            <a:ext cx="9966960" cy="1005840"/>
-          </a:xfrm>
-          <a:prstGeom prst="roundRect">
-            <a:avLst/>
-          </a:prstGeom>
-          <a:solidFill>
-            <a:srgbClr val="E8EDF4"/>
-          </a:solidFill>
-          <a:ln>
-            <a:noFill/>
-          </a:ln>
-        </p:spPr>
-        <p:style>
-          <a:lnRef idx="1">
-            <a:schemeClr val="accent1"/>
-          </a:lnRef>
-          <a:fillRef idx="3">
-            <a:schemeClr val="accent1"/>
-          </a:fillRef>
-          <a:effectRef idx="2">
-            <a:schemeClr val="accent1"/>
-          </a:effectRef>
-          <a:fontRef idx="minor">
-            <a:schemeClr val="lt1"/>
-          </a:fontRef>
-        </p:style>
-        <p:txBody>
-          <a:bodyPr rtlCol="0" anchor="ctr" wrap="square"/>
-          <a:lstStyle/>
-          <a:p>
-            <a:pPr algn="ctr"/>
-            <a:r>
-              <a:rPr sz="2400" b="1">
-                <a:solidFill>
-                  <a:srgbClr val="1F3A5F"/>
-                </a:solidFill>
-                <a:latin typeface="Arial"/>
-              </a:rPr>
-              <a:t>1 book  ·  2 books  ·  3 books</a:t>
-            </a:r>
-          </a:p>
-        </p:txBody>
-      </p:sp>
-      <p:sp>
-        <p:nvSpPr>
-          <p:cNvPr id="7" name="TextBox 6"/>
-          <p:cNvSpPr txBox="1"/>
-          <p:nvPr/>
-        </p:nvSpPr>
-        <p:spPr>
-          <a:xfrm>
-            <a:off x="11338560" y="6446520"/>
-            <a:ext cx="731520" cy="365760"/>
-          </a:xfrm>
-          <a:prstGeom prst="rect">
-            <a:avLst/>
-          </a:prstGeom>
-          <a:noFill/>
-        </p:spPr>
-        <p:txBody>
-          <a:bodyPr wrap="square" anchor="t">
-            <a:spAutoFit/>
-          </a:bodyPr>
-          <a:lstStyle/>
-          <a:p>
-            <a:pPr algn="r"/>
-            <a:r>
-              <a:rPr sz="1200" b="0">
-                <a:solidFill>
-                  <a:srgbClr val="555555"/>
-                </a:solidFill>
-                <a:latin typeface="Arial"/>
-              </a:rPr>
-              <a:t>17</a:t>
-            </a:r>
-          </a:p>
-        </p:txBody>
-      </p:sp>
-    </p:spTree>
-  </p:cSld>
-  <p:clrMapOvr>
-    <a:masterClrMapping/>
-  </p:clrMapOvr>
-</p:sld>
-</file>
-
-<file path=ppt/slides/slide18.xml><?xml version="1.0" encoding="utf-8"?>
-<p:sld xmlns:a="http://schemas.openxmlformats.org/drawingml/2006/main" xmlns:p="http://schemas.openxmlformats.org/presentationml/2006/main" xmlns:r="http://schemas.openxmlformats.org/officeDocument/2006/relationships">
-  <p:cSld>
-    <p:spTree>
-      <p:nvGrpSpPr>
-        <p:cNvPr id="1" name=""/>
-        <p:cNvGrpSpPr/>
-        <p:nvPr/>
-      </p:nvGrpSpPr>
-      <p:grpSpPr/>
-      <p:sp>
-        <p:nvSpPr>
-          <p:cNvPr id="2" name="Rounded Rectangle 1"/>
-          <p:cNvSpPr/>
-          <p:nvPr/>
-        </p:nvSpPr>
-        <p:spPr>
-          <a:xfrm>
-            <a:off x="0" y="0"/>
-            <a:ext cx="12191695" cy="1051560"/>
-          </a:xfrm>
-          <a:prstGeom prst="roundRect">
-            <a:avLst/>
-          </a:prstGeom>
-          <a:solidFill>
-            <a:srgbClr val="1F3A5F"/>
-          </a:solidFill>
-          <a:ln>
-            <a:noFill/>
-          </a:ln>
-        </p:spPr>
-        <p:style>
-          <a:lnRef idx="1">
-            <a:schemeClr val="accent1"/>
-          </a:lnRef>
-          <a:fillRef idx="3">
-            <a:schemeClr val="accent1"/>
-          </a:fillRef>
-          <a:effectRef idx="2">
-            <a:schemeClr val="accent1"/>
-          </a:effectRef>
-          <a:fontRef idx="minor">
-            <a:schemeClr val="lt1"/>
-          </a:fontRef>
-        </p:style>
-        <p:txBody>
-          <a:bodyPr rtlCol="0" anchor="ctr" wrap="square"/>
-          <a:lstStyle/>
-          <a:p>
-            <a:pPr algn="ctr"/>
-          </a:p>
-        </p:txBody>
-      </p:sp>
-      <p:sp>
-        <p:nvSpPr>
-          <p:cNvPr id="3" name="TextBox 2"/>
-          <p:cNvSpPr txBox="1"/>
-          <p:nvPr/>
-        </p:nvSpPr>
-        <p:spPr>
-          <a:xfrm>
-            <a:off x="457200" y="146304"/>
-            <a:ext cx="11247120" cy="777240"/>
-          </a:xfrm>
-          <a:prstGeom prst="rect">
-            <a:avLst/>
-          </a:prstGeom>
-          <a:noFill/>
-        </p:spPr>
-        <p:txBody>
-          <a:bodyPr wrap="square" anchor="ctr">
-            <a:spAutoFit/>
-          </a:bodyPr>
-          <a:lstStyle/>
-          <a:p>
-            <a:pPr algn="l"/>
-            <a:r>
-              <a:rPr sz="3400" b="1">
-                <a:solidFill>
-                  <a:srgbClr val="FFFFFF"/>
-                </a:solidFill>
-                <a:latin typeface="Arial"/>
-              </a:rPr>
-              <a:t>Graph setup</a:t>
-            </a:r>
-          </a:p>
-        </p:txBody>
-      </p:sp>
-      <p:sp>
-        <p:nvSpPr>
-          <p:cNvPr id="4" name="Rounded Rectangle 3"/>
-          <p:cNvSpPr/>
-          <p:nvPr/>
-        </p:nvSpPr>
-        <p:spPr>
-          <a:xfrm>
-            <a:off x="9692640" y="256032"/>
-            <a:ext cx="2194560" cy="548640"/>
-          </a:xfrm>
-          <a:prstGeom prst="roundRect">
-            <a:avLst/>
-          </a:prstGeom>
-          <a:solidFill>
-            <a:srgbClr val="C05014"/>
-          </a:solidFill>
-          <a:ln>
-            <a:noFill/>
-          </a:ln>
-        </p:spPr>
-        <p:style>
-          <a:lnRef idx="1">
-            <a:schemeClr val="accent1"/>
-          </a:lnRef>
-          <a:fillRef idx="3">
-            <a:schemeClr val="accent1"/>
-          </a:fillRef>
-          <a:effectRef idx="2">
-            <a:schemeClr val="accent1"/>
-          </a:effectRef>
-          <a:fontRef idx="minor">
-            <a:schemeClr val="lt1"/>
-          </a:fontRef>
-        </p:style>
-        <p:txBody>
-          <a:bodyPr rtlCol="0" anchor="ctr" wrap="square"/>
-          <a:lstStyle/>
-          <a:p>
-            <a:pPr algn="ctr"/>
-            <a:r>
-              <a:rPr sz="1400" b="1">
-                <a:solidFill>
-                  <a:srgbClr val="FFFFFF"/>
-                </a:solidFill>
-                <a:latin typeface="Arial"/>
-              </a:rPr>
-              <a:t>DRAW</a:t>
-            </a:r>
-          </a:p>
-        </p:txBody>
-      </p:sp>
-      <p:sp>
-        <p:nvSpPr>
-          <p:cNvPr id="5" name="Rounded Rectangle 4"/>
-          <p:cNvSpPr/>
-          <p:nvPr/>
-        </p:nvSpPr>
-        <p:spPr>
-          <a:xfrm>
-            <a:off x="1097280" y="2194560"/>
-            <a:ext cx="9966960" cy="1097280"/>
-          </a:xfrm>
-          <a:prstGeom prst="roundRect">
-            <a:avLst/>
-          </a:prstGeom>
-          <a:solidFill>
-            <a:srgbClr val="E8EDF4"/>
-          </a:solidFill>
-          <a:ln>
-            <a:noFill/>
-          </a:ln>
-        </p:spPr>
-        <p:style>
-          <a:lnRef idx="1">
-            <a:schemeClr val="accent1"/>
-          </a:lnRef>
-          <a:fillRef idx="3">
-            <a:schemeClr val="accent1"/>
-          </a:fillRef>
-          <a:effectRef idx="2">
-            <a:schemeClr val="accent1"/>
-          </a:effectRef>
-          <a:fontRef idx="minor">
-            <a:schemeClr val="lt1"/>
-          </a:fontRef>
-        </p:style>
-        <p:txBody>
-          <a:bodyPr rtlCol="0" anchor="ctr" wrap="square"/>
-          <a:lstStyle/>
-          <a:p>
-            <a:pPr algn="ctr"/>
-            <a:r>
-              <a:rPr sz="2600" b="1">
-                <a:solidFill>
-                  <a:srgbClr val="1F3A5F"/>
-                </a:solidFill>
-                <a:latin typeface="Arial"/>
-              </a:rPr>
-              <a:t>Ramp Height vs. Average Cup Displacement</a:t>
-            </a:r>
-          </a:p>
-        </p:txBody>
-      </p:sp>
-      <p:sp>
-        <p:nvSpPr>
-          <p:cNvPr id="6" name="TextBox 5"/>
-          <p:cNvSpPr txBox="1"/>
-          <p:nvPr/>
-        </p:nvSpPr>
-        <p:spPr>
-          <a:xfrm>
-            <a:off x="1097280" y="3566160"/>
-            <a:ext cx="10058400" cy="548640"/>
-          </a:xfrm>
-          <a:prstGeom prst="rect">
-            <a:avLst/>
-          </a:prstGeom>
-          <a:noFill/>
-        </p:spPr>
-        <p:txBody>
-          <a:bodyPr wrap="square" anchor="t">
-            <a:spAutoFit/>
-          </a:bodyPr>
-          <a:lstStyle/>
-          <a:p>
-            <a:pPr algn="l"/>
-            <a:r>
-              <a:rPr sz="2000" b="0">
-                <a:solidFill>
-                  <a:srgbClr val="555555"/>
-                </a:solidFill>
-                <a:latin typeface="Arial"/>
-              </a:rPr>
-              <a:t>X-axis: Ramp Height (books)    Y-axis: Average Cup Displacement (cm)</a:t>
-            </a:r>
-          </a:p>
-        </p:txBody>
-      </p:sp>
-      <p:sp>
-        <p:nvSpPr>
-          <p:cNvPr id="7" name="TextBox 6"/>
-          <p:cNvSpPr txBox="1"/>
-          <p:nvPr/>
-        </p:nvSpPr>
-        <p:spPr>
-          <a:xfrm>
-            <a:off x="1097280" y="4480560"/>
-            <a:ext cx="10058400" cy="640080"/>
-          </a:xfrm>
-          <a:prstGeom prst="rect">
-            <a:avLst/>
-          </a:prstGeom>
-          <a:noFill/>
-        </p:spPr>
-        <p:txBody>
-          <a:bodyPr wrap="square" anchor="t">
-            <a:spAutoFit/>
-          </a:bodyPr>
-          <a:lstStyle/>
-          <a:p>
-            <a:pPr algn="l"/>
-            <a:r>
-              <a:rPr sz="2200" b="1">
-                <a:solidFill>
-                  <a:srgbClr val="C05014"/>
-                </a:solidFill>
-                <a:latin typeface="Arial"/>
-              </a:rPr>
-              <a:t>NOT “Speed vs. Energy” — we did not measure speed or energy.</a:t>
-            </a:r>
-          </a:p>
-        </p:txBody>
-      </p:sp>
-      <p:sp>
-        <p:nvSpPr>
-          <p:cNvPr id="8" name="TextBox 7"/>
-          <p:cNvSpPr txBox="1"/>
-          <p:nvPr/>
-        </p:nvSpPr>
-        <p:spPr>
-          <a:xfrm>
-            <a:off x="11338560" y="6446520"/>
-            <a:ext cx="731520" cy="365760"/>
-          </a:xfrm>
-          <a:prstGeom prst="rect">
-            <a:avLst/>
-          </a:prstGeom>
-          <a:noFill/>
-        </p:spPr>
-        <p:txBody>
-          <a:bodyPr wrap="square" anchor="t">
-            <a:spAutoFit/>
-          </a:bodyPr>
-          <a:lstStyle/>
-          <a:p>
-            <a:pPr algn="r"/>
-            <a:r>
-              <a:rPr sz="1200" b="0">
-                <a:solidFill>
-                  <a:srgbClr val="555555"/>
-                </a:solidFill>
-                <a:latin typeface="Arial"/>
-              </a:rPr>
-              <a:t>18</a:t>
-            </a:r>
-          </a:p>
-        </p:txBody>
-      </p:sp>
-    </p:spTree>
-  </p:cSld>
-  <p:clrMapOvr>
-    <a:masterClrMapping/>
-  </p:clrMapOvr>
-</p:sld>
-</file>
-
-<file path=ppt/slides/slide19.xml><?xml version="1.0" encoding="utf-8"?>
-<p:sld xmlns:a="http://schemas.openxmlformats.org/drawingml/2006/main" xmlns:p="http://schemas.openxmlformats.org/presentationml/2006/main" xmlns:r="http://schemas.openxmlformats.org/officeDocument/2006/relationships">
-  <p:cSld>
-    <p:spTree>
-      <p:nvGrpSpPr>
-        <p:cNvPr id="1" name=""/>
-        <p:cNvGrpSpPr/>
-        <p:nvPr/>
-      </p:nvGrpSpPr>
-      <p:grpSpPr/>
-      <p:sp>
-        <p:nvSpPr>
-          <p:cNvPr id="2" name="Rounded Rectangle 1"/>
-          <p:cNvSpPr/>
-          <p:nvPr/>
-        </p:nvSpPr>
-        <p:spPr>
-          <a:xfrm>
-            <a:off x="0" y="0"/>
-            <a:ext cx="12191695" cy="1051560"/>
-          </a:xfrm>
-          <a:prstGeom prst="roundRect">
-            <a:avLst/>
-          </a:prstGeom>
-          <a:solidFill>
-            <a:srgbClr val="1F3A5F"/>
-          </a:solidFill>
-          <a:ln>
-            <a:noFill/>
-          </a:ln>
-        </p:spPr>
-        <p:style>
-          <a:lnRef idx="1">
-            <a:schemeClr val="accent1"/>
-          </a:lnRef>
-          <a:fillRef idx="3">
-            <a:schemeClr val="accent1"/>
-          </a:fillRef>
-          <a:effectRef idx="2">
-            <a:schemeClr val="accent1"/>
-          </a:effectRef>
-          <a:fontRef idx="minor">
-            <a:schemeClr val="lt1"/>
-          </a:fontRef>
-        </p:style>
-        <p:txBody>
-          <a:bodyPr rtlCol="0" anchor="ctr" wrap="square"/>
-          <a:lstStyle/>
-          <a:p>
-            <a:pPr algn="ctr"/>
-          </a:p>
-        </p:txBody>
-      </p:sp>
-      <p:sp>
-        <p:nvSpPr>
-          <p:cNvPr id="3" name="TextBox 2"/>
-          <p:cNvSpPr txBox="1"/>
-          <p:nvPr/>
-        </p:nvSpPr>
-        <p:spPr>
-          <a:xfrm>
-            <a:off x="457200" y="146304"/>
-            <a:ext cx="11247120" cy="777240"/>
-          </a:xfrm>
-          <a:prstGeom prst="rect">
-            <a:avLst/>
-          </a:prstGeom>
-          <a:noFill/>
-        </p:spPr>
-        <p:txBody>
-          <a:bodyPr wrap="square" anchor="ctr">
-            <a:spAutoFit/>
-          </a:bodyPr>
-          <a:lstStyle/>
-          <a:p>
-            <a:pPr algn="l"/>
-            <a:r>
-              <a:rPr sz="3400" b="1">
-                <a:solidFill>
-                  <a:srgbClr val="FFFFFF"/>
-                </a:solidFill>
-                <a:latin typeface="Arial"/>
-              </a:rPr>
-              <a:t>Graph interpretation</a:t>
-            </a:r>
-          </a:p>
-        </p:txBody>
-      </p:sp>
-      <p:sp>
-        <p:nvSpPr>
-          <p:cNvPr id="4" name="Rounded Rectangle 3"/>
-          <p:cNvSpPr/>
-          <p:nvPr/>
-        </p:nvSpPr>
-        <p:spPr>
-          <a:xfrm>
-            <a:off x="914400" y="2377440"/>
-            <a:ext cx="10332720" cy="1828800"/>
-          </a:xfrm>
-          <a:prstGeom prst="roundRect">
-            <a:avLst/>
-          </a:prstGeom>
-          <a:solidFill>
-            <a:srgbClr val="2E6B3F"/>
-          </a:solidFill>
-          <a:ln>
-            <a:noFill/>
-          </a:ln>
-        </p:spPr>
-        <p:style>
-          <a:lnRef idx="1">
-            <a:schemeClr val="accent1"/>
-          </a:lnRef>
-          <a:fillRef idx="3">
-            <a:schemeClr val="accent1"/>
-          </a:fillRef>
-          <a:effectRef idx="2">
-            <a:schemeClr val="accent1"/>
-          </a:effectRef>
-          <a:fontRef idx="minor">
-            <a:schemeClr val="lt1"/>
-          </a:fontRef>
-        </p:style>
-        <p:txBody>
-          <a:bodyPr rtlCol="0" anchor="ctr" wrap="square"/>
-          <a:lstStyle/>
-          <a:p>
-            <a:pPr algn="ctr"/>
-            <a:r>
-              <a:rPr sz="3000" b="1">
-                <a:solidFill>
-                  <a:srgbClr val="FFFFFF"/>
-                </a:solidFill>
-                <a:latin typeface="Arial"/>
-              </a:rPr>
-              <a:t>Higher ramp → the cup moved farther.</a:t>
-            </a:r>
-          </a:p>
-        </p:txBody>
-      </p:sp>
-      <p:sp>
-        <p:nvSpPr>
-          <p:cNvPr id="5" name="TextBox 4"/>
-          <p:cNvSpPr txBox="1"/>
-          <p:nvPr/>
-        </p:nvSpPr>
-        <p:spPr>
-          <a:xfrm>
-            <a:off x="11338560" y="6446520"/>
-            <a:ext cx="731520" cy="365760"/>
-          </a:xfrm>
-          <a:prstGeom prst="rect">
-            <a:avLst/>
-          </a:prstGeom>
-          <a:noFill/>
-        </p:spPr>
-        <p:txBody>
-          <a:bodyPr wrap="square" anchor="t">
-            <a:spAutoFit/>
-          </a:bodyPr>
-          <a:lstStyle/>
-          <a:p>
-            <a:pPr algn="r"/>
-            <a:r>
-              <a:rPr sz="1200" b="0">
-                <a:solidFill>
-                  <a:srgbClr val="555555"/>
-                </a:solidFill>
-                <a:latin typeface="Arial"/>
-              </a:rPr>
-              <a:t>19</a:t>
-            </a:r>
-          </a:p>
-        </p:txBody>
-      </p:sp>
-    </p:spTree>
-  </p:cSld>
-  <p:clrMapOvr>
-    <a:masterClrMapping/>
-  </p:clrMapOvr>
-</p:sld>
-</file>
-
-<file path=ppt/slides/slide2.xml><?xml version="1.0" encoding="utf-8"?>
-<p:sld xmlns:a="http://schemas.openxmlformats.org/drawingml/2006/main" xmlns:p="http://schemas.openxmlformats.org/presentationml/2006/main" xmlns:r="http://schemas.openxmlformats.org/officeDocument/2006/relationships">
-  <p:cSld>
-    <p:spTree>
-      <p:nvGrpSpPr>
-        <p:cNvPr id="1" name=""/>
-        <p:cNvGrpSpPr/>
-        <p:nvPr/>
-      </p:nvGrpSpPr>
-      <p:grpSpPr/>
-      <p:sp>
-        <p:nvSpPr>
-          <p:cNvPr id="2" name="Rounded Rectangle 1"/>
-          <p:cNvSpPr/>
-          <p:nvPr/>
-        </p:nvSpPr>
-        <p:spPr>
-          <a:xfrm>
-            <a:off x="0" y="0"/>
-            <a:ext cx="12191695" cy="1051560"/>
-          </a:xfrm>
-          <a:prstGeom prst="roundRect">
-            <a:avLst/>
-          </a:prstGeom>
-          <a:solidFill>
-            <a:srgbClr val="1F3A5F"/>
-          </a:solidFill>
-          <a:ln>
-            <a:noFill/>
-          </a:ln>
-        </p:spPr>
-        <p:style>
-          <a:lnRef idx="1">
-            <a:schemeClr val="accent1"/>
-          </a:lnRef>
-          <a:fillRef idx="3">
-            <a:schemeClr val="accent1"/>
-          </a:fillRef>
-          <a:effectRef idx="2">
-            <a:schemeClr val="accent1"/>
-          </a:effectRef>
-          <a:fontRef idx="minor">
-            <a:schemeClr val="lt1"/>
-          </a:fontRef>
-        </p:style>
-        <p:txBody>
-          <a:bodyPr rtlCol="0" anchor="ctr" wrap="square"/>
-          <a:lstStyle/>
-          <a:p>
-            <a:pPr algn="ctr"/>
-          </a:p>
-        </p:txBody>
-      </p:sp>
-      <p:sp>
-        <p:nvSpPr>
-          <p:cNvPr id="3" name="TextBox 2"/>
-          <p:cNvSpPr txBox="1"/>
-          <p:nvPr/>
-        </p:nvSpPr>
-        <p:spPr>
-          <a:xfrm>
-            <a:off x="457200" y="146304"/>
-            <a:ext cx="11247120" cy="777240"/>
-          </a:xfrm>
-          <a:prstGeom prst="rect">
-            <a:avLst/>
-          </a:prstGeom>
-          <a:noFill/>
-        </p:spPr>
-        <p:txBody>
-          <a:bodyPr wrap="square" anchor="ctr">
-            <a:spAutoFit/>
-          </a:bodyPr>
-          <a:lstStyle/>
-          <a:p>
-            <a:pPr algn="l"/>
-            <a:r>
-              <a:rPr sz="3400" b="1">
-                <a:solidFill>
-                  <a:srgbClr val="FFFFFF"/>
-                </a:solidFill>
-                <a:latin typeface="Arial"/>
-              </a:rPr>
-              <a:t>What changed?</a:t>
-            </a:r>
-          </a:p>
-        </p:txBody>
-      </p:sp>
-      <p:sp>
-        <p:nvSpPr>
-          <p:cNvPr id="4" name="Rounded Rectangle 3"/>
-          <p:cNvSpPr/>
-          <p:nvPr/>
-        </p:nvSpPr>
-        <p:spPr>
-          <a:xfrm>
-            <a:off x="914400" y="2103120"/>
-            <a:ext cx="4754880" cy="2194560"/>
-          </a:xfrm>
-          <a:prstGeom prst="roundRect">
-            <a:avLst/>
-          </a:prstGeom>
-          <a:solidFill>
-            <a:srgbClr val="E8EDF4"/>
-          </a:solidFill>
-          <a:ln>
-            <a:noFill/>
-          </a:ln>
-        </p:spPr>
-        <p:style>
-          <a:lnRef idx="1">
-            <a:schemeClr val="accent1"/>
-          </a:lnRef>
-          <a:fillRef idx="3">
-            <a:schemeClr val="accent1"/>
-          </a:fillRef>
-          <a:effectRef idx="2">
-            <a:schemeClr val="accent1"/>
-          </a:effectRef>
-          <a:fontRef idx="minor">
-            <a:schemeClr val="lt1"/>
-          </a:fontRef>
-        </p:style>
-        <p:txBody>
-          <a:bodyPr rtlCol="0" anchor="ctr" wrap="square"/>
-          <a:lstStyle/>
-          <a:p>
-            <a:pPr algn="ctr"/>
-            <a:r>
-              <a:rPr sz="2600" b="1">
-                <a:solidFill>
-                  <a:srgbClr val="1F3A5F"/>
-                </a:solidFill>
-                <a:latin typeface="Arial"/>
-              </a:rPr>
-              <a:t>SLOW roll
-cup moves a little</a:t>
-            </a:r>
-          </a:p>
-        </p:txBody>
-      </p:sp>
-      <p:sp>
-        <p:nvSpPr>
-          <p:cNvPr id="5" name="Right Arrow 4"/>
-          <p:cNvSpPr/>
-          <p:nvPr/>
-        </p:nvSpPr>
-        <p:spPr>
-          <a:xfrm>
-            <a:off x="5806440" y="2926080"/>
-            <a:ext cx="822960" cy="640080"/>
-          </a:xfrm>
-          <a:prstGeom prst="rightArrow">
-            <a:avLst/>
-          </a:prstGeom>
-          <a:solidFill>
-            <a:srgbClr val="C05014"/>
-          </a:solidFill>
-          <a:ln>
-            <a:noFill/>
-          </a:ln>
-        </p:spPr>
-        <p:style>
-          <a:lnRef idx="1">
-            <a:schemeClr val="accent1"/>
-          </a:lnRef>
-          <a:fillRef idx="3">
-            <a:schemeClr val="accent1"/>
-          </a:fillRef>
-          <a:effectRef idx="2">
-            <a:schemeClr val="accent1"/>
-          </a:effectRef>
-          <a:fontRef idx="minor">
-            <a:schemeClr val="lt1"/>
-          </a:fontRef>
-        </p:style>
-        <p:txBody>
-          <a:bodyPr rtlCol="0" anchor="ctr"/>
-          <a:lstStyle/>
-          <a:p>
-            <a:pPr algn="ctr"/>
-          </a:p>
-        </p:txBody>
-      </p:sp>
-      <p:sp>
-        <p:nvSpPr>
-          <p:cNvPr id="6" name="Rounded Rectangle 5"/>
-          <p:cNvSpPr/>
-          <p:nvPr/>
-        </p:nvSpPr>
-        <p:spPr>
-          <a:xfrm>
-            <a:off x="6766560" y="2103120"/>
-            <a:ext cx="4754880" cy="2194560"/>
-          </a:xfrm>
-          <a:prstGeom prst="roundRect">
-            <a:avLst/>
-          </a:prstGeom>
-          <a:solidFill>
-            <a:srgbClr val="C05014"/>
-          </a:solidFill>
-          <a:ln>
-            <a:noFill/>
-          </a:ln>
-        </p:spPr>
-        <p:style>
-          <a:lnRef idx="1">
-            <a:schemeClr val="accent1"/>
-          </a:lnRef>
-          <a:fillRef idx="3">
-            <a:schemeClr val="accent1"/>
-          </a:fillRef>
-          <a:effectRef idx="2">
-            <a:schemeClr val="accent1"/>
-          </a:effectRef>
-          <a:fontRef idx="minor">
-            <a:schemeClr val="lt1"/>
-          </a:fontRef>
-        </p:style>
-        <p:txBody>
-          <a:bodyPr rtlCol="0" anchor="ctr" wrap="square"/>
-          <a:lstStyle/>
-          <a:p>
-            <a:pPr algn="ctr"/>
-            <a:r>
-              <a:rPr sz="2600" b="1">
-                <a:solidFill>
-                  <a:srgbClr val="FFFFFF"/>
-                </a:solidFill>
-                <a:latin typeface="Arial"/>
-              </a:rPr>
-              <a:t>FASTER roll
-cup moves a lot</a:t>
-            </a:r>
-          </a:p>
-        </p:txBody>
-      </p:sp>
-      <p:sp>
-        <p:nvSpPr>
-          <p:cNvPr id="7" name="TextBox 6"/>
-          <p:cNvSpPr txBox="1"/>
-          <p:nvPr/>
-        </p:nvSpPr>
-        <p:spPr>
-          <a:xfrm>
-            <a:off x="914400" y="4846320"/>
-            <a:ext cx="10332720" cy="731520"/>
-          </a:xfrm>
-          <a:prstGeom prst="rect">
-            <a:avLst/>
-          </a:prstGeom>
-          <a:noFill/>
-        </p:spPr>
-        <p:txBody>
-          <a:bodyPr wrap="square" anchor="t">
-            <a:spAutoFit/>
-          </a:bodyPr>
-          <a:lstStyle/>
-          <a:p>
-            <a:pPr algn="ctr"/>
-            <a:r>
-              <a:rPr sz="2600" b="1">
-                <a:solidFill>
-                  <a:srgbClr val="1F3A5F"/>
-                </a:solidFill>
-                <a:latin typeface="Arial"/>
-              </a:rPr>
-              <a:t>The SAME ball, moving faster, caused a greater change.</a:t>
-            </a:r>
-          </a:p>
-        </p:txBody>
-      </p:sp>
-      <p:sp>
-        <p:nvSpPr>
-          <p:cNvPr id="8" name="TextBox 7"/>
-          <p:cNvSpPr txBox="1"/>
-          <p:nvPr/>
-        </p:nvSpPr>
-        <p:spPr>
-          <a:xfrm>
-            <a:off x="11338560" y="6446520"/>
-            <a:ext cx="731520" cy="365760"/>
-          </a:xfrm>
-          <a:prstGeom prst="rect">
-            <a:avLst/>
-          </a:prstGeom>
-          <a:noFill/>
-        </p:spPr>
-        <p:txBody>
-          <a:bodyPr wrap="square" anchor="t">
-            <a:spAutoFit/>
-          </a:bodyPr>
-          <a:lstStyle/>
-          <a:p>
-            <a:pPr algn="r"/>
-            <a:r>
-              <a:rPr sz="1200" b="0">
-                <a:solidFill>
-                  <a:srgbClr val="555555"/>
-                </a:solidFill>
-                <a:latin typeface="Arial"/>
-              </a:rPr>
-              <a:t>2</a:t>
-            </a:r>
-          </a:p>
-        </p:txBody>
-      </p:sp>
-    </p:spTree>
-  </p:cSld>
-  <p:clrMapOvr>
-    <a:masterClrMapping/>
-  </p:clrMapOvr>
-</p:sld>
-</file>
-
-<file path=ppt/slides/slide20.xml><?xml version="1.0" encoding="utf-8"?>
-<p:sld xmlns:a="http://schemas.openxmlformats.org/drawingml/2006/main" xmlns:p="http://schemas.openxmlformats.org/presentationml/2006/main" xmlns:r="http://schemas.openxmlformats.org/officeDocument/2006/relationships">
-  <p:cSld>
-    <p:spTree>
-      <p:nvGrpSpPr>
-        <p:cNvPr id="1" name=""/>
-        <p:cNvGrpSpPr/>
-        <p:nvPr/>
-      </p:nvGrpSpPr>
-      <p:grpSpPr/>
-      <p:sp>
-        <p:nvSpPr>
-          <p:cNvPr id="2" name="Rounded Rectangle 1"/>
-          <p:cNvSpPr/>
-          <p:nvPr/>
-        </p:nvSpPr>
-        <p:spPr>
-          <a:xfrm>
-            <a:off x="0" y="0"/>
-            <a:ext cx="12191695" cy="1051560"/>
-          </a:xfrm>
-          <a:prstGeom prst="roundRect">
-            <a:avLst/>
-          </a:prstGeom>
-          <a:solidFill>
-            <a:srgbClr val="1F3A5F"/>
-          </a:solidFill>
-          <a:ln>
-            <a:noFill/>
-          </a:ln>
-        </p:spPr>
-        <p:style>
-          <a:lnRef idx="1">
-            <a:schemeClr val="accent1"/>
-          </a:lnRef>
-          <a:fillRef idx="3">
-            <a:schemeClr val="accent1"/>
-          </a:fillRef>
-          <a:effectRef idx="2">
-            <a:schemeClr val="accent1"/>
-          </a:effectRef>
-          <a:fontRef idx="minor">
-            <a:schemeClr val="lt1"/>
-          </a:fontRef>
-        </p:style>
-        <p:txBody>
-          <a:bodyPr rtlCol="0" anchor="ctr" wrap="square"/>
-          <a:lstStyle/>
-          <a:p>
-            <a:pPr algn="ctr"/>
-          </a:p>
-        </p:txBody>
-      </p:sp>
-      <p:sp>
-        <p:nvSpPr>
-          <p:cNvPr id="3" name="TextBox 2"/>
-          <p:cNvSpPr txBox="1"/>
-          <p:nvPr/>
-        </p:nvSpPr>
-        <p:spPr>
-          <a:xfrm>
-            <a:off x="457200" y="146304"/>
-            <a:ext cx="11247120" cy="777240"/>
-          </a:xfrm>
-          <a:prstGeom prst="rect">
-            <a:avLst/>
-          </a:prstGeom>
-          <a:noFill/>
-        </p:spPr>
-        <p:txBody>
-          <a:bodyPr wrap="square" anchor="ctr">
-            <a:spAutoFit/>
-          </a:bodyPr>
-          <a:lstStyle/>
-          <a:p>
-            <a:pPr algn="l"/>
-            <a:r>
-              <a:rPr sz="3400" b="1">
-                <a:solidFill>
-                  <a:srgbClr val="FFFFFF"/>
-                </a:solidFill>
-                <a:latin typeface="Arial"/>
-              </a:rPr>
-              <a:t>Measured vs inferred</a:t>
-            </a:r>
-          </a:p>
-        </p:txBody>
-      </p:sp>
-      <p:sp>
-        <p:nvSpPr>
-          <p:cNvPr id="4" name="Rounded Rectangle 3"/>
-          <p:cNvSpPr/>
-          <p:nvPr/>
-        </p:nvSpPr>
-        <p:spPr>
-          <a:xfrm>
-            <a:off x="9692640" y="256032"/>
-            <a:ext cx="2194560" cy="548640"/>
-          </a:xfrm>
-          <a:prstGeom prst="roundRect">
-            <a:avLst/>
-          </a:prstGeom>
-          <a:solidFill>
-            <a:srgbClr val="C05014"/>
-          </a:solidFill>
-          <a:ln>
-            <a:noFill/>
-          </a:ln>
-        </p:spPr>
-        <p:style>
-          <a:lnRef idx="1">
-            <a:schemeClr val="accent1"/>
-          </a:lnRef>
-          <a:fillRef idx="3">
-            <a:schemeClr val="accent1"/>
-          </a:fillRef>
-          <a:effectRef idx="2">
-            <a:schemeClr val="accent1"/>
-          </a:effectRef>
-          <a:fontRef idx="minor">
-            <a:schemeClr val="lt1"/>
-          </a:fontRef>
-        </p:style>
-        <p:txBody>
-          <a:bodyPr rtlCol="0" anchor="ctr" wrap="square"/>
-          <a:lstStyle/>
-          <a:p>
-            <a:pPr algn="ctr"/>
-            <a:r>
-              <a:rPr sz="1400" b="1">
-                <a:solidFill>
-                  <a:srgbClr val="FFFFFF"/>
-                </a:solidFill>
-                <a:latin typeface="Arial"/>
-              </a:rPr>
-              <a:t>REVEAL</a:t>
-            </a:r>
-          </a:p>
-        </p:txBody>
-      </p:sp>
-      <p:sp>
-        <p:nvSpPr>
-          <p:cNvPr id="5" name="Rounded Rectangle 4"/>
-          <p:cNvSpPr/>
-          <p:nvPr/>
-        </p:nvSpPr>
-        <p:spPr>
-          <a:xfrm>
-            <a:off x="822960" y="2103120"/>
-            <a:ext cx="5029200" cy="2560320"/>
-          </a:xfrm>
-          <a:prstGeom prst="roundRect">
-            <a:avLst/>
-          </a:prstGeom>
-          <a:solidFill>
-            <a:srgbClr val="E8EDF4"/>
-          </a:solidFill>
-          <a:ln>
-            <a:noFill/>
-          </a:ln>
-        </p:spPr>
-        <p:style>
-          <a:lnRef idx="1">
-            <a:schemeClr val="accent1"/>
-          </a:lnRef>
-          <a:fillRef idx="3">
-            <a:schemeClr val="accent1"/>
-          </a:fillRef>
-          <a:effectRef idx="2">
-            <a:schemeClr val="accent1"/>
-          </a:effectRef>
-          <a:fontRef idx="minor">
-            <a:schemeClr val="lt1"/>
-          </a:fontRef>
-        </p:style>
-        <p:txBody>
-          <a:bodyPr rtlCol="0" anchor="ctr" wrap="square"/>
-          <a:lstStyle/>
-          <a:p>
-            <a:pPr algn="ctr"/>
-            <a:r>
-              <a:rPr sz="2200" b="1">
-                <a:solidFill>
-                  <a:srgbClr val="1F3A5F"/>
-                </a:solidFill>
-                <a:latin typeface="Arial"/>
-              </a:rPr>
-              <a:t>MEASURED
-ramp height (books)
-cup displacement (cm)</a:t>
-            </a:r>
-          </a:p>
-        </p:txBody>
-      </p:sp>
-      <p:sp>
-        <p:nvSpPr>
-          <p:cNvPr id="6" name="Rounded Rectangle 5"/>
-          <p:cNvSpPr/>
-          <p:nvPr/>
-        </p:nvSpPr>
-        <p:spPr>
-          <a:xfrm>
-            <a:off x="6309360" y="2103120"/>
-            <a:ext cx="5029200" cy="2560320"/>
-          </a:xfrm>
-          <a:prstGeom prst="roundRect">
-            <a:avLst/>
-          </a:prstGeom>
-          <a:solidFill>
-            <a:srgbClr val="2E6B3F"/>
-          </a:solidFill>
-          <a:ln>
-            <a:noFill/>
-          </a:ln>
-        </p:spPr>
-        <p:style>
-          <a:lnRef idx="1">
-            <a:schemeClr val="accent1"/>
-          </a:lnRef>
-          <a:fillRef idx="3">
-            <a:schemeClr val="accent1"/>
-          </a:fillRef>
-          <a:effectRef idx="2">
-            <a:schemeClr val="accent1"/>
-          </a:effectRef>
-          <a:fontRef idx="minor">
-            <a:schemeClr val="lt1"/>
-          </a:fontRef>
-        </p:style>
-        <p:txBody>
-          <a:bodyPr rtlCol="0" anchor="ctr" wrap="square"/>
-          <a:lstStyle/>
-          <a:p>
-            <a:pPr algn="ctr"/>
-            <a:r>
-              <a:rPr sz="2000" b="1">
-                <a:solidFill>
-                  <a:srgbClr val="FFFFFF"/>
-                </a:solidFill>
-                <a:latin typeface="Arial"/>
-              </a:rPr>
-              <a:t>INFERRED
-relative speed
-speed ↔ energy relationship</a:t>
-            </a:r>
-          </a:p>
-        </p:txBody>
-      </p:sp>
-      <p:sp>
-        <p:nvSpPr>
-          <p:cNvPr id="7" name="TextBox 6"/>
-          <p:cNvSpPr txBox="1"/>
-          <p:nvPr/>
-        </p:nvSpPr>
-        <p:spPr>
-          <a:xfrm>
-            <a:off x="822960" y="5029200"/>
-            <a:ext cx="10515600" cy="640080"/>
-          </a:xfrm>
-          <a:prstGeom prst="rect">
-            <a:avLst/>
-          </a:prstGeom>
-          <a:noFill/>
-        </p:spPr>
-        <p:txBody>
-          <a:bodyPr wrap="square" anchor="t">
-            <a:spAutoFit/>
-          </a:bodyPr>
-          <a:lstStyle/>
-          <a:p>
-            <a:pPr algn="ctr"/>
-            <a:r>
-              <a:rPr sz="2400" b="1">
-                <a:solidFill>
-                  <a:srgbClr val="C05014"/>
-                </a:solidFill>
-                <a:latin typeface="Arial"/>
-              </a:rPr>
-              <a:t>We did NOT measure speed or energy.</a:t>
-            </a:r>
-          </a:p>
-        </p:txBody>
-      </p:sp>
-      <p:sp>
-        <p:nvSpPr>
-          <p:cNvPr id="8" name="TextBox 7"/>
-          <p:cNvSpPr txBox="1"/>
-          <p:nvPr/>
-        </p:nvSpPr>
-        <p:spPr>
-          <a:xfrm>
-            <a:off x="11338560" y="6446520"/>
-            <a:ext cx="731520" cy="365760"/>
-          </a:xfrm>
-          <a:prstGeom prst="rect">
-            <a:avLst/>
-          </a:prstGeom>
-          <a:noFill/>
-        </p:spPr>
-        <p:txBody>
-          <a:bodyPr wrap="square" anchor="t">
-            <a:spAutoFit/>
-          </a:bodyPr>
-          <a:lstStyle/>
-          <a:p>
-            <a:pPr algn="r"/>
-            <a:r>
-              <a:rPr sz="1200" b="0">
-                <a:solidFill>
-                  <a:srgbClr val="555555"/>
-                </a:solidFill>
-                <a:latin typeface="Arial"/>
-              </a:rPr>
-              <a:t>20</a:t>
-            </a:r>
-          </a:p>
-        </p:txBody>
-      </p:sp>
-    </p:spTree>
-  </p:cSld>
-  <p:clrMapOvr>
-    <a:masterClrMapping/>
-  </p:clrMapOvr>
-</p:sld>
-</file>
-
-<file path=ppt/slides/slide21.xml><?xml version="1.0" encoding="utf-8"?>
-<p:sld xmlns:a="http://schemas.openxmlformats.org/drawingml/2006/main" xmlns:p="http://schemas.openxmlformats.org/presentationml/2006/main" xmlns:r="http://schemas.openxmlformats.org/officeDocument/2006/relationships">
-  <p:cSld>
-    <p:spTree>
-      <p:nvGrpSpPr>
-        <p:cNvPr id="1" name=""/>
-        <p:cNvGrpSpPr/>
-        <p:nvPr/>
-      </p:nvGrpSpPr>
-      <p:grpSpPr/>
-      <p:sp>
-        <p:nvSpPr>
-          <p:cNvPr id="2" name="Rounded Rectangle 1"/>
-          <p:cNvSpPr/>
-          <p:nvPr/>
-        </p:nvSpPr>
-        <p:spPr>
-          <a:xfrm>
-            <a:off x="0" y="0"/>
-            <a:ext cx="12191695" cy="1051560"/>
-          </a:xfrm>
-          <a:prstGeom prst="roundRect">
-            <a:avLst/>
-          </a:prstGeom>
-          <a:solidFill>
-            <a:srgbClr val="1F3A5F"/>
-          </a:solidFill>
-          <a:ln>
-            <a:noFill/>
-          </a:ln>
-        </p:spPr>
-        <p:style>
-          <a:lnRef idx="1">
-            <a:schemeClr val="accent1"/>
-          </a:lnRef>
-          <a:fillRef idx="3">
-            <a:schemeClr val="accent1"/>
-          </a:fillRef>
-          <a:effectRef idx="2">
-            <a:schemeClr val="accent1"/>
-          </a:effectRef>
-          <a:fontRef idx="minor">
-            <a:schemeClr val="lt1"/>
-          </a:fontRef>
-        </p:style>
-        <p:txBody>
-          <a:bodyPr rtlCol="0" anchor="ctr" wrap="square"/>
-          <a:lstStyle/>
-          <a:p>
-            <a:pPr algn="ctr"/>
-          </a:p>
-        </p:txBody>
-      </p:sp>
-      <p:sp>
-        <p:nvSpPr>
-          <p:cNvPr id="3" name="TextBox 2"/>
-          <p:cNvSpPr txBox="1"/>
-          <p:nvPr/>
-        </p:nvSpPr>
-        <p:spPr>
-          <a:xfrm>
-            <a:off x="457200" y="146304"/>
-            <a:ext cx="11247120" cy="777240"/>
-          </a:xfrm>
-          <a:prstGeom prst="rect">
-            <a:avLst/>
-          </a:prstGeom>
-          <a:noFill/>
-        </p:spPr>
-        <p:txBody>
-          <a:bodyPr wrap="square" anchor="ctr">
-            <a:spAutoFit/>
-          </a:bodyPr>
-          <a:lstStyle/>
-          <a:p>
-            <a:pPr algn="l"/>
-            <a:r>
-              <a:rPr sz="3400" b="1">
-                <a:solidFill>
-                  <a:srgbClr val="FFFFFF"/>
-                </a:solidFill>
-                <a:latin typeface="Arial"/>
-              </a:rPr>
-              <a:t>Reader connection</a:t>
-            </a:r>
-          </a:p>
-        </p:txBody>
-      </p:sp>
-      <p:sp>
-        <p:nvSpPr>
-          <p:cNvPr id="4" name="Rounded Rectangle 3"/>
-          <p:cNvSpPr/>
-          <p:nvPr/>
-        </p:nvSpPr>
-        <p:spPr>
-          <a:xfrm>
-            <a:off x="914400" y="2286000"/>
-            <a:ext cx="10332720" cy="2011680"/>
-          </a:xfrm>
-          <a:prstGeom prst="roundRect">
-            <a:avLst/>
-          </a:prstGeom>
-          <a:solidFill>
-            <a:srgbClr val="E8EDF4"/>
-          </a:solidFill>
-          <a:ln>
-            <a:noFill/>
-          </a:ln>
-        </p:spPr>
-        <p:style>
-          <a:lnRef idx="1">
-            <a:schemeClr val="accent1"/>
-          </a:lnRef>
-          <a:fillRef idx="3">
-            <a:schemeClr val="accent1"/>
-          </a:fillRef>
-          <a:effectRef idx="2">
-            <a:schemeClr val="accent1"/>
-          </a:effectRef>
-          <a:fontRef idx="minor">
-            <a:schemeClr val="lt1"/>
-          </a:fontRef>
-        </p:style>
-        <p:txBody>
-          <a:bodyPr rtlCol="0" anchor="ctr" wrap="square"/>
-          <a:lstStyle/>
-          <a:p>
-            <a:pPr algn="ctr"/>
-            <a:r>
-              <a:rPr sz="2800" b="1">
-                <a:solidFill>
-                  <a:srgbClr val="1F3A5F"/>
-                </a:solidFill>
-                <a:latin typeface="Arial"/>
-              </a:rPr>
-              <a:t>Greater speed → greater change → greater energy of motion.</a:t>
-            </a:r>
-          </a:p>
-        </p:txBody>
-      </p:sp>
-      <p:sp>
-        <p:nvSpPr>
-          <p:cNvPr id="5" name="TextBox 4"/>
-          <p:cNvSpPr txBox="1"/>
-          <p:nvPr/>
-        </p:nvSpPr>
-        <p:spPr>
-          <a:xfrm>
-            <a:off x="914400" y="4663440"/>
-            <a:ext cx="10332720" cy="640080"/>
-          </a:xfrm>
-          <a:prstGeom prst="rect">
-            <a:avLst/>
-          </a:prstGeom>
-          <a:noFill/>
-        </p:spPr>
-        <p:txBody>
-          <a:bodyPr wrap="square" anchor="t">
-            <a:spAutoFit/>
-          </a:bodyPr>
-          <a:lstStyle/>
-          <a:p>
-            <a:pPr algn="ctr"/>
-            <a:r>
-              <a:rPr sz="1800" b="0">
-                <a:solidFill>
-                  <a:srgbClr val="555555"/>
-                </a:solidFill>
-                <a:latin typeface="Arial"/>
-              </a:rPr>
-              <a:t>— Student Reader, pp. 13–16 (catch a ball · ramp/bucket · bounce)</a:t>
-            </a:r>
-          </a:p>
-        </p:txBody>
-      </p:sp>
-      <p:sp>
-        <p:nvSpPr>
-          <p:cNvPr id="6" name="TextBox 5"/>
-          <p:cNvSpPr txBox="1"/>
-          <p:nvPr/>
-        </p:nvSpPr>
-        <p:spPr>
-          <a:xfrm>
-            <a:off x="11338560" y="6446520"/>
-            <a:ext cx="731520" cy="365760"/>
-          </a:xfrm>
-          <a:prstGeom prst="rect">
-            <a:avLst/>
-          </a:prstGeom>
-          <a:noFill/>
-        </p:spPr>
-        <p:txBody>
-          <a:bodyPr wrap="square" anchor="t">
-            <a:spAutoFit/>
-          </a:bodyPr>
-          <a:lstStyle/>
-          <a:p>
-            <a:pPr algn="r"/>
-            <a:r>
-              <a:rPr sz="1200" b="0">
-                <a:solidFill>
-                  <a:srgbClr val="555555"/>
-                </a:solidFill>
-                <a:latin typeface="Arial"/>
-              </a:rPr>
-              <a:t>21</a:t>
-            </a:r>
-          </a:p>
-        </p:txBody>
-      </p:sp>
-    </p:spTree>
-  </p:cSld>
-  <p:clrMapOvr>
-    <a:masterClrMapping/>
-  </p:clrMapOvr>
-</p:sld>
-</file>
-
-<file path=ppt/slides/slide22.xml><?xml version="1.0" encoding="utf-8"?>
-<p:sld xmlns:a="http://schemas.openxmlformats.org/drawingml/2006/main" xmlns:p="http://schemas.openxmlformats.org/presentationml/2006/main" xmlns:r="http://schemas.openxmlformats.org/officeDocument/2006/relationships">
-  <p:cSld>
-    <p:spTree>
-      <p:nvGrpSpPr>
-        <p:cNvPr id="1" name=""/>
-        <p:cNvGrpSpPr/>
-        <p:nvPr/>
-      </p:nvGrpSpPr>
-      <p:grpSpPr/>
-      <p:sp>
-        <p:nvSpPr>
-          <p:cNvPr id="2" name="Rounded Rectangle 1"/>
-          <p:cNvSpPr/>
-          <p:nvPr/>
-        </p:nvSpPr>
-        <p:spPr>
-          <a:xfrm>
-            <a:off x="0" y="0"/>
-            <a:ext cx="12191695" cy="1051560"/>
-          </a:xfrm>
-          <a:prstGeom prst="roundRect">
-            <a:avLst/>
-          </a:prstGeom>
-          <a:solidFill>
-            <a:srgbClr val="1F3A5F"/>
-          </a:solidFill>
-          <a:ln>
-            <a:noFill/>
-          </a:ln>
-        </p:spPr>
-        <p:style>
-          <a:lnRef idx="1">
-            <a:schemeClr val="accent1"/>
-          </a:lnRef>
-          <a:fillRef idx="3">
-            <a:schemeClr val="accent1"/>
-          </a:fillRef>
-          <a:effectRef idx="2">
-            <a:schemeClr val="accent1"/>
-          </a:effectRef>
-          <a:fontRef idx="minor">
-            <a:schemeClr val="lt1"/>
-          </a:fontRef>
-        </p:style>
-        <p:txBody>
-          <a:bodyPr rtlCol="0" anchor="ctr" wrap="square"/>
-          <a:lstStyle/>
-          <a:p>
-            <a:pPr algn="ctr"/>
-          </a:p>
-        </p:txBody>
-      </p:sp>
-      <p:sp>
-        <p:nvSpPr>
-          <p:cNvPr id="3" name="TextBox 2"/>
-          <p:cNvSpPr txBox="1"/>
-          <p:nvPr/>
-        </p:nvSpPr>
-        <p:spPr>
-          <a:xfrm>
-            <a:off x="457200" y="146304"/>
-            <a:ext cx="11247120" cy="777240"/>
-          </a:xfrm>
-          <a:prstGeom prst="rect">
-            <a:avLst/>
-          </a:prstGeom>
-          <a:noFill/>
-        </p:spPr>
-        <p:txBody>
-          <a:bodyPr wrap="square" anchor="ctr">
-            <a:spAutoFit/>
-          </a:bodyPr>
-          <a:lstStyle/>
-          <a:p>
-            <a:pPr algn="l"/>
-            <a:r>
-              <a:rPr sz="3400" b="1">
-                <a:solidFill>
-                  <a:srgbClr val="FFFFFF"/>
-                </a:solidFill>
-                <a:latin typeface="Arial"/>
-              </a:rPr>
-              <a:t>Evidence statement</a:t>
-            </a:r>
-          </a:p>
-        </p:txBody>
-      </p:sp>
-      <p:sp>
-        <p:nvSpPr>
-          <p:cNvPr id="4" name="Rounded Rectangle 3"/>
-          <p:cNvSpPr/>
-          <p:nvPr/>
-        </p:nvSpPr>
-        <p:spPr>
-          <a:xfrm>
-            <a:off x="822960" y="2286000"/>
-            <a:ext cx="2743200" cy="1371600"/>
-          </a:xfrm>
-          <a:prstGeom prst="roundRect">
-            <a:avLst/>
-          </a:prstGeom>
-          <a:solidFill>
-            <a:srgbClr val="C05014"/>
-          </a:solidFill>
-          <a:ln>
-            <a:noFill/>
-          </a:ln>
-        </p:spPr>
-        <p:style>
-          <a:lnRef idx="1">
-            <a:schemeClr val="accent1"/>
-          </a:lnRef>
-          <a:fillRef idx="3">
-            <a:schemeClr val="accent1"/>
-          </a:fillRef>
-          <a:effectRef idx="2">
-            <a:schemeClr val="accent1"/>
-          </a:effectRef>
-          <a:fontRef idx="minor">
-            <a:schemeClr val="lt1"/>
-          </a:fontRef>
-        </p:style>
-        <p:txBody>
-          <a:bodyPr rtlCol="0" anchor="ctr" wrap="square"/>
-          <a:lstStyle/>
-          <a:p>
-            <a:pPr algn="ctr"/>
-            <a:r>
-              <a:rPr sz="2000" b="1">
-                <a:solidFill>
-                  <a:srgbClr val="FFFFFF"/>
-                </a:solidFill>
-                <a:latin typeface="Arial"/>
-              </a:rPr>
-              <a:t>SAME OBJECT</a:t>
-            </a:r>
-          </a:p>
-        </p:txBody>
-      </p:sp>
-      <p:sp>
-        <p:nvSpPr>
-          <p:cNvPr id="5" name="Right Arrow 4"/>
-          <p:cNvSpPr/>
-          <p:nvPr/>
-        </p:nvSpPr>
-        <p:spPr>
-          <a:xfrm>
-            <a:off x="3657600" y="2834640"/>
-            <a:ext cx="822960" cy="548640"/>
-          </a:xfrm>
-          <a:prstGeom prst="rightArrow">
-            <a:avLst/>
-          </a:prstGeom>
-          <a:solidFill>
-            <a:srgbClr val="C05014"/>
-          </a:solidFill>
-          <a:ln>
-            <a:noFill/>
-          </a:ln>
-        </p:spPr>
-        <p:style>
-          <a:lnRef idx="1">
-            <a:schemeClr val="accent1"/>
-          </a:lnRef>
-          <a:fillRef idx="3">
-            <a:schemeClr val="accent1"/>
-          </a:fillRef>
-          <a:effectRef idx="2">
-            <a:schemeClr val="accent1"/>
-          </a:effectRef>
-          <a:fontRef idx="minor">
-            <a:schemeClr val="lt1"/>
-          </a:fontRef>
-        </p:style>
-        <p:txBody>
-          <a:bodyPr rtlCol="0" anchor="ctr"/>
-          <a:lstStyle/>
-          <a:p>
-            <a:pPr algn="ctr"/>
-          </a:p>
-        </p:txBody>
-      </p:sp>
-      <p:sp>
-        <p:nvSpPr>
-          <p:cNvPr id="6" name="Rounded Rectangle 5"/>
-          <p:cNvSpPr/>
-          <p:nvPr/>
-        </p:nvSpPr>
-        <p:spPr>
-          <a:xfrm>
-            <a:off x="4572000" y="2286000"/>
-            <a:ext cx="2743200" cy="1371600"/>
-          </a:xfrm>
-          <a:prstGeom prst="roundRect">
-            <a:avLst/>
-          </a:prstGeom>
-          <a:solidFill>
-            <a:srgbClr val="E8EDF4"/>
-          </a:solidFill>
-          <a:ln>
-            <a:noFill/>
-          </a:ln>
-        </p:spPr>
-        <p:style>
-          <a:lnRef idx="1">
-            <a:schemeClr val="accent1"/>
-          </a:lnRef>
-          <a:fillRef idx="3">
-            <a:schemeClr val="accent1"/>
-          </a:fillRef>
-          <a:effectRef idx="2">
-            <a:schemeClr val="accent1"/>
-          </a:effectRef>
-          <a:fontRef idx="minor">
-            <a:schemeClr val="lt1"/>
-          </a:fontRef>
-        </p:style>
-        <p:txBody>
-          <a:bodyPr rtlCol="0" anchor="ctr" wrap="square"/>
-          <a:lstStyle/>
-          <a:p>
-            <a:pPr algn="ctr"/>
-            <a:r>
-              <a:rPr sz="2000" b="1">
-                <a:solidFill>
-                  <a:srgbClr val="1F3A5F"/>
-                </a:solidFill>
-                <a:latin typeface="Arial"/>
-              </a:rPr>
-              <a:t>FASTER MOTION</a:t>
-            </a:r>
-          </a:p>
-        </p:txBody>
-      </p:sp>
-      <p:sp>
-        <p:nvSpPr>
-          <p:cNvPr id="7" name="Right Arrow 6"/>
-          <p:cNvSpPr/>
-          <p:nvPr/>
-        </p:nvSpPr>
-        <p:spPr>
-          <a:xfrm>
-            <a:off x="7406640" y="2834640"/>
-            <a:ext cx="822960" cy="548640"/>
-          </a:xfrm>
-          <a:prstGeom prst="rightArrow">
-            <a:avLst/>
-          </a:prstGeom>
-          <a:solidFill>
-            <a:srgbClr val="C05014"/>
-          </a:solidFill>
-          <a:ln>
-            <a:noFill/>
-          </a:ln>
-        </p:spPr>
-        <p:style>
-          <a:lnRef idx="1">
-            <a:schemeClr val="accent1"/>
-          </a:lnRef>
-          <a:fillRef idx="3">
-            <a:schemeClr val="accent1"/>
-          </a:fillRef>
-          <a:effectRef idx="2">
-            <a:schemeClr val="accent1"/>
-          </a:effectRef>
-          <a:fontRef idx="minor">
-            <a:schemeClr val="lt1"/>
-          </a:fontRef>
-        </p:style>
-        <p:txBody>
-          <a:bodyPr rtlCol="0" anchor="ctr"/>
-          <a:lstStyle/>
-          <a:p>
-            <a:pPr algn="ctr"/>
-          </a:p>
-        </p:txBody>
-      </p:sp>
-      <p:sp>
-        <p:nvSpPr>
-          <p:cNvPr id="8" name="Rounded Rectangle 7"/>
-          <p:cNvSpPr/>
-          <p:nvPr/>
-        </p:nvSpPr>
-        <p:spPr>
-          <a:xfrm>
-            <a:off x="8321040" y="2286000"/>
-            <a:ext cx="3017520" cy="1371600"/>
-          </a:xfrm>
-          <a:prstGeom prst="roundRect">
-            <a:avLst/>
-          </a:prstGeom>
-          <a:solidFill>
-            <a:srgbClr val="2E6B3F"/>
-          </a:solidFill>
-          <a:ln>
-            <a:noFill/>
-          </a:ln>
-        </p:spPr>
-        <p:style>
-          <a:lnRef idx="1">
-            <a:schemeClr val="accent1"/>
-          </a:lnRef>
-          <a:fillRef idx="3">
-            <a:schemeClr val="accent1"/>
-          </a:fillRef>
-          <a:effectRef idx="2">
-            <a:schemeClr val="accent1"/>
-          </a:effectRef>
-          <a:fontRef idx="minor">
-            <a:schemeClr val="lt1"/>
-          </a:fontRef>
-        </p:style>
-        <p:txBody>
-          <a:bodyPr rtlCol="0" anchor="ctr" wrap="square"/>
-          <a:lstStyle/>
-          <a:p>
-            <a:pPr algn="ctr"/>
-            <a:r>
-              <a:rPr sz="1800" b="1">
-                <a:solidFill>
-                  <a:srgbClr val="FFFFFF"/>
-                </a:solidFill>
-                <a:latin typeface="Arial"/>
-              </a:rPr>
-              <a:t>GREATER CHANGE</a:t>
-            </a:r>
-          </a:p>
-        </p:txBody>
-      </p:sp>
-      <p:sp>
-        <p:nvSpPr>
-          <p:cNvPr id="9" name="TextBox 8"/>
-          <p:cNvSpPr txBox="1"/>
-          <p:nvPr/>
-        </p:nvSpPr>
-        <p:spPr>
-          <a:xfrm>
-            <a:off x="822960" y="4480560"/>
-            <a:ext cx="10515600" cy="822960"/>
-          </a:xfrm>
-          <a:prstGeom prst="rect">
-            <a:avLst/>
-          </a:prstGeom>
-          <a:noFill/>
-        </p:spPr>
-        <p:txBody>
-          <a:bodyPr wrap="square" anchor="t">
-            <a:spAutoFit/>
-          </a:bodyPr>
-          <a:lstStyle/>
-          <a:p>
-            <a:pPr algn="ctr"/>
-            <a:r>
-              <a:rPr sz="2400" b="1">
-                <a:solidFill>
-                  <a:srgbClr val="1F3A5F"/>
-                </a:solidFill>
-                <a:latin typeface="Arial"/>
-              </a:rPr>
-              <a:t>→ greater energy of motion</a:t>
-            </a:r>
-          </a:p>
-        </p:txBody>
-      </p:sp>
-      <p:sp>
-        <p:nvSpPr>
-          <p:cNvPr id="10" name="TextBox 9"/>
-          <p:cNvSpPr txBox="1"/>
-          <p:nvPr/>
-        </p:nvSpPr>
-        <p:spPr>
-          <a:xfrm>
-            <a:off x="11338560" y="6446520"/>
-            <a:ext cx="731520" cy="365760"/>
-          </a:xfrm>
-          <a:prstGeom prst="rect">
-            <a:avLst/>
-          </a:prstGeom>
-          <a:noFill/>
-        </p:spPr>
-        <p:txBody>
-          <a:bodyPr wrap="square" anchor="t">
-            <a:spAutoFit/>
-          </a:bodyPr>
-          <a:lstStyle/>
-          <a:p>
-            <a:pPr algn="r"/>
-            <a:r>
-              <a:rPr sz="1200" b="0">
-                <a:solidFill>
-                  <a:srgbClr val="555555"/>
-                </a:solidFill>
-                <a:latin typeface="Arial"/>
-              </a:rPr>
-              <a:t>22</a:t>
-            </a:r>
-          </a:p>
-        </p:txBody>
-      </p:sp>
-    </p:spTree>
-  </p:cSld>
-  <p:clrMapOvr>
-    <a:masterClrMapping/>
-  </p:clrMapOvr>
-</p:sld>
-</file>
-
-<file path=ppt/slides/slide23.xml><?xml version="1.0" encoding="utf-8"?>
-<p:sld xmlns:a="http://schemas.openxmlformats.org/drawingml/2006/main" xmlns:p="http://schemas.openxmlformats.org/presentationml/2006/main" xmlns:r="http://schemas.openxmlformats.org/officeDocument/2006/relationships">
-  <p:cSld>
-    <p:spTree>
-      <p:nvGrpSpPr>
-        <p:cNvPr id="1" name=""/>
-        <p:cNvGrpSpPr/>
-        <p:nvPr/>
-      </p:nvGrpSpPr>
-      <p:grpSpPr/>
-      <p:sp>
-        <p:nvSpPr>
-          <p:cNvPr id="2" name="Rounded Rectangle 1"/>
-          <p:cNvSpPr/>
-          <p:nvPr/>
-        </p:nvSpPr>
-        <p:spPr>
-          <a:xfrm>
-            <a:off x="0" y="0"/>
-            <a:ext cx="12191695" cy="1051560"/>
-          </a:xfrm>
-          <a:prstGeom prst="roundRect">
-            <a:avLst/>
-          </a:prstGeom>
-          <a:solidFill>
-            <a:srgbClr val="1F3A5F"/>
-          </a:solidFill>
-          <a:ln>
-            <a:noFill/>
-          </a:ln>
-        </p:spPr>
-        <p:style>
-          <a:lnRef idx="1">
-            <a:schemeClr val="accent1"/>
-          </a:lnRef>
-          <a:fillRef idx="3">
-            <a:schemeClr val="accent1"/>
-          </a:fillRef>
-          <a:effectRef idx="2">
-            <a:schemeClr val="accent1"/>
-          </a:effectRef>
-          <a:fontRef idx="minor">
-            <a:schemeClr val="lt1"/>
-          </a:fontRef>
-        </p:style>
-        <p:txBody>
-          <a:bodyPr rtlCol="0" anchor="ctr" wrap="square"/>
-          <a:lstStyle/>
-          <a:p>
-            <a:pPr algn="ctr"/>
-          </a:p>
-        </p:txBody>
-      </p:sp>
-      <p:sp>
-        <p:nvSpPr>
-          <p:cNvPr id="3" name="TextBox 2"/>
-          <p:cNvSpPr txBox="1"/>
-          <p:nvPr/>
-        </p:nvSpPr>
-        <p:spPr>
-          <a:xfrm>
-            <a:off x="457200" y="146304"/>
-            <a:ext cx="11247120" cy="777240"/>
-          </a:xfrm>
-          <a:prstGeom prst="rect">
-            <a:avLst/>
-          </a:prstGeom>
-          <a:noFill/>
-        </p:spPr>
-        <p:txBody>
-          <a:bodyPr wrap="square" anchor="ctr">
-            <a:spAutoFit/>
-          </a:bodyPr>
-          <a:lstStyle/>
-          <a:p>
-            <a:pPr algn="l"/>
-            <a:r>
-              <a:rPr sz="3400" b="1">
-                <a:solidFill>
-                  <a:srgbClr val="FFFFFF"/>
-                </a:solidFill>
-                <a:latin typeface="Arial"/>
-              </a:rPr>
-              <a:t>Misconception check</a:t>
-            </a:r>
-          </a:p>
-        </p:txBody>
-      </p:sp>
-      <p:sp>
-        <p:nvSpPr>
-          <p:cNvPr id="4" name="Rounded Rectangle 3"/>
-          <p:cNvSpPr/>
-          <p:nvPr/>
-        </p:nvSpPr>
-        <p:spPr>
-          <a:xfrm>
-            <a:off x="9692640" y="256032"/>
-            <a:ext cx="2194560" cy="548640"/>
-          </a:xfrm>
-          <a:prstGeom prst="roundRect">
-            <a:avLst/>
-          </a:prstGeom>
-          <a:solidFill>
-            <a:srgbClr val="C05014"/>
-          </a:solidFill>
-          <a:ln>
-            <a:noFill/>
-          </a:ln>
-        </p:spPr>
-        <p:style>
-          <a:lnRef idx="1">
-            <a:schemeClr val="accent1"/>
-          </a:lnRef>
-          <a:fillRef idx="3">
-            <a:schemeClr val="accent1"/>
-          </a:fillRef>
-          <a:effectRef idx="2">
-            <a:schemeClr val="accent1"/>
-          </a:effectRef>
-          <a:fontRef idx="minor">
-            <a:schemeClr val="lt1"/>
-          </a:fontRef>
-        </p:style>
-        <p:txBody>
-          <a:bodyPr rtlCol="0" anchor="ctr" wrap="square"/>
-          <a:lstStyle/>
-          <a:p>
-            <a:pPr algn="ctr"/>
-            <a:r>
-              <a:rPr sz="1400" b="1">
-                <a:solidFill>
-                  <a:srgbClr val="FFFFFF"/>
-                </a:solidFill>
-                <a:latin typeface="Arial"/>
-              </a:rPr>
-              <a:t>REVEAL</a:t>
-            </a:r>
-          </a:p>
-        </p:txBody>
-      </p:sp>
-      <p:sp>
-        <p:nvSpPr>
-          <p:cNvPr id="5" name="Rounded Rectangle 4"/>
-          <p:cNvSpPr/>
-          <p:nvPr/>
-        </p:nvSpPr>
-        <p:spPr>
-          <a:xfrm>
-            <a:off x="914400" y="2286000"/>
-            <a:ext cx="10332720" cy="1280160"/>
-          </a:xfrm>
-          <a:prstGeom prst="roundRect">
-            <a:avLst/>
-          </a:prstGeom>
-          <a:solidFill>
-            <a:srgbClr val="1F3A5F"/>
-          </a:solidFill>
-          <a:ln>
-            <a:noFill/>
-          </a:ln>
-        </p:spPr>
-        <p:style>
-          <a:lnRef idx="1">
-            <a:schemeClr val="accent1"/>
-          </a:lnRef>
-          <a:fillRef idx="3">
-            <a:schemeClr val="accent1"/>
-          </a:fillRef>
-          <a:effectRef idx="2">
-            <a:schemeClr val="accent1"/>
-          </a:effectRef>
-          <a:fontRef idx="minor">
-            <a:schemeClr val="lt1"/>
-          </a:fontRef>
-        </p:style>
-        <p:txBody>
-          <a:bodyPr rtlCol="0" anchor="ctr" wrap="square"/>
-          <a:lstStyle/>
-          <a:p>
-            <a:pPr algn="ctr"/>
-            <a:r>
-              <a:rPr sz="2800" b="1">
-                <a:solidFill>
-                  <a:srgbClr val="FFFFFF"/>
-                </a:solidFill>
-                <a:latin typeface="Arial"/>
-              </a:rPr>
-              <a:t>Did we directly measure speed or energy?</a:t>
-            </a:r>
-          </a:p>
-        </p:txBody>
-      </p:sp>
-      <p:sp>
-        <p:nvSpPr>
-          <p:cNvPr id="6" name="Rounded Rectangle 5"/>
-          <p:cNvSpPr/>
-          <p:nvPr/>
-        </p:nvSpPr>
-        <p:spPr>
-          <a:xfrm>
-            <a:off x="914400" y="3931920"/>
-            <a:ext cx="10332720" cy="1280160"/>
-          </a:xfrm>
-          <a:prstGeom prst="roundRect">
-            <a:avLst/>
-          </a:prstGeom>
-          <a:solidFill>
-            <a:srgbClr val="C05014"/>
-          </a:solidFill>
-          <a:ln>
-            <a:noFill/>
-          </a:ln>
-        </p:spPr>
-        <p:style>
-          <a:lnRef idx="1">
-            <a:schemeClr val="accent1"/>
-          </a:lnRef>
-          <a:fillRef idx="3">
-            <a:schemeClr val="accent1"/>
-          </a:fillRef>
-          <a:effectRef idx="2">
-            <a:schemeClr val="accent1"/>
-          </a:effectRef>
-          <a:fontRef idx="minor">
-            <a:schemeClr val="lt1"/>
-          </a:fontRef>
-        </p:style>
-        <p:txBody>
-          <a:bodyPr rtlCol="0" anchor="ctr" wrap="square"/>
-          <a:lstStyle/>
-          <a:p>
-            <a:pPr algn="ctr"/>
-            <a:r>
-              <a:rPr sz="2600" b="1">
-                <a:solidFill>
-                  <a:srgbClr val="FFFFFF"/>
-                </a:solidFill>
-                <a:latin typeface="Arial"/>
-              </a:rPr>
-              <a:t>NO — we measured the change and inferred the relationship.</a:t>
-            </a:r>
-          </a:p>
-        </p:txBody>
-      </p:sp>
-      <p:sp>
-        <p:nvSpPr>
-          <p:cNvPr id="7" name="TextBox 6"/>
-          <p:cNvSpPr txBox="1"/>
-          <p:nvPr/>
-        </p:nvSpPr>
-        <p:spPr>
-          <a:xfrm>
-            <a:off x="11338560" y="6446520"/>
-            <a:ext cx="731520" cy="365760"/>
-          </a:xfrm>
-          <a:prstGeom prst="rect">
-            <a:avLst/>
-          </a:prstGeom>
-          <a:noFill/>
-        </p:spPr>
-        <p:txBody>
-          <a:bodyPr wrap="square" anchor="t">
-            <a:spAutoFit/>
-          </a:bodyPr>
-          <a:lstStyle/>
-          <a:p>
-            <a:pPr algn="r"/>
-            <a:r>
-              <a:rPr sz="1200" b="0">
-                <a:solidFill>
-                  <a:srgbClr val="555555"/>
-                </a:solidFill>
-                <a:latin typeface="Arial"/>
-              </a:rPr>
-              <a:t>23</a:t>
-            </a:r>
-          </a:p>
-        </p:txBody>
-      </p:sp>
-    </p:spTree>
-  </p:cSld>
-  <p:clrMapOvr>
-    <a:masterClrMapping/>
-  </p:clrMapOvr>
-</p:sld>
-</file>
-
-<file path=ppt/slides/slide24.xml><?xml version="1.0" encoding="utf-8"?>
-<p:sld xmlns:a="http://schemas.openxmlformats.org/drawingml/2006/main" xmlns:p="http://schemas.openxmlformats.org/presentationml/2006/main" xmlns:r="http://schemas.openxmlformats.org/officeDocument/2006/relationships">
-  <p:cSld>
-    <p:spTree>
-      <p:nvGrpSpPr>
-        <p:cNvPr id="1" name=""/>
-        <p:cNvGrpSpPr/>
-        <p:nvPr/>
-      </p:nvGrpSpPr>
-      <p:grpSpPr/>
-      <p:sp>
-        <p:nvSpPr>
-          <p:cNvPr id="2" name="Rounded Rectangle 1"/>
-          <p:cNvSpPr/>
-          <p:nvPr/>
-        </p:nvSpPr>
-        <p:spPr>
-          <a:xfrm>
-            <a:off x="0" y="0"/>
-            <a:ext cx="12191695" cy="1051560"/>
-          </a:xfrm>
-          <a:prstGeom prst="roundRect">
-            <a:avLst/>
-          </a:prstGeom>
-          <a:solidFill>
-            <a:srgbClr val="1F3A5F"/>
-          </a:solidFill>
-          <a:ln>
-            <a:noFill/>
-          </a:ln>
-        </p:spPr>
-        <p:style>
-          <a:lnRef idx="1">
-            <a:schemeClr val="accent1"/>
-          </a:lnRef>
-          <a:fillRef idx="3">
-            <a:schemeClr val="accent1"/>
-          </a:fillRef>
-          <a:effectRef idx="2">
-            <a:schemeClr val="accent1"/>
-          </a:effectRef>
-          <a:fontRef idx="minor">
-            <a:schemeClr val="lt1"/>
-          </a:fontRef>
-        </p:style>
-        <p:txBody>
-          <a:bodyPr rtlCol="0" anchor="ctr" wrap="square"/>
-          <a:lstStyle/>
-          <a:p>
-            <a:pPr algn="ctr"/>
-          </a:p>
-        </p:txBody>
-      </p:sp>
-      <p:sp>
-        <p:nvSpPr>
-          <p:cNvPr id="3" name="TextBox 2"/>
-          <p:cNvSpPr txBox="1"/>
-          <p:nvPr/>
-        </p:nvSpPr>
-        <p:spPr>
-          <a:xfrm>
-            <a:off x="457200" y="146304"/>
-            <a:ext cx="11247120" cy="777240"/>
-          </a:xfrm>
-          <a:prstGeom prst="rect">
-            <a:avLst/>
-          </a:prstGeom>
-          <a:noFill/>
-        </p:spPr>
-        <p:txBody>
-          <a:bodyPr wrap="square" anchor="ctr">
-            <a:spAutoFit/>
-          </a:bodyPr>
-          <a:lstStyle/>
-          <a:p>
-            <a:pPr algn="l"/>
-            <a:r>
-              <a:rPr sz="3400" b="1">
-                <a:solidFill>
-                  <a:srgbClr val="FFFFFF"/>
-                </a:solidFill>
-                <a:latin typeface="Arial"/>
-              </a:rPr>
-              <a:t>Drop It — prediction</a:t>
-            </a:r>
-          </a:p>
-        </p:txBody>
-      </p:sp>
-      <p:sp>
-        <p:nvSpPr>
-          <p:cNvPr id="4" name="TextBox 3"/>
-          <p:cNvSpPr txBox="1"/>
-          <p:nvPr/>
-        </p:nvSpPr>
-        <p:spPr>
-          <a:xfrm>
-            <a:off x="502920" y="1170432"/>
-            <a:ext cx="11247120" cy="457200"/>
-          </a:xfrm>
-          <a:prstGeom prst="rect">
-            <a:avLst/>
-          </a:prstGeom>
-          <a:noFill/>
-        </p:spPr>
-        <p:txBody>
-          <a:bodyPr wrap="square" anchor="t">
-            <a:spAutoFit/>
-          </a:bodyPr>
-          <a:lstStyle/>
-          <a:p>
-            <a:pPr algn="l"/>
-            <a:r>
-              <a:rPr sz="1600" b="0">
-                <a:solidFill>
-                  <a:srgbClr val="555555"/>
-                </a:solidFill>
-                <a:latin typeface="Arial"/>
-              </a:rPr>
-              <a:t>Application</a:t>
-            </a:r>
-          </a:p>
-        </p:txBody>
-      </p:sp>
-      <p:sp>
-        <p:nvSpPr>
-          <p:cNvPr id="5" name="Rounded Rectangle 4"/>
-          <p:cNvSpPr/>
-          <p:nvPr/>
-        </p:nvSpPr>
-        <p:spPr>
-          <a:xfrm>
-            <a:off x="1097280" y="2377440"/>
-            <a:ext cx="9966960" cy="1828800"/>
-          </a:xfrm>
-          <a:prstGeom prst="roundRect">
-            <a:avLst/>
-          </a:prstGeom>
-          <a:solidFill>
-            <a:srgbClr val="E8EDF4"/>
-          </a:solidFill>
-          <a:ln>
-            <a:noFill/>
-          </a:ln>
-        </p:spPr>
-        <p:style>
-          <a:lnRef idx="1">
-            <a:schemeClr val="accent1"/>
-          </a:lnRef>
-          <a:fillRef idx="3">
-            <a:schemeClr val="accent1"/>
-          </a:fillRef>
-          <a:effectRef idx="2">
-            <a:schemeClr val="accent1"/>
-          </a:effectRef>
-          <a:fontRef idx="minor">
-            <a:schemeClr val="lt1"/>
-          </a:fontRef>
-        </p:style>
-        <p:txBody>
-          <a:bodyPr rtlCol="0" anchor="ctr" wrap="square"/>
-          <a:lstStyle/>
-          <a:p>
-            <a:pPr algn="ctr"/>
-            <a:r>
-              <a:rPr sz="2800" b="1">
-                <a:solidFill>
-                  <a:srgbClr val="1F3A5F"/>
-                </a:solidFill>
-                <a:latin typeface="Arial"/>
-              </a:rPr>
-              <a:t>At which height will the ball make the biggest crater?</a:t>
-            </a:r>
-          </a:p>
-        </p:txBody>
-      </p:sp>
-      <p:sp>
-        <p:nvSpPr>
-          <p:cNvPr id="6" name="TextBox 5"/>
-          <p:cNvSpPr txBox="1"/>
-          <p:nvPr/>
-        </p:nvSpPr>
-        <p:spPr>
-          <a:xfrm>
-            <a:off x="11338560" y="6446520"/>
-            <a:ext cx="731520" cy="365760"/>
-          </a:xfrm>
-          <a:prstGeom prst="rect">
-            <a:avLst/>
-          </a:prstGeom>
-          <a:noFill/>
-        </p:spPr>
-        <p:txBody>
-          <a:bodyPr wrap="square" anchor="t">
-            <a:spAutoFit/>
-          </a:bodyPr>
-          <a:lstStyle/>
-          <a:p>
-            <a:pPr algn="r"/>
-            <a:r>
-              <a:rPr sz="1200" b="0">
-                <a:solidFill>
-                  <a:srgbClr val="555555"/>
-                </a:solidFill>
-                <a:latin typeface="Arial"/>
-              </a:rPr>
-              <a:t>24</a:t>
-            </a:r>
-          </a:p>
-        </p:txBody>
-      </p:sp>
-    </p:spTree>
-  </p:cSld>
-  <p:clrMapOvr>
-    <a:masterClrMapping/>
-  </p:clrMapOvr>
-</p:sld>
-</file>
-
-<file path=ppt/slides/slide25.xml><?xml version="1.0" encoding="utf-8"?>
-<p:sld xmlns:a="http://schemas.openxmlformats.org/drawingml/2006/main" xmlns:p="http://schemas.openxmlformats.org/presentationml/2006/main" xmlns:r="http://schemas.openxmlformats.org/officeDocument/2006/relationships">
-  <p:cSld>
-    <p:spTree>
-      <p:nvGrpSpPr>
-        <p:cNvPr id="1" name=""/>
-        <p:cNvGrpSpPr/>
-        <p:nvPr/>
-      </p:nvGrpSpPr>
-      <p:grpSpPr/>
-      <p:sp>
-        <p:nvSpPr>
-          <p:cNvPr id="2" name="Rounded Rectangle 1"/>
-          <p:cNvSpPr/>
-          <p:nvPr/>
-        </p:nvSpPr>
-        <p:spPr>
-          <a:xfrm>
-            <a:off x="0" y="0"/>
-            <a:ext cx="12191695" cy="1051560"/>
-          </a:xfrm>
-          <a:prstGeom prst="roundRect">
-            <a:avLst/>
-          </a:prstGeom>
-          <a:solidFill>
-            <a:srgbClr val="1F3A5F"/>
-          </a:solidFill>
-          <a:ln>
-            <a:noFill/>
-          </a:ln>
-        </p:spPr>
-        <p:style>
-          <a:lnRef idx="1">
-            <a:schemeClr val="accent1"/>
-          </a:lnRef>
-          <a:fillRef idx="3">
-            <a:schemeClr val="accent1"/>
-          </a:fillRef>
-          <a:effectRef idx="2">
-            <a:schemeClr val="accent1"/>
-          </a:effectRef>
-          <a:fontRef idx="minor">
-            <a:schemeClr val="lt1"/>
-          </a:fontRef>
-        </p:style>
-        <p:txBody>
-          <a:bodyPr rtlCol="0" anchor="ctr" wrap="square"/>
-          <a:lstStyle/>
-          <a:p>
-            <a:pPr algn="ctr"/>
-          </a:p>
-        </p:txBody>
-      </p:sp>
-      <p:sp>
-        <p:nvSpPr>
-          <p:cNvPr id="3" name="TextBox 2"/>
-          <p:cNvSpPr txBox="1"/>
-          <p:nvPr/>
-        </p:nvSpPr>
-        <p:spPr>
-          <a:xfrm>
-            <a:off x="457200" y="146304"/>
-            <a:ext cx="11247120" cy="777240"/>
-          </a:xfrm>
-          <a:prstGeom prst="rect">
-            <a:avLst/>
-          </a:prstGeom>
-          <a:noFill/>
-        </p:spPr>
-        <p:txBody>
-          <a:bodyPr wrap="square" anchor="ctr">
-            <a:spAutoFit/>
-          </a:bodyPr>
-          <a:lstStyle/>
-          <a:p>
-            <a:pPr algn="l"/>
-            <a:r>
-              <a:rPr sz="3400" b="1">
-                <a:solidFill>
-                  <a:srgbClr val="FFFFFF"/>
-                </a:solidFill>
-                <a:latin typeface="Arial"/>
-              </a:rPr>
-              <a:t>Drop It — setup</a:t>
-            </a:r>
-          </a:p>
-        </p:txBody>
-      </p:sp>
-      <p:sp>
-        <p:nvSpPr>
-          <p:cNvPr id="4" name="TextBox 3"/>
-          <p:cNvSpPr txBox="1"/>
-          <p:nvPr/>
-        </p:nvSpPr>
-        <p:spPr>
-          <a:xfrm>
-            <a:off x="502920" y="1170432"/>
-            <a:ext cx="11247120" cy="457200"/>
-          </a:xfrm>
-          <a:prstGeom prst="rect">
-            <a:avLst/>
-          </a:prstGeom>
-          <a:noFill/>
-        </p:spPr>
-        <p:txBody>
-          <a:bodyPr wrap="square" anchor="t">
-            <a:spAutoFit/>
-          </a:bodyPr>
-          <a:lstStyle/>
-          <a:p>
-            <a:pPr algn="l"/>
-            <a:r>
-              <a:rPr sz="1600" b="0">
-                <a:solidFill>
-                  <a:srgbClr val="555555"/>
-                </a:solidFill>
-                <a:latin typeface="Arial"/>
-              </a:rPr>
-              <a:t>Application</a:t>
-            </a:r>
-          </a:p>
-        </p:txBody>
-      </p:sp>
-      <p:sp>
-        <p:nvSpPr>
-          <p:cNvPr id="5" name="Rounded Rectangle 4"/>
-          <p:cNvSpPr/>
-          <p:nvPr/>
-        </p:nvSpPr>
-        <p:spPr>
-          <a:xfrm>
-            <a:off x="1371600" y="2103120"/>
-            <a:ext cx="9418320" cy="914400"/>
-          </a:xfrm>
-          <a:prstGeom prst="roundRect">
-            <a:avLst/>
-          </a:prstGeom>
-          <a:solidFill>
-            <a:srgbClr val="E8EDF4"/>
-          </a:solidFill>
-          <a:ln>
-            <a:noFill/>
-          </a:ln>
-        </p:spPr>
-        <p:style>
-          <a:lnRef idx="1">
-            <a:schemeClr val="accent1"/>
-          </a:lnRef>
-          <a:fillRef idx="3">
-            <a:schemeClr val="accent1"/>
-          </a:fillRef>
-          <a:effectRef idx="2">
-            <a:schemeClr val="accent1"/>
-          </a:effectRef>
-          <a:fontRef idx="minor">
-            <a:schemeClr val="lt1"/>
-          </a:fontRef>
-        </p:style>
-        <p:txBody>
-          <a:bodyPr rtlCol="0" anchor="ctr" wrap="square"/>
-          <a:lstStyle/>
-          <a:p>
-            <a:pPr algn="l"/>
-            <a:r>
-              <a:rPr sz="2400" b="1">
-                <a:solidFill>
-                  <a:srgbClr val="1F3A5F"/>
-                </a:solidFill>
-                <a:latin typeface="Arial"/>
-              </a:rPr>
-              <a:t>•  Same ball · same sand tray</a:t>
-            </a:r>
-          </a:p>
-        </p:txBody>
-      </p:sp>
-      <p:sp>
-        <p:nvSpPr>
-          <p:cNvPr id="6" name="Rounded Rectangle 5"/>
-          <p:cNvSpPr/>
-          <p:nvPr/>
-        </p:nvSpPr>
-        <p:spPr>
-          <a:xfrm>
-            <a:off x="1371600" y="3291839"/>
-            <a:ext cx="9418320" cy="914400"/>
-          </a:xfrm>
-          <a:prstGeom prst="roundRect">
-            <a:avLst/>
-          </a:prstGeom>
-          <a:solidFill>
-            <a:srgbClr val="E8EDF4"/>
-          </a:solidFill>
-          <a:ln>
-            <a:noFill/>
-          </a:ln>
-        </p:spPr>
-        <p:style>
-          <a:lnRef idx="1">
-            <a:schemeClr val="accent1"/>
-          </a:lnRef>
-          <a:fillRef idx="3">
-            <a:schemeClr val="accent1"/>
-          </a:fillRef>
-          <a:effectRef idx="2">
-            <a:schemeClr val="accent1"/>
-          </a:effectRef>
-          <a:fontRef idx="minor">
-            <a:schemeClr val="lt1"/>
-          </a:fontRef>
-        </p:style>
-        <p:txBody>
-          <a:bodyPr rtlCol="0" anchor="ctr" wrap="square"/>
-          <a:lstStyle/>
-          <a:p>
-            <a:pPr algn="l"/>
-            <a:r>
-              <a:rPr sz="2400" b="1">
-                <a:solidFill>
-                  <a:srgbClr val="1F3A5F"/>
-                </a:solidFill>
-                <a:latin typeface="Arial"/>
-              </a:rPr>
-              <a:t>•  Fixed heights: 30 cm · 60 cm (optional 90 cm)</a:t>
-            </a:r>
-          </a:p>
-        </p:txBody>
-      </p:sp>
-      <p:sp>
-        <p:nvSpPr>
-          <p:cNvPr id="7" name="Rounded Rectangle 6"/>
-          <p:cNvSpPr/>
-          <p:nvPr/>
-        </p:nvSpPr>
-        <p:spPr>
-          <a:xfrm>
-            <a:off x="1371600" y="4480560"/>
-            <a:ext cx="9418320" cy="914400"/>
-          </a:xfrm>
-          <a:prstGeom prst="roundRect">
-            <a:avLst/>
-          </a:prstGeom>
-          <a:solidFill>
-            <a:srgbClr val="E8EDF4"/>
-          </a:solidFill>
-          <a:ln>
-            <a:noFill/>
-          </a:ln>
-        </p:spPr>
-        <p:style>
-          <a:lnRef idx="1">
-            <a:schemeClr val="accent1"/>
-          </a:lnRef>
-          <a:fillRef idx="3">
-            <a:schemeClr val="accent1"/>
-          </a:fillRef>
-          <a:effectRef idx="2">
-            <a:schemeClr val="accent1"/>
-          </a:effectRef>
-          <a:fontRef idx="minor">
-            <a:schemeClr val="lt1"/>
-          </a:fontRef>
-        </p:style>
-        <p:txBody>
-          <a:bodyPr rtlCol="0" anchor="ctr" wrap="square"/>
-          <a:lstStyle/>
-          <a:p>
-            <a:pPr algn="l"/>
-            <a:r>
-              <a:rPr sz="2400" b="1">
-                <a:solidFill>
-                  <a:srgbClr val="1F3A5F"/>
-                </a:solidFill>
-                <a:latin typeface="Arial"/>
-              </a:rPr>
-              <a:t>•  Measure crater width (cm) · depth = shallow/medium/deep</a:t>
-            </a:r>
-          </a:p>
-        </p:txBody>
-      </p:sp>
-      <p:sp>
-        <p:nvSpPr>
-          <p:cNvPr id="8" name="TextBox 7"/>
-          <p:cNvSpPr txBox="1"/>
-          <p:nvPr/>
-        </p:nvSpPr>
-        <p:spPr>
-          <a:xfrm>
-            <a:off x="11338560" y="6446520"/>
-            <a:ext cx="731520" cy="365760"/>
-          </a:xfrm>
-          <a:prstGeom prst="rect">
-            <a:avLst/>
-          </a:prstGeom>
-          <a:noFill/>
-        </p:spPr>
-        <p:txBody>
-          <a:bodyPr wrap="square" anchor="t">
-            <a:spAutoFit/>
-          </a:bodyPr>
-          <a:lstStyle/>
-          <a:p>
-            <a:pPr algn="r"/>
-            <a:r>
-              <a:rPr sz="1200" b="0">
-                <a:solidFill>
-                  <a:srgbClr val="555555"/>
-                </a:solidFill>
-                <a:latin typeface="Arial"/>
-              </a:rPr>
-              <a:t>25</a:t>
-            </a:r>
-          </a:p>
-        </p:txBody>
-      </p:sp>
-    </p:spTree>
-  </p:cSld>
-  <p:clrMapOvr>
-    <a:masterClrMapping/>
-  </p:clrMapOvr>
-</p:sld>
-</file>
-
-<file path=ppt/slides/slide26.xml><?xml version="1.0" encoding="utf-8"?>
-<p:sld xmlns:a="http://schemas.openxmlformats.org/drawingml/2006/main" xmlns:p="http://schemas.openxmlformats.org/presentationml/2006/main" xmlns:r="http://schemas.openxmlformats.org/officeDocument/2006/relationships">
-  <p:cSld>
-    <p:spTree>
-      <p:nvGrpSpPr>
-        <p:cNvPr id="1" name=""/>
-        <p:cNvGrpSpPr/>
-        <p:nvPr/>
-      </p:nvGrpSpPr>
-      <p:grpSpPr/>
-      <p:sp>
-        <p:nvSpPr>
-          <p:cNvPr id="2" name="Rounded Rectangle 1"/>
-          <p:cNvSpPr/>
-          <p:nvPr/>
-        </p:nvSpPr>
-        <p:spPr>
-          <a:xfrm>
-            <a:off x="0" y="0"/>
-            <a:ext cx="12191695" cy="1051560"/>
-          </a:xfrm>
-          <a:prstGeom prst="roundRect">
-            <a:avLst/>
-          </a:prstGeom>
-          <a:solidFill>
-            <a:srgbClr val="1F3A5F"/>
-          </a:solidFill>
-          <a:ln>
-            <a:noFill/>
-          </a:ln>
-        </p:spPr>
-        <p:style>
-          <a:lnRef idx="1">
-            <a:schemeClr val="accent1"/>
-          </a:lnRef>
-          <a:fillRef idx="3">
-            <a:schemeClr val="accent1"/>
-          </a:fillRef>
-          <a:effectRef idx="2">
-            <a:schemeClr val="accent1"/>
-          </a:effectRef>
-          <a:fontRef idx="minor">
-            <a:schemeClr val="lt1"/>
-          </a:fontRef>
-        </p:style>
-        <p:txBody>
-          <a:bodyPr rtlCol="0" anchor="ctr" wrap="square"/>
-          <a:lstStyle/>
-          <a:p>
-            <a:pPr algn="ctr"/>
-          </a:p>
-        </p:txBody>
-      </p:sp>
-      <p:sp>
-        <p:nvSpPr>
-          <p:cNvPr id="3" name="TextBox 2"/>
-          <p:cNvSpPr txBox="1"/>
-          <p:nvPr/>
-        </p:nvSpPr>
-        <p:spPr>
-          <a:xfrm>
-            <a:off x="457200" y="146304"/>
-            <a:ext cx="11247120" cy="777240"/>
-          </a:xfrm>
-          <a:prstGeom prst="rect">
-            <a:avLst/>
-          </a:prstGeom>
-          <a:noFill/>
-        </p:spPr>
-        <p:txBody>
-          <a:bodyPr wrap="square" anchor="ctr">
-            <a:spAutoFit/>
-          </a:bodyPr>
-          <a:lstStyle/>
-          <a:p>
-            <a:pPr algn="l"/>
-            <a:r>
-              <a:rPr sz="3400" b="1">
-                <a:solidFill>
-                  <a:srgbClr val="FFFFFF"/>
-                </a:solidFill>
-                <a:latin typeface="Arial"/>
-              </a:rPr>
-              <a:t>Drop It — evidence</a:t>
-            </a:r>
-          </a:p>
-        </p:txBody>
-      </p:sp>
-      <p:sp>
-        <p:nvSpPr>
-          <p:cNvPr id="4" name="Rounded Rectangle 3"/>
-          <p:cNvSpPr/>
-          <p:nvPr/>
-        </p:nvSpPr>
-        <p:spPr>
-          <a:xfrm>
-            <a:off x="914400" y="2377440"/>
-            <a:ext cx="10332720" cy="1828800"/>
-          </a:xfrm>
-          <a:prstGeom prst="roundRect">
-            <a:avLst/>
-          </a:prstGeom>
-          <a:solidFill>
-            <a:srgbClr val="2E6B3F"/>
-          </a:solidFill>
-          <a:ln>
-            <a:noFill/>
-          </a:ln>
-        </p:spPr>
-        <p:style>
-          <a:lnRef idx="1">
-            <a:schemeClr val="accent1"/>
-          </a:lnRef>
-          <a:fillRef idx="3">
-            <a:schemeClr val="accent1"/>
-          </a:fillRef>
-          <a:effectRef idx="2">
-            <a:schemeClr val="accent1"/>
-          </a:effectRef>
-          <a:fontRef idx="minor">
-            <a:schemeClr val="lt1"/>
-          </a:fontRef>
-        </p:style>
-        <p:txBody>
-          <a:bodyPr rtlCol="0" anchor="ctr" wrap="square"/>
-          <a:lstStyle/>
-          <a:p>
-            <a:pPr algn="ctr"/>
-            <a:r>
-              <a:rPr sz="2600" b="1">
-                <a:solidFill>
-                  <a:srgbClr val="FFFFFF"/>
-                </a:solidFill>
-                <a:latin typeface="Arial"/>
-              </a:rPr>
-              <a:t>Higher drop → faster → bigger crater → greater energy of motion.</a:t>
-            </a:r>
-          </a:p>
-        </p:txBody>
-      </p:sp>
-      <p:sp>
-        <p:nvSpPr>
-          <p:cNvPr id="5" name="TextBox 4"/>
-          <p:cNvSpPr txBox="1"/>
-          <p:nvPr/>
-        </p:nvSpPr>
-        <p:spPr>
-          <a:xfrm>
-            <a:off x="11338560" y="6446520"/>
-            <a:ext cx="731520" cy="365760"/>
-          </a:xfrm>
-          <a:prstGeom prst="rect">
-            <a:avLst/>
-          </a:prstGeom>
-          <a:noFill/>
-        </p:spPr>
-        <p:txBody>
-          <a:bodyPr wrap="square" anchor="t">
-            <a:spAutoFit/>
-          </a:bodyPr>
-          <a:lstStyle/>
-          <a:p>
-            <a:pPr algn="r"/>
-            <a:r>
-              <a:rPr sz="1200" b="0">
-                <a:solidFill>
-                  <a:srgbClr val="555555"/>
-                </a:solidFill>
-                <a:latin typeface="Arial"/>
-              </a:rPr>
-              <a:t>26</a:t>
-            </a:r>
-          </a:p>
-        </p:txBody>
-      </p:sp>
-    </p:spTree>
-  </p:cSld>
-  <p:clrMapOvr>
-    <a:masterClrMapping/>
-  </p:clrMapOvr>
-</p:sld>
-</file>
-
-<file path=ppt/slides/slide27.xml><?xml version="1.0" encoding="utf-8"?>
-<p:sld xmlns:a="http://schemas.openxmlformats.org/drawingml/2006/main" xmlns:p="http://schemas.openxmlformats.org/presentationml/2006/main" xmlns:r="http://schemas.openxmlformats.org/officeDocument/2006/relationships">
-  <p:cSld>
-    <p:spTree>
-      <p:nvGrpSpPr>
-        <p:cNvPr id="1" name=""/>
-        <p:cNvGrpSpPr/>
-        <p:nvPr/>
-      </p:nvGrpSpPr>
-      <p:grpSpPr/>
-      <p:sp>
-        <p:nvSpPr>
-          <p:cNvPr id="2" name="Rounded Rectangle 1"/>
-          <p:cNvSpPr/>
-          <p:nvPr/>
-        </p:nvSpPr>
-        <p:spPr>
-          <a:xfrm>
-            <a:off x="0" y="0"/>
-            <a:ext cx="12191695" cy="1051560"/>
-          </a:xfrm>
-          <a:prstGeom prst="roundRect">
-            <a:avLst/>
-          </a:prstGeom>
-          <a:solidFill>
-            <a:srgbClr val="1F3A5F"/>
-          </a:solidFill>
-          <a:ln>
-            <a:noFill/>
-          </a:ln>
-        </p:spPr>
-        <p:style>
-          <a:lnRef idx="1">
-            <a:schemeClr val="accent1"/>
-          </a:lnRef>
-          <a:fillRef idx="3">
-            <a:schemeClr val="accent1"/>
-          </a:fillRef>
-          <a:effectRef idx="2">
-            <a:schemeClr val="accent1"/>
-          </a:effectRef>
-          <a:fontRef idx="minor">
-            <a:schemeClr val="lt1"/>
-          </a:fontRef>
-        </p:style>
-        <p:txBody>
-          <a:bodyPr rtlCol="0" anchor="ctr" wrap="square"/>
-          <a:lstStyle/>
-          <a:p>
-            <a:pPr algn="ctr"/>
-          </a:p>
-        </p:txBody>
-      </p:sp>
-      <p:sp>
-        <p:nvSpPr>
-          <p:cNvPr id="3" name="TextBox 2"/>
-          <p:cNvSpPr txBox="1"/>
-          <p:nvPr/>
-        </p:nvSpPr>
-        <p:spPr>
-          <a:xfrm>
-            <a:off x="457200" y="146304"/>
-            <a:ext cx="11247120" cy="777240"/>
-          </a:xfrm>
-          <a:prstGeom prst="rect">
-            <a:avLst/>
-          </a:prstGeom>
-          <a:noFill/>
-        </p:spPr>
-        <p:txBody>
-          <a:bodyPr wrap="square" anchor="ctr">
-            <a:spAutoFit/>
-          </a:bodyPr>
-          <a:lstStyle/>
-          <a:p>
-            <a:pPr algn="l"/>
-            <a:r>
-              <a:rPr sz="3400" b="1">
-                <a:solidFill>
-                  <a:srgbClr val="FFFFFF"/>
-                </a:solidFill>
-                <a:latin typeface="Arial"/>
-              </a:rPr>
-              <a:t>Bring it together</a:t>
-            </a:r>
-          </a:p>
-        </p:txBody>
-      </p:sp>
-      <p:sp>
-        <p:nvSpPr>
-          <p:cNvPr id="4" name="Rounded Rectangle 3"/>
-          <p:cNvSpPr/>
-          <p:nvPr/>
-        </p:nvSpPr>
-        <p:spPr>
-          <a:xfrm>
-            <a:off x="822960" y="2286000"/>
-            <a:ext cx="2743200" cy="1371600"/>
-          </a:xfrm>
-          <a:prstGeom prst="roundRect">
-            <a:avLst/>
-          </a:prstGeom>
-          <a:solidFill>
-            <a:srgbClr val="C05014"/>
-          </a:solidFill>
-          <a:ln>
-            <a:noFill/>
-          </a:ln>
-        </p:spPr>
-        <p:style>
-          <a:lnRef idx="1">
-            <a:schemeClr val="accent1"/>
-          </a:lnRef>
-          <a:fillRef idx="3">
-            <a:schemeClr val="accent1"/>
-          </a:fillRef>
-          <a:effectRef idx="2">
-            <a:schemeClr val="accent1"/>
-          </a:effectRef>
-          <a:fontRef idx="minor">
-            <a:schemeClr val="lt1"/>
-          </a:fontRef>
-        </p:style>
-        <p:txBody>
-          <a:bodyPr rtlCol="0" anchor="ctr" wrap="square"/>
-          <a:lstStyle/>
-          <a:p>
-            <a:pPr algn="ctr"/>
-            <a:r>
-              <a:rPr sz="2000" b="1">
-                <a:solidFill>
-                  <a:srgbClr val="FFFFFF"/>
-                </a:solidFill>
-                <a:latin typeface="Arial"/>
-              </a:rPr>
-              <a:t>SAME OBJECT</a:t>
-            </a:r>
-          </a:p>
-        </p:txBody>
-      </p:sp>
-      <p:sp>
-        <p:nvSpPr>
-          <p:cNvPr id="5" name="Right Arrow 4"/>
-          <p:cNvSpPr/>
-          <p:nvPr/>
-        </p:nvSpPr>
-        <p:spPr>
-          <a:xfrm>
-            <a:off x="3657600" y="2834640"/>
-            <a:ext cx="822960" cy="548640"/>
-          </a:xfrm>
-          <a:prstGeom prst="rightArrow">
-            <a:avLst/>
-          </a:prstGeom>
-          <a:solidFill>
-            <a:srgbClr val="C05014"/>
-          </a:solidFill>
-          <a:ln>
-            <a:noFill/>
-          </a:ln>
-        </p:spPr>
-        <p:style>
-          <a:lnRef idx="1">
-            <a:schemeClr val="accent1"/>
-          </a:lnRef>
-          <a:fillRef idx="3">
-            <a:schemeClr val="accent1"/>
-          </a:fillRef>
-          <a:effectRef idx="2">
-            <a:schemeClr val="accent1"/>
-          </a:effectRef>
-          <a:fontRef idx="minor">
-            <a:schemeClr val="lt1"/>
-          </a:fontRef>
-        </p:style>
-        <p:txBody>
-          <a:bodyPr rtlCol="0" anchor="ctr"/>
-          <a:lstStyle/>
-          <a:p>
-            <a:pPr algn="ctr"/>
-          </a:p>
-        </p:txBody>
-      </p:sp>
-      <p:sp>
-        <p:nvSpPr>
-          <p:cNvPr id="6" name="Rounded Rectangle 5"/>
-          <p:cNvSpPr/>
-          <p:nvPr/>
-        </p:nvSpPr>
-        <p:spPr>
-          <a:xfrm>
-            <a:off x="4572000" y="2286000"/>
-            <a:ext cx="2743200" cy="1371600"/>
-          </a:xfrm>
-          <a:prstGeom prst="roundRect">
-            <a:avLst/>
-          </a:prstGeom>
-          <a:solidFill>
-            <a:srgbClr val="E8EDF4"/>
-          </a:solidFill>
-          <a:ln>
-            <a:noFill/>
-          </a:ln>
-        </p:spPr>
-        <p:style>
-          <a:lnRef idx="1">
-            <a:schemeClr val="accent1"/>
-          </a:lnRef>
-          <a:fillRef idx="3">
-            <a:schemeClr val="accent1"/>
-          </a:fillRef>
-          <a:effectRef idx="2">
-            <a:schemeClr val="accent1"/>
-          </a:effectRef>
-          <a:fontRef idx="minor">
-            <a:schemeClr val="lt1"/>
-          </a:fontRef>
-        </p:style>
-        <p:txBody>
-          <a:bodyPr rtlCol="0" anchor="ctr" wrap="square"/>
-          <a:lstStyle/>
-          <a:p>
-            <a:pPr algn="ctr"/>
-            <a:r>
-              <a:rPr sz="2000" b="1">
-                <a:solidFill>
-                  <a:srgbClr val="1F3A5F"/>
-                </a:solidFill>
-                <a:latin typeface="Arial"/>
-              </a:rPr>
-              <a:t>FASTER MOTION</a:t>
-            </a:r>
-          </a:p>
-        </p:txBody>
-      </p:sp>
-      <p:sp>
-        <p:nvSpPr>
-          <p:cNvPr id="7" name="Right Arrow 6"/>
-          <p:cNvSpPr/>
-          <p:nvPr/>
-        </p:nvSpPr>
-        <p:spPr>
-          <a:xfrm>
-            <a:off x="7406640" y="2834640"/>
-            <a:ext cx="822960" cy="548640"/>
-          </a:xfrm>
-          <a:prstGeom prst="rightArrow">
-            <a:avLst/>
-          </a:prstGeom>
-          <a:solidFill>
-            <a:srgbClr val="C05014"/>
-          </a:solidFill>
-          <a:ln>
-            <a:noFill/>
-          </a:ln>
-        </p:spPr>
-        <p:style>
-          <a:lnRef idx="1">
-            <a:schemeClr val="accent1"/>
-          </a:lnRef>
-          <a:fillRef idx="3">
-            <a:schemeClr val="accent1"/>
-          </a:fillRef>
-          <a:effectRef idx="2">
-            <a:schemeClr val="accent1"/>
-          </a:effectRef>
-          <a:fontRef idx="minor">
-            <a:schemeClr val="lt1"/>
-          </a:fontRef>
-        </p:style>
-        <p:txBody>
-          <a:bodyPr rtlCol="0" anchor="ctr"/>
-          <a:lstStyle/>
-          <a:p>
-            <a:pPr algn="ctr"/>
-          </a:p>
-        </p:txBody>
-      </p:sp>
-      <p:sp>
-        <p:nvSpPr>
-          <p:cNvPr id="8" name="Rounded Rectangle 7"/>
-          <p:cNvSpPr/>
-          <p:nvPr/>
-        </p:nvSpPr>
-        <p:spPr>
-          <a:xfrm>
-            <a:off x="8321040" y="2286000"/>
-            <a:ext cx="3017520" cy="1371600"/>
-          </a:xfrm>
-          <a:prstGeom prst="roundRect">
-            <a:avLst/>
-          </a:prstGeom>
-          <a:solidFill>
-            <a:srgbClr val="2E6B3F"/>
-          </a:solidFill>
-          <a:ln>
-            <a:noFill/>
-          </a:ln>
-        </p:spPr>
-        <p:style>
-          <a:lnRef idx="1">
-            <a:schemeClr val="accent1"/>
-          </a:lnRef>
-          <a:fillRef idx="3">
-            <a:schemeClr val="accent1"/>
-          </a:fillRef>
-          <a:effectRef idx="2">
-            <a:schemeClr val="accent1"/>
-          </a:effectRef>
-          <a:fontRef idx="minor">
-            <a:schemeClr val="lt1"/>
-          </a:fontRef>
-        </p:style>
-        <p:txBody>
-          <a:bodyPr rtlCol="0" anchor="ctr" wrap="square"/>
-          <a:lstStyle/>
-          <a:p>
-            <a:pPr algn="ctr"/>
-            <a:r>
-              <a:rPr sz="1800" b="1">
-                <a:solidFill>
-                  <a:srgbClr val="FFFFFF"/>
-                </a:solidFill>
-                <a:latin typeface="Arial"/>
-              </a:rPr>
-              <a:t>GREATER ENERGY</a:t>
-            </a:r>
-          </a:p>
-        </p:txBody>
-      </p:sp>
-      <p:sp>
-        <p:nvSpPr>
-          <p:cNvPr id="9" name="TextBox 8"/>
-          <p:cNvSpPr txBox="1"/>
-          <p:nvPr/>
-        </p:nvSpPr>
-        <p:spPr>
-          <a:xfrm>
-            <a:off x="822960" y="4480560"/>
-            <a:ext cx="10515600" cy="822960"/>
-          </a:xfrm>
-          <a:prstGeom prst="rect">
-            <a:avLst/>
-          </a:prstGeom>
-          <a:noFill/>
-        </p:spPr>
-        <p:txBody>
-          <a:bodyPr wrap="square" anchor="t">
-            <a:spAutoFit/>
-          </a:bodyPr>
-          <a:lstStyle/>
-          <a:p>
-            <a:pPr algn="ctr"/>
-            <a:r>
-              <a:rPr sz="2400" b="1">
-                <a:solidFill>
-                  <a:srgbClr val="1F3A5F"/>
-                </a:solidFill>
-                <a:latin typeface="Arial"/>
-              </a:rPr>
-              <a:t>…shown by a greater observed change.</a:t>
-            </a:r>
-          </a:p>
-        </p:txBody>
-      </p:sp>
-      <p:sp>
-        <p:nvSpPr>
-          <p:cNvPr id="10" name="TextBox 9"/>
-          <p:cNvSpPr txBox="1"/>
-          <p:nvPr/>
-        </p:nvSpPr>
-        <p:spPr>
-          <a:xfrm>
-            <a:off x="11338560" y="6446520"/>
-            <a:ext cx="731520" cy="365760"/>
-          </a:xfrm>
-          <a:prstGeom prst="rect">
-            <a:avLst/>
-          </a:prstGeom>
-          <a:noFill/>
-        </p:spPr>
-        <p:txBody>
-          <a:bodyPr wrap="square" anchor="t">
-            <a:spAutoFit/>
-          </a:bodyPr>
-          <a:lstStyle/>
-          <a:p>
-            <a:pPr algn="r"/>
-            <a:r>
-              <a:rPr sz="1200" b="0">
-                <a:solidFill>
-                  <a:srgbClr val="555555"/>
-                </a:solidFill>
-                <a:latin typeface="Arial"/>
-              </a:rPr>
-              <a:t>27</a:t>
-            </a:r>
-          </a:p>
-        </p:txBody>
-      </p:sp>
-    </p:spTree>
-  </p:cSld>
-  <p:clrMapOvr>
-    <a:masterClrMapping/>
-  </p:clrMapOvr>
-</p:sld>
-</file>
-
-<file path=ppt/slides/slide28.xml><?xml version="1.0" encoding="utf-8"?>
-<p:sld xmlns:a="http://schemas.openxmlformats.org/drawingml/2006/main" xmlns:p="http://schemas.openxmlformats.org/presentationml/2006/main" xmlns:r="http://schemas.openxmlformats.org/officeDocument/2006/relationships">
-  <p:cSld>
-    <p:spTree>
-      <p:nvGrpSpPr>
-        <p:cNvPr id="1" name=""/>
-        <p:cNvGrpSpPr/>
-        <p:nvPr/>
-      </p:nvGrpSpPr>
-      <p:grpSpPr/>
-      <p:sp>
-        <p:nvSpPr>
-          <p:cNvPr id="2" name="Rounded Rectangle 1"/>
-          <p:cNvSpPr/>
-          <p:nvPr/>
-        </p:nvSpPr>
-        <p:spPr>
-          <a:xfrm>
-            <a:off x="0" y="0"/>
-            <a:ext cx="12191695" cy="1051560"/>
-          </a:xfrm>
-          <a:prstGeom prst="roundRect">
-            <a:avLst/>
-          </a:prstGeom>
-          <a:solidFill>
-            <a:srgbClr val="1F3A5F"/>
-          </a:solidFill>
-          <a:ln>
-            <a:noFill/>
-          </a:ln>
-        </p:spPr>
-        <p:style>
-          <a:lnRef idx="1">
-            <a:schemeClr val="accent1"/>
-          </a:lnRef>
-          <a:fillRef idx="3">
-            <a:schemeClr val="accent1"/>
-          </a:fillRef>
-          <a:effectRef idx="2">
-            <a:schemeClr val="accent1"/>
-          </a:effectRef>
-          <a:fontRef idx="minor">
-            <a:schemeClr val="lt1"/>
-          </a:fontRef>
-        </p:style>
-        <p:txBody>
-          <a:bodyPr rtlCol="0" anchor="ctr" wrap="square"/>
-          <a:lstStyle/>
-          <a:p>
-            <a:pPr algn="ctr"/>
-          </a:p>
-        </p:txBody>
-      </p:sp>
-      <p:sp>
-        <p:nvSpPr>
-          <p:cNvPr id="3" name="TextBox 2"/>
-          <p:cNvSpPr txBox="1"/>
-          <p:nvPr/>
-        </p:nvSpPr>
-        <p:spPr>
-          <a:xfrm>
-            <a:off x="457200" y="146304"/>
-            <a:ext cx="11247120" cy="777240"/>
-          </a:xfrm>
-          <a:prstGeom prst="rect">
-            <a:avLst/>
-          </a:prstGeom>
-          <a:noFill/>
-        </p:spPr>
-        <p:txBody>
-          <a:bodyPr wrap="square" anchor="ctr">
-            <a:spAutoFit/>
-          </a:bodyPr>
-          <a:lstStyle/>
-          <a:p>
-            <a:pPr algn="l"/>
-            <a:r>
-              <a:rPr sz="3400" b="1">
-                <a:solidFill>
-                  <a:srgbClr val="FFFFFF"/>
-                </a:solidFill>
-                <a:latin typeface="Arial"/>
-              </a:rPr>
-              <a:t>Exit check</a:t>
-            </a:r>
-          </a:p>
-        </p:txBody>
-      </p:sp>
-      <p:sp>
-        <p:nvSpPr>
-          <p:cNvPr id="4" name="Rounded Rectangle 3"/>
-          <p:cNvSpPr/>
-          <p:nvPr/>
-        </p:nvSpPr>
-        <p:spPr>
-          <a:xfrm>
-            <a:off x="914400" y="2286000"/>
-            <a:ext cx="10332720" cy="1097280"/>
-          </a:xfrm>
-          <a:prstGeom prst="roundRect">
-            <a:avLst/>
-          </a:prstGeom>
-          <a:solidFill>
-            <a:srgbClr val="E8EDF4"/>
-          </a:solidFill>
-          <a:ln>
-            <a:noFill/>
-          </a:ln>
-        </p:spPr>
-        <p:style>
-          <a:lnRef idx="1">
-            <a:schemeClr val="accent1"/>
-          </a:lnRef>
-          <a:fillRef idx="3">
-            <a:schemeClr val="accent1"/>
-          </a:fillRef>
-          <a:effectRef idx="2">
-            <a:schemeClr val="accent1"/>
-          </a:effectRef>
-          <a:fontRef idx="minor">
-            <a:schemeClr val="lt1"/>
-          </a:fontRef>
-        </p:style>
-        <p:txBody>
-          <a:bodyPr rtlCol="0" anchor="ctr" wrap="square"/>
-          <a:lstStyle/>
-          <a:p>
-            <a:pPr algn="ctr"/>
-            <a:r>
-              <a:rPr sz="2600" b="1">
-                <a:solidFill>
-                  <a:srgbClr val="1F3A5F"/>
-                </a:solidFill>
-                <a:latin typeface="Arial"/>
-              </a:rPr>
-              <a:t>Name one thing we MEASURED and one thing we INFERRED.</a:t>
-            </a:r>
-          </a:p>
-        </p:txBody>
-      </p:sp>
-      <p:sp>
-        <p:nvSpPr>
-          <p:cNvPr id="5" name="TextBox 4"/>
-          <p:cNvSpPr txBox="1"/>
-          <p:nvPr/>
-        </p:nvSpPr>
-        <p:spPr>
-          <a:xfrm>
-            <a:off x="914400" y="4206240"/>
-            <a:ext cx="10332720" cy="822960"/>
-          </a:xfrm>
-          <a:prstGeom prst="rect">
-            <a:avLst/>
-          </a:prstGeom>
-          <a:noFill/>
-        </p:spPr>
-        <p:txBody>
-          <a:bodyPr wrap="square" anchor="t">
-            <a:spAutoFit/>
-          </a:bodyPr>
-          <a:lstStyle/>
-          <a:p>
-            <a:pPr algn="ctr"/>
-            <a:r>
-              <a:rPr sz="2400" b="0">
-                <a:solidFill>
-                  <a:srgbClr val="555555"/>
-                </a:solidFill>
-                <a:latin typeface="Arial"/>
-              </a:rPr>
-              <a:t>MEASURED: ___________    INFERRED: ___________</a:t>
-            </a:r>
-          </a:p>
-        </p:txBody>
-      </p:sp>
-      <p:sp>
-        <p:nvSpPr>
-          <p:cNvPr id="6" name="TextBox 5"/>
-          <p:cNvSpPr txBox="1"/>
-          <p:nvPr/>
-        </p:nvSpPr>
-        <p:spPr>
-          <a:xfrm>
-            <a:off x="11338560" y="6446520"/>
-            <a:ext cx="731520" cy="365760"/>
-          </a:xfrm>
-          <a:prstGeom prst="rect">
-            <a:avLst/>
-          </a:prstGeom>
-          <a:noFill/>
-        </p:spPr>
-        <p:txBody>
-          <a:bodyPr wrap="square" anchor="t">
-            <a:spAutoFit/>
-          </a:bodyPr>
-          <a:lstStyle/>
-          <a:p>
-            <a:pPr algn="r"/>
-            <a:r>
-              <a:rPr sz="1200" b="0">
-                <a:solidFill>
-                  <a:srgbClr val="555555"/>
-                </a:solidFill>
-                <a:latin typeface="Arial"/>
-              </a:rPr>
-              <a:t>28</a:t>
-            </a:r>
-          </a:p>
-        </p:txBody>
-      </p:sp>
-    </p:spTree>
-  </p:cSld>
-  <p:clrMapOvr>
-    <a:masterClrMapping/>
-  </p:clrMapOvr>
-</p:sld>
-</file>
-
-<file path=ppt/slides/slide29.xml><?xml version="1.0" encoding="utf-8"?>
-<p:sld xmlns:a="http://schemas.openxmlformats.org/drawingml/2006/main" xmlns:p="http://schemas.openxmlformats.org/presentationml/2006/main" xmlns:r="http://schemas.openxmlformats.org/officeDocument/2006/relationships">
-  <p:cSld>
-    <p:spTree>
-      <p:nvGrpSpPr>
-        <p:cNvPr id="1" name=""/>
-        <p:cNvGrpSpPr/>
-        <p:nvPr/>
-      </p:nvGrpSpPr>
-      <p:grpSpPr/>
-      <p:sp>
-        <p:nvSpPr>
           <p:cNvPr id="2" name="Title Bar"/>
           <p:cNvSpPr/>
           <p:nvPr/>
@@ -9311,6 +6068,3684 @@
                 <a:latin typeface="Arial"/>
               </a:rPr>
               <a:t>17</a:t>
+            </a:r>
+          </a:p>
+        </p:txBody>
+      </p:sp>
+    </p:spTree>
+  </p:cSld>
+  <p:clrMapOvr>
+    <a:masterClrMapping/>
+  </p:clrMapOvr>
+</p:sld>
+</file>
+
+<file path=ppt/slides/slide18.xml><?xml version="1.0" encoding="utf-8"?>
+<p:sld xmlns:a="http://schemas.openxmlformats.org/drawingml/2006/main" xmlns:p="http://schemas.openxmlformats.org/presentationml/2006/main" xmlns:r="http://schemas.openxmlformats.org/officeDocument/2006/relationships">
+  <p:cSld>
+    <p:spTree>
+      <p:nvGrpSpPr>
+        <p:cNvPr id="1" name=""/>
+        <p:cNvGrpSpPr/>
+        <p:nvPr/>
+      </p:nvGrpSpPr>
+      <p:grpSpPr/>
+      <p:sp>
+        <p:nvSpPr>
+          <p:cNvPr id="2" name="Rounded Rectangle 1"/>
+          <p:cNvSpPr/>
+          <p:nvPr/>
+        </p:nvSpPr>
+        <p:spPr>
+          <a:xfrm>
+            <a:off x="0" y="0"/>
+            <a:ext cx="12191695" cy="1051560"/>
+          </a:xfrm>
+          <a:prstGeom prst="roundRect">
+            <a:avLst/>
+          </a:prstGeom>
+          <a:solidFill>
+            <a:srgbClr val="1F3A5F"/>
+          </a:solidFill>
+          <a:ln>
+            <a:noFill/>
+          </a:ln>
+        </p:spPr>
+        <p:style>
+          <a:lnRef idx="1">
+            <a:schemeClr val="accent1"/>
+          </a:lnRef>
+          <a:fillRef idx="3">
+            <a:schemeClr val="accent1"/>
+          </a:fillRef>
+          <a:effectRef idx="2">
+            <a:schemeClr val="accent1"/>
+          </a:effectRef>
+          <a:fontRef idx="minor">
+            <a:schemeClr val="lt1"/>
+          </a:fontRef>
+        </p:style>
+        <p:txBody>
+          <a:bodyPr rtlCol="0" anchor="ctr" wrap="square"/>
+          <a:lstStyle/>
+          <a:p>
+            <a:pPr algn="ctr"/>
+          </a:p>
+        </p:txBody>
+      </p:sp>
+      <p:sp>
+        <p:nvSpPr>
+          <p:cNvPr id="3" name="TextBox 2"/>
+          <p:cNvSpPr txBox="1"/>
+          <p:nvPr/>
+        </p:nvSpPr>
+        <p:spPr>
+          <a:xfrm>
+            <a:off x="457200" y="146304"/>
+            <a:ext cx="11247120" cy="777240"/>
+          </a:xfrm>
+          <a:prstGeom prst="rect">
+            <a:avLst/>
+          </a:prstGeom>
+          <a:noFill/>
+        </p:spPr>
+        <p:txBody>
+          <a:bodyPr wrap="square" anchor="ctr">
+            <a:spAutoFit/>
+          </a:bodyPr>
+          <a:lstStyle/>
+          <a:p>
+            <a:pPr algn="l"/>
+            <a:r>
+              <a:rPr sz="3400" b="1">
+                <a:solidFill>
+                  <a:srgbClr val="FFFFFF"/>
+                </a:solidFill>
+                <a:latin typeface="Arial"/>
+              </a:rPr>
+              <a:t>Data table</a:t>
+            </a:r>
+          </a:p>
+        </p:txBody>
+      </p:sp>
+      <p:sp>
+        <p:nvSpPr>
+          <p:cNvPr id="4" name="Rounded Rectangle 3"/>
+          <p:cNvSpPr/>
+          <p:nvPr/>
+        </p:nvSpPr>
+        <p:spPr>
+          <a:xfrm>
+            <a:off x="9692640" y="256032"/>
+            <a:ext cx="2194560" cy="548640"/>
+          </a:xfrm>
+          <a:prstGeom prst="roundRect">
+            <a:avLst/>
+          </a:prstGeom>
+          <a:solidFill>
+            <a:srgbClr val="C05014"/>
+          </a:solidFill>
+          <a:ln>
+            <a:noFill/>
+          </a:ln>
+        </p:spPr>
+        <p:style>
+          <a:lnRef idx="1">
+            <a:schemeClr val="accent1"/>
+          </a:lnRef>
+          <a:fillRef idx="3">
+            <a:schemeClr val="accent1"/>
+          </a:fillRef>
+          <a:effectRef idx="2">
+            <a:schemeClr val="accent1"/>
+          </a:effectRef>
+          <a:fontRef idx="minor">
+            <a:schemeClr val="lt1"/>
+          </a:fontRef>
+        </p:style>
+        <p:txBody>
+          <a:bodyPr rtlCol="0" anchor="ctr" wrap="square"/>
+          <a:lstStyle/>
+          <a:p>
+            <a:pPr algn="ctr"/>
+            <a:r>
+              <a:rPr sz="1400" b="1">
+                <a:solidFill>
+                  <a:srgbClr val="FFFFFF"/>
+                </a:solidFill>
+                <a:latin typeface="Arial"/>
+              </a:rPr>
+              <a:t>WRITE</a:t>
+            </a:r>
+          </a:p>
+        </p:txBody>
+      </p:sp>
+      <p:sp>
+        <p:nvSpPr>
+          <p:cNvPr id="5" name="Rounded Rectangle 4"/>
+          <p:cNvSpPr/>
+          <p:nvPr/>
+        </p:nvSpPr>
+        <p:spPr>
+          <a:xfrm>
+            <a:off x="1097280" y="2194560"/>
+            <a:ext cx="9966960" cy="1005840"/>
+          </a:xfrm>
+          <a:prstGeom prst="roundRect">
+            <a:avLst/>
+          </a:prstGeom>
+          <a:solidFill>
+            <a:srgbClr val="E8EDF4"/>
+          </a:solidFill>
+          <a:ln>
+            <a:noFill/>
+          </a:ln>
+        </p:spPr>
+        <p:style>
+          <a:lnRef idx="1">
+            <a:schemeClr val="accent1"/>
+          </a:lnRef>
+          <a:fillRef idx="3">
+            <a:schemeClr val="accent1"/>
+          </a:fillRef>
+          <a:effectRef idx="2">
+            <a:schemeClr val="accent1"/>
+          </a:effectRef>
+          <a:fontRef idx="minor">
+            <a:schemeClr val="lt1"/>
+          </a:fontRef>
+        </p:style>
+        <p:txBody>
+          <a:bodyPr rtlCol="0" anchor="ctr" wrap="square"/>
+          <a:lstStyle/>
+          <a:p>
+            <a:pPr algn="ctr"/>
+            <a:r>
+              <a:rPr sz="2400" b="1">
+                <a:solidFill>
+                  <a:srgbClr val="1F3A5F"/>
+                </a:solidFill>
+                <a:latin typeface="Arial"/>
+              </a:rPr>
+              <a:t>Ramp Height | Trial 1 | Trial 2 | Trial 3 | Average (cm)</a:t>
+            </a:r>
+          </a:p>
+        </p:txBody>
+      </p:sp>
+      <p:sp>
+        <p:nvSpPr>
+          <p:cNvPr id="6" name="Rounded Rectangle 5"/>
+          <p:cNvSpPr/>
+          <p:nvPr/>
+        </p:nvSpPr>
+        <p:spPr>
+          <a:xfrm>
+            <a:off x="1097280" y="3566160"/>
+            <a:ext cx="9966960" cy="1005840"/>
+          </a:xfrm>
+          <a:prstGeom prst="roundRect">
+            <a:avLst/>
+          </a:prstGeom>
+          <a:solidFill>
+            <a:srgbClr val="E8EDF4"/>
+          </a:solidFill>
+          <a:ln>
+            <a:noFill/>
+          </a:ln>
+        </p:spPr>
+        <p:style>
+          <a:lnRef idx="1">
+            <a:schemeClr val="accent1"/>
+          </a:lnRef>
+          <a:fillRef idx="3">
+            <a:schemeClr val="accent1"/>
+          </a:fillRef>
+          <a:effectRef idx="2">
+            <a:schemeClr val="accent1"/>
+          </a:effectRef>
+          <a:fontRef idx="minor">
+            <a:schemeClr val="lt1"/>
+          </a:fontRef>
+        </p:style>
+        <p:txBody>
+          <a:bodyPr rtlCol="0" anchor="ctr" wrap="square"/>
+          <a:lstStyle/>
+          <a:p>
+            <a:pPr algn="ctr"/>
+            <a:r>
+              <a:rPr sz="2400" b="1">
+                <a:solidFill>
+                  <a:srgbClr val="1F3A5F"/>
+                </a:solidFill>
+                <a:latin typeface="Arial"/>
+              </a:rPr>
+              <a:t>1 book  ·  2 books  ·  3 books</a:t>
+            </a:r>
+          </a:p>
+        </p:txBody>
+      </p:sp>
+      <p:sp>
+        <p:nvSpPr>
+          <p:cNvPr id="7" name="TextBox 6"/>
+          <p:cNvSpPr txBox="1"/>
+          <p:nvPr/>
+        </p:nvSpPr>
+        <p:spPr>
+          <a:xfrm>
+            <a:off x="11338560" y="6446520"/>
+            <a:ext cx="731520" cy="365760"/>
+          </a:xfrm>
+          <a:prstGeom prst="rect">
+            <a:avLst/>
+          </a:prstGeom>
+          <a:noFill/>
+        </p:spPr>
+        <p:txBody>
+          <a:bodyPr wrap="square" anchor="t">
+            <a:spAutoFit/>
+          </a:bodyPr>
+          <a:lstStyle/>
+          <a:p>
+            <a:pPr algn="r"/>
+            <a:r>
+              <a:rPr sz="1200" b="0">
+                <a:solidFill>
+                  <a:srgbClr val="555555"/>
+                </a:solidFill>
+                <a:latin typeface="Arial"/>
+              </a:rPr>
+              <a:t>17</a:t>
+            </a:r>
+          </a:p>
+        </p:txBody>
+      </p:sp>
+    </p:spTree>
+  </p:cSld>
+  <p:clrMapOvr>
+    <a:masterClrMapping/>
+  </p:clrMapOvr>
+</p:sld>
+</file>
+
+<file path=ppt/slides/slide19.xml><?xml version="1.0" encoding="utf-8"?>
+<p:sld xmlns:a="http://schemas.openxmlformats.org/drawingml/2006/main" xmlns:p="http://schemas.openxmlformats.org/presentationml/2006/main" xmlns:r="http://schemas.openxmlformats.org/officeDocument/2006/relationships">
+  <p:cSld>
+    <p:spTree>
+      <p:nvGrpSpPr>
+        <p:cNvPr id="1" name=""/>
+        <p:cNvGrpSpPr/>
+        <p:nvPr/>
+      </p:nvGrpSpPr>
+      <p:grpSpPr/>
+      <p:sp>
+        <p:nvSpPr>
+          <p:cNvPr id="2" name="Rounded Rectangle 1"/>
+          <p:cNvSpPr/>
+          <p:nvPr/>
+        </p:nvSpPr>
+        <p:spPr>
+          <a:xfrm>
+            <a:off x="0" y="0"/>
+            <a:ext cx="12191695" cy="1051560"/>
+          </a:xfrm>
+          <a:prstGeom prst="roundRect">
+            <a:avLst/>
+          </a:prstGeom>
+          <a:solidFill>
+            <a:srgbClr val="1F3A5F"/>
+          </a:solidFill>
+          <a:ln>
+            <a:noFill/>
+          </a:ln>
+        </p:spPr>
+        <p:style>
+          <a:lnRef idx="1">
+            <a:schemeClr val="accent1"/>
+          </a:lnRef>
+          <a:fillRef idx="3">
+            <a:schemeClr val="accent1"/>
+          </a:fillRef>
+          <a:effectRef idx="2">
+            <a:schemeClr val="accent1"/>
+          </a:effectRef>
+          <a:fontRef idx="minor">
+            <a:schemeClr val="lt1"/>
+          </a:fontRef>
+        </p:style>
+        <p:txBody>
+          <a:bodyPr rtlCol="0" anchor="ctr" wrap="square"/>
+          <a:lstStyle/>
+          <a:p>
+            <a:pPr algn="ctr"/>
+          </a:p>
+        </p:txBody>
+      </p:sp>
+      <p:sp>
+        <p:nvSpPr>
+          <p:cNvPr id="3" name="TextBox 2"/>
+          <p:cNvSpPr txBox="1"/>
+          <p:nvPr/>
+        </p:nvSpPr>
+        <p:spPr>
+          <a:xfrm>
+            <a:off x="457200" y="146304"/>
+            <a:ext cx="11247120" cy="777240"/>
+          </a:xfrm>
+          <a:prstGeom prst="rect">
+            <a:avLst/>
+          </a:prstGeom>
+          <a:noFill/>
+        </p:spPr>
+        <p:txBody>
+          <a:bodyPr wrap="square" anchor="ctr">
+            <a:spAutoFit/>
+          </a:bodyPr>
+          <a:lstStyle/>
+          <a:p>
+            <a:pPr algn="l"/>
+            <a:r>
+              <a:rPr sz="3400" b="1">
+                <a:solidFill>
+                  <a:srgbClr val="FFFFFF"/>
+                </a:solidFill>
+                <a:latin typeface="Arial"/>
+              </a:rPr>
+              <a:t>Graph setup</a:t>
+            </a:r>
+          </a:p>
+        </p:txBody>
+      </p:sp>
+      <p:sp>
+        <p:nvSpPr>
+          <p:cNvPr id="4" name="Rounded Rectangle 3"/>
+          <p:cNvSpPr/>
+          <p:nvPr/>
+        </p:nvSpPr>
+        <p:spPr>
+          <a:xfrm>
+            <a:off x="9692640" y="256032"/>
+            <a:ext cx="2194560" cy="548640"/>
+          </a:xfrm>
+          <a:prstGeom prst="roundRect">
+            <a:avLst/>
+          </a:prstGeom>
+          <a:solidFill>
+            <a:srgbClr val="C05014"/>
+          </a:solidFill>
+          <a:ln>
+            <a:noFill/>
+          </a:ln>
+        </p:spPr>
+        <p:style>
+          <a:lnRef idx="1">
+            <a:schemeClr val="accent1"/>
+          </a:lnRef>
+          <a:fillRef idx="3">
+            <a:schemeClr val="accent1"/>
+          </a:fillRef>
+          <a:effectRef idx="2">
+            <a:schemeClr val="accent1"/>
+          </a:effectRef>
+          <a:fontRef idx="minor">
+            <a:schemeClr val="lt1"/>
+          </a:fontRef>
+        </p:style>
+        <p:txBody>
+          <a:bodyPr rtlCol="0" anchor="ctr" wrap="square"/>
+          <a:lstStyle/>
+          <a:p>
+            <a:pPr algn="ctr"/>
+            <a:r>
+              <a:rPr sz="1400" b="1">
+                <a:solidFill>
+                  <a:srgbClr val="FFFFFF"/>
+                </a:solidFill>
+                <a:latin typeface="Arial"/>
+              </a:rPr>
+              <a:t>DRAW</a:t>
+            </a:r>
+          </a:p>
+        </p:txBody>
+      </p:sp>
+      <p:sp>
+        <p:nvSpPr>
+          <p:cNvPr id="5" name="Rounded Rectangle 4"/>
+          <p:cNvSpPr/>
+          <p:nvPr/>
+        </p:nvSpPr>
+        <p:spPr>
+          <a:xfrm>
+            <a:off x="1097280" y="2194560"/>
+            <a:ext cx="9966960" cy="1097280"/>
+          </a:xfrm>
+          <a:prstGeom prst="roundRect">
+            <a:avLst/>
+          </a:prstGeom>
+          <a:solidFill>
+            <a:srgbClr val="E8EDF4"/>
+          </a:solidFill>
+          <a:ln>
+            <a:noFill/>
+          </a:ln>
+        </p:spPr>
+        <p:style>
+          <a:lnRef idx="1">
+            <a:schemeClr val="accent1"/>
+          </a:lnRef>
+          <a:fillRef idx="3">
+            <a:schemeClr val="accent1"/>
+          </a:fillRef>
+          <a:effectRef idx="2">
+            <a:schemeClr val="accent1"/>
+          </a:effectRef>
+          <a:fontRef idx="minor">
+            <a:schemeClr val="lt1"/>
+          </a:fontRef>
+        </p:style>
+        <p:txBody>
+          <a:bodyPr rtlCol="0" anchor="ctr" wrap="square"/>
+          <a:lstStyle/>
+          <a:p>
+            <a:pPr algn="ctr"/>
+            <a:r>
+              <a:rPr sz="2600" b="1">
+                <a:solidFill>
+                  <a:srgbClr val="1F3A5F"/>
+                </a:solidFill>
+                <a:latin typeface="Arial"/>
+              </a:rPr>
+              <a:t>Ramp Height vs. Average Cup Displacement</a:t>
+            </a:r>
+          </a:p>
+        </p:txBody>
+      </p:sp>
+      <p:sp>
+        <p:nvSpPr>
+          <p:cNvPr id="6" name="TextBox 5"/>
+          <p:cNvSpPr txBox="1"/>
+          <p:nvPr/>
+        </p:nvSpPr>
+        <p:spPr>
+          <a:xfrm>
+            <a:off x="1097280" y="3566160"/>
+            <a:ext cx="10058400" cy="548640"/>
+          </a:xfrm>
+          <a:prstGeom prst="rect">
+            <a:avLst/>
+          </a:prstGeom>
+          <a:noFill/>
+        </p:spPr>
+        <p:txBody>
+          <a:bodyPr wrap="square" anchor="t">
+            <a:spAutoFit/>
+          </a:bodyPr>
+          <a:lstStyle/>
+          <a:p>
+            <a:pPr algn="l"/>
+            <a:r>
+              <a:rPr sz="2000" b="0">
+                <a:solidFill>
+                  <a:srgbClr val="555555"/>
+                </a:solidFill>
+                <a:latin typeface="Arial"/>
+              </a:rPr>
+              <a:t>X-axis: Ramp Height (books)    Y-axis: Average Cup Displacement (cm)</a:t>
+            </a:r>
+          </a:p>
+        </p:txBody>
+      </p:sp>
+      <p:sp>
+        <p:nvSpPr>
+          <p:cNvPr id="7" name="TextBox 6"/>
+          <p:cNvSpPr txBox="1"/>
+          <p:nvPr/>
+        </p:nvSpPr>
+        <p:spPr>
+          <a:xfrm>
+            <a:off x="1097280" y="4480560"/>
+            <a:ext cx="10058400" cy="640080"/>
+          </a:xfrm>
+          <a:prstGeom prst="rect">
+            <a:avLst/>
+          </a:prstGeom>
+          <a:noFill/>
+        </p:spPr>
+        <p:txBody>
+          <a:bodyPr wrap="square" anchor="t">
+            <a:spAutoFit/>
+          </a:bodyPr>
+          <a:lstStyle/>
+          <a:p>
+            <a:pPr algn="l"/>
+            <a:r>
+              <a:rPr sz="2200" b="1">
+                <a:solidFill>
+                  <a:srgbClr val="C05014"/>
+                </a:solidFill>
+                <a:latin typeface="Arial"/>
+              </a:rPr>
+              <a:t>NOT “Speed vs. Energy” — we did not measure speed or energy.</a:t>
+            </a:r>
+          </a:p>
+        </p:txBody>
+      </p:sp>
+      <p:sp>
+        <p:nvSpPr>
+          <p:cNvPr id="8" name="TextBox 7"/>
+          <p:cNvSpPr txBox="1"/>
+          <p:nvPr/>
+        </p:nvSpPr>
+        <p:spPr>
+          <a:xfrm>
+            <a:off x="11338560" y="6446520"/>
+            <a:ext cx="731520" cy="365760"/>
+          </a:xfrm>
+          <a:prstGeom prst="rect">
+            <a:avLst/>
+          </a:prstGeom>
+          <a:noFill/>
+        </p:spPr>
+        <p:txBody>
+          <a:bodyPr wrap="square" anchor="t">
+            <a:spAutoFit/>
+          </a:bodyPr>
+          <a:lstStyle/>
+          <a:p>
+            <a:pPr algn="r"/>
+            <a:r>
+              <a:rPr sz="1200" b="0">
+                <a:solidFill>
+                  <a:srgbClr val="555555"/>
+                </a:solidFill>
+                <a:latin typeface="Arial"/>
+              </a:rPr>
+              <a:t>18</a:t>
+            </a:r>
+          </a:p>
+        </p:txBody>
+      </p:sp>
+    </p:spTree>
+  </p:cSld>
+  <p:clrMapOvr>
+    <a:masterClrMapping/>
+  </p:clrMapOvr>
+</p:sld>
+</file>
+
+<file path=ppt/slides/slide2.xml><?xml version="1.0" encoding="utf-8"?>
+<p:sld xmlns:a="http://schemas.openxmlformats.org/drawingml/2006/main" xmlns:p="http://schemas.openxmlformats.org/presentationml/2006/main" xmlns:r="http://schemas.openxmlformats.org/officeDocument/2006/relationships">
+  <p:cSld>
+    <p:spTree>
+      <p:nvGrpSpPr>
+        <p:cNvPr id="1" name=""/>
+        <p:cNvGrpSpPr/>
+        <p:nvPr/>
+      </p:nvGrpSpPr>
+      <p:grpSpPr/>
+      <p:sp>
+        <p:nvSpPr>
+          <p:cNvPr id="2" name="Rounded Rectangle 1"/>
+          <p:cNvSpPr/>
+          <p:nvPr/>
+        </p:nvSpPr>
+        <p:spPr>
+          <a:xfrm>
+            <a:off x="0" y="0"/>
+            <a:ext cx="12191695" cy="1051560"/>
+          </a:xfrm>
+          <a:prstGeom prst="roundRect">
+            <a:avLst/>
+          </a:prstGeom>
+          <a:solidFill>
+            <a:srgbClr val="1F3A5F"/>
+          </a:solidFill>
+          <a:ln>
+            <a:noFill/>
+          </a:ln>
+        </p:spPr>
+        <p:style>
+          <a:lnRef idx="1">
+            <a:schemeClr val="accent1"/>
+          </a:lnRef>
+          <a:fillRef idx="3">
+            <a:schemeClr val="accent1"/>
+          </a:fillRef>
+          <a:effectRef idx="2">
+            <a:schemeClr val="accent1"/>
+          </a:effectRef>
+          <a:fontRef idx="minor">
+            <a:schemeClr val="lt1"/>
+          </a:fontRef>
+        </p:style>
+        <p:txBody>
+          <a:bodyPr rtlCol="0" anchor="ctr" wrap="square"/>
+          <a:lstStyle/>
+          <a:p>
+            <a:pPr algn="ctr"/>
+          </a:p>
+        </p:txBody>
+      </p:sp>
+      <p:sp>
+        <p:nvSpPr>
+          <p:cNvPr id="3" name="TextBox 2"/>
+          <p:cNvSpPr txBox="1"/>
+          <p:nvPr/>
+        </p:nvSpPr>
+        <p:spPr>
+          <a:xfrm>
+            <a:off x="457200" y="146304"/>
+            <a:ext cx="11247120" cy="777240"/>
+          </a:xfrm>
+          <a:prstGeom prst="rect">
+            <a:avLst/>
+          </a:prstGeom>
+          <a:noFill/>
+        </p:spPr>
+        <p:txBody>
+          <a:bodyPr wrap="square" anchor="ctr">
+            <a:spAutoFit/>
+          </a:bodyPr>
+          <a:lstStyle/>
+          <a:p>
+            <a:pPr algn="l"/>
+            <a:r>
+              <a:rPr sz="3400" b="1">
+                <a:solidFill>
+                  <a:srgbClr val="FFFFFF"/>
+                </a:solidFill>
+                <a:latin typeface="Arial"/>
+              </a:rPr>
+              <a:t>What changed?</a:t>
+            </a:r>
+          </a:p>
+        </p:txBody>
+      </p:sp>
+      <p:sp>
+        <p:nvSpPr>
+          <p:cNvPr id="4" name="Rounded Rectangle 3"/>
+          <p:cNvSpPr/>
+          <p:nvPr/>
+        </p:nvSpPr>
+        <p:spPr>
+          <a:xfrm>
+            <a:off x="914400" y="2103120"/>
+            <a:ext cx="4754880" cy="2194560"/>
+          </a:xfrm>
+          <a:prstGeom prst="roundRect">
+            <a:avLst/>
+          </a:prstGeom>
+          <a:solidFill>
+            <a:srgbClr val="E8EDF4"/>
+          </a:solidFill>
+          <a:ln>
+            <a:noFill/>
+          </a:ln>
+        </p:spPr>
+        <p:style>
+          <a:lnRef idx="1">
+            <a:schemeClr val="accent1"/>
+          </a:lnRef>
+          <a:fillRef idx="3">
+            <a:schemeClr val="accent1"/>
+          </a:fillRef>
+          <a:effectRef idx="2">
+            <a:schemeClr val="accent1"/>
+          </a:effectRef>
+          <a:fontRef idx="minor">
+            <a:schemeClr val="lt1"/>
+          </a:fontRef>
+        </p:style>
+        <p:txBody>
+          <a:bodyPr rtlCol="0" anchor="ctr" wrap="square"/>
+          <a:lstStyle/>
+          <a:p>
+            <a:pPr algn="ctr"/>
+            <a:r>
+              <a:rPr sz="2600" b="1">
+                <a:solidFill>
+                  <a:srgbClr val="1F3A5F"/>
+                </a:solidFill>
+                <a:latin typeface="Arial"/>
+              </a:rPr>
+              <a:t>SLOW roll
+cup moves a little</a:t>
+            </a:r>
+          </a:p>
+        </p:txBody>
+      </p:sp>
+      <p:sp>
+        <p:nvSpPr>
+          <p:cNvPr id="5" name="Right Arrow 4"/>
+          <p:cNvSpPr/>
+          <p:nvPr/>
+        </p:nvSpPr>
+        <p:spPr>
+          <a:xfrm>
+            <a:off x="5806440" y="2926080"/>
+            <a:ext cx="822960" cy="640080"/>
+          </a:xfrm>
+          <a:prstGeom prst="rightArrow">
+            <a:avLst/>
+          </a:prstGeom>
+          <a:solidFill>
+            <a:srgbClr val="C05014"/>
+          </a:solidFill>
+          <a:ln>
+            <a:noFill/>
+          </a:ln>
+        </p:spPr>
+        <p:style>
+          <a:lnRef idx="1">
+            <a:schemeClr val="accent1"/>
+          </a:lnRef>
+          <a:fillRef idx="3">
+            <a:schemeClr val="accent1"/>
+          </a:fillRef>
+          <a:effectRef idx="2">
+            <a:schemeClr val="accent1"/>
+          </a:effectRef>
+          <a:fontRef idx="minor">
+            <a:schemeClr val="lt1"/>
+          </a:fontRef>
+        </p:style>
+        <p:txBody>
+          <a:bodyPr rtlCol="0" anchor="ctr"/>
+          <a:lstStyle/>
+          <a:p>
+            <a:pPr algn="ctr"/>
+          </a:p>
+        </p:txBody>
+      </p:sp>
+      <p:sp>
+        <p:nvSpPr>
+          <p:cNvPr id="6" name="Rounded Rectangle 5"/>
+          <p:cNvSpPr/>
+          <p:nvPr/>
+        </p:nvSpPr>
+        <p:spPr>
+          <a:xfrm>
+            <a:off x="6766560" y="2103120"/>
+            <a:ext cx="4754880" cy="2194560"/>
+          </a:xfrm>
+          <a:prstGeom prst="roundRect">
+            <a:avLst/>
+          </a:prstGeom>
+          <a:solidFill>
+            <a:srgbClr val="C05014"/>
+          </a:solidFill>
+          <a:ln>
+            <a:noFill/>
+          </a:ln>
+        </p:spPr>
+        <p:style>
+          <a:lnRef idx="1">
+            <a:schemeClr val="accent1"/>
+          </a:lnRef>
+          <a:fillRef idx="3">
+            <a:schemeClr val="accent1"/>
+          </a:fillRef>
+          <a:effectRef idx="2">
+            <a:schemeClr val="accent1"/>
+          </a:effectRef>
+          <a:fontRef idx="minor">
+            <a:schemeClr val="lt1"/>
+          </a:fontRef>
+        </p:style>
+        <p:txBody>
+          <a:bodyPr rtlCol="0" anchor="ctr" wrap="square"/>
+          <a:lstStyle/>
+          <a:p>
+            <a:pPr algn="ctr"/>
+            <a:r>
+              <a:rPr sz="2600" b="1">
+                <a:solidFill>
+                  <a:srgbClr val="FFFFFF"/>
+                </a:solidFill>
+                <a:latin typeface="Arial"/>
+              </a:rPr>
+              <a:t>FASTER roll
+cup moves a lot</a:t>
+            </a:r>
+          </a:p>
+        </p:txBody>
+      </p:sp>
+      <p:sp>
+        <p:nvSpPr>
+          <p:cNvPr id="7" name="TextBox 6"/>
+          <p:cNvSpPr txBox="1"/>
+          <p:nvPr/>
+        </p:nvSpPr>
+        <p:spPr>
+          <a:xfrm>
+            <a:off x="914400" y="4846320"/>
+            <a:ext cx="10332720" cy="731520"/>
+          </a:xfrm>
+          <a:prstGeom prst="rect">
+            <a:avLst/>
+          </a:prstGeom>
+          <a:noFill/>
+        </p:spPr>
+        <p:txBody>
+          <a:bodyPr wrap="square" anchor="t">
+            <a:spAutoFit/>
+          </a:bodyPr>
+          <a:lstStyle/>
+          <a:p>
+            <a:pPr algn="ctr"/>
+            <a:r>
+              <a:rPr sz="2600" b="1">
+                <a:solidFill>
+                  <a:srgbClr val="1F3A5F"/>
+                </a:solidFill>
+                <a:latin typeface="Arial"/>
+              </a:rPr>
+              <a:t>The SAME ball, moving faster, caused a greater change.</a:t>
+            </a:r>
+          </a:p>
+        </p:txBody>
+      </p:sp>
+      <p:sp>
+        <p:nvSpPr>
+          <p:cNvPr id="8" name="TextBox 7"/>
+          <p:cNvSpPr txBox="1"/>
+          <p:nvPr/>
+        </p:nvSpPr>
+        <p:spPr>
+          <a:xfrm>
+            <a:off x="11338560" y="6446520"/>
+            <a:ext cx="731520" cy="365760"/>
+          </a:xfrm>
+          <a:prstGeom prst="rect">
+            <a:avLst/>
+          </a:prstGeom>
+          <a:noFill/>
+        </p:spPr>
+        <p:txBody>
+          <a:bodyPr wrap="square" anchor="t">
+            <a:spAutoFit/>
+          </a:bodyPr>
+          <a:lstStyle/>
+          <a:p>
+            <a:pPr algn="r"/>
+            <a:r>
+              <a:rPr sz="1200" b="0">
+                <a:solidFill>
+                  <a:srgbClr val="555555"/>
+                </a:solidFill>
+                <a:latin typeface="Arial"/>
+              </a:rPr>
+              <a:t>2</a:t>
+            </a:r>
+          </a:p>
+        </p:txBody>
+      </p:sp>
+    </p:spTree>
+  </p:cSld>
+  <p:clrMapOvr>
+    <a:masterClrMapping/>
+  </p:clrMapOvr>
+</p:sld>
+</file>
+
+<file path=ppt/slides/slide20.xml><?xml version="1.0" encoding="utf-8"?>
+<p:sld xmlns:a="http://schemas.openxmlformats.org/drawingml/2006/main" xmlns:p="http://schemas.openxmlformats.org/presentationml/2006/main" xmlns:r="http://schemas.openxmlformats.org/officeDocument/2006/relationships">
+  <p:cSld>
+    <p:spTree>
+      <p:nvGrpSpPr>
+        <p:cNvPr id="1" name=""/>
+        <p:cNvGrpSpPr/>
+        <p:nvPr/>
+      </p:nvGrpSpPr>
+      <p:grpSpPr/>
+      <p:sp>
+        <p:nvSpPr>
+          <p:cNvPr id="2" name="Rounded Rectangle 1"/>
+          <p:cNvSpPr/>
+          <p:nvPr/>
+        </p:nvSpPr>
+        <p:spPr>
+          <a:xfrm>
+            <a:off x="0" y="0"/>
+            <a:ext cx="12191695" cy="1051560"/>
+          </a:xfrm>
+          <a:prstGeom prst="roundRect">
+            <a:avLst/>
+          </a:prstGeom>
+          <a:solidFill>
+            <a:srgbClr val="1F3A5F"/>
+          </a:solidFill>
+          <a:ln>
+            <a:noFill/>
+          </a:ln>
+        </p:spPr>
+        <p:style>
+          <a:lnRef idx="1">
+            <a:schemeClr val="accent1"/>
+          </a:lnRef>
+          <a:fillRef idx="3">
+            <a:schemeClr val="accent1"/>
+          </a:fillRef>
+          <a:effectRef idx="2">
+            <a:schemeClr val="accent1"/>
+          </a:effectRef>
+          <a:fontRef idx="minor">
+            <a:schemeClr val="lt1"/>
+          </a:fontRef>
+        </p:style>
+        <p:txBody>
+          <a:bodyPr rtlCol="0" anchor="ctr" wrap="square"/>
+          <a:lstStyle/>
+          <a:p>
+            <a:pPr algn="ctr"/>
+          </a:p>
+        </p:txBody>
+      </p:sp>
+      <p:sp>
+        <p:nvSpPr>
+          <p:cNvPr id="3" name="TextBox 2"/>
+          <p:cNvSpPr txBox="1"/>
+          <p:nvPr/>
+        </p:nvSpPr>
+        <p:spPr>
+          <a:xfrm>
+            <a:off x="457200" y="146304"/>
+            <a:ext cx="11247120" cy="777240"/>
+          </a:xfrm>
+          <a:prstGeom prst="rect">
+            <a:avLst/>
+          </a:prstGeom>
+          <a:noFill/>
+        </p:spPr>
+        <p:txBody>
+          <a:bodyPr wrap="square" anchor="ctr">
+            <a:spAutoFit/>
+          </a:bodyPr>
+          <a:lstStyle/>
+          <a:p>
+            <a:pPr algn="l"/>
+            <a:r>
+              <a:rPr sz="3400" b="1">
+                <a:solidFill>
+                  <a:srgbClr val="FFFFFF"/>
+                </a:solidFill>
+                <a:latin typeface="Arial"/>
+              </a:rPr>
+              <a:t>Graph interpretation</a:t>
+            </a:r>
+          </a:p>
+        </p:txBody>
+      </p:sp>
+      <p:sp>
+        <p:nvSpPr>
+          <p:cNvPr id="4" name="Rounded Rectangle 3"/>
+          <p:cNvSpPr/>
+          <p:nvPr/>
+        </p:nvSpPr>
+        <p:spPr>
+          <a:xfrm>
+            <a:off x="914400" y="2377440"/>
+            <a:ext cx="10332720" cy="1828800"/>
+          </a:xfrm>
+          <a:prstGeom prst="roundRect">
+            <a:avLst/>
+          </a:prstGeom>
+          <a:solidFill>
+            <a:srgbClr val="2E6B3F"/>
+          </a:solidFill>
+          <a:ln>
+            <a:noFill/>
+          </a:ln>
+        </p:spPr>
+        <p:style>
+          <a:lnRef idx="1">
+            <a:schemeClr val="accent1"/>
+          </a:lnRef>
+          <a:fillRef idx="3">
+            <a:schemeClr val="accent1"/>
+          </a:fillRef>
+          <a:effectRef idx="2">
+            <a:schemeClr val="accent1"/>
+          </a:effectRef>
+          <a:fontRef idx="minor">
+            <a:schemeClr val="lt1"/>
+          </a:fontRef>
+        </p:style>
+        <p:txBody>
+          <a:bodyPr rtlCol="0" anchor="ctr" wrap="square"/>
+          <a:lstStyle/>
+          <a:p>
+            <a:pPr algn="ctr"/>
+            <a:r>
+              <a:rPr sz="3000" b="1">
+                <a:solidFill>
+                  <a:srgbClr val="FFFFFF"/>
+                </a:solidFill>
+                <a:latin typeface="Arial"/>
+              </a:rPr>
+              <a:t>Higher ramp → the cup moved farther.</a:t>
+            </a:r>
+          </a:p>
+        </p:txBody>
+      </p:sp>
+      <p:sp>
+        <p:nvSpPr>
+          <p:cNvPr id="5" name="TextBox 4"/>
+          <p:cNvSpPr txBox="1"/>
+          <p:nvPr/>
+        </p:nvSpPr>
+        <p:spPr>
+          <a:xfrm>
+            <a:off x="11338560" y="6446520"/>
+            <a:ext cx="731520" cy="365760"/>
+          </a:xfrm>
+          <a:prstGeom prst="rect">
+            <a:avLst/>
+          </a:prstGeom>
+          <a:noFill/>
+        </p:spPr>
+        <p:txBody>
+          <a:bodyPr wrap="square" anchor="t">
+            <a:spAutoFit/>
+          </a:bodyPr>
+          <a:lstStyle/>
+          <a:p>
+            <a:pPr algn="r"/>
+            <a:r>
+              <a:rPr sz="1200" b="0">
+                <a:solidFill>
+                  <a:srgbClr val="555555"/>
+                </a:solidFill>
+                <a:latin typeface="Arial"/>
+              </a:rPr>
+              <a:t>19</a:t>
+            </a:r>
+          </a:p>
+        </p:txBody>
+      </p:sp>
+    </p:spTree>
+  </p:cSld>
+  <p:clrMapOvr>
+    <a:masterClrMapping/>
+  </p:clrMapOvr>
+</p:sld>
+</file>
+
+<file path=ppt/slides/slide21.xml><?xml version="1.0" encoding="utf-8"?>
+<p:sld xmlns:a="http://schemas.openxmlformats.org/drawingml/2006/main" xmlns:p="http://schemas.openxmlformats.org/presentationml/2006/main" xmlns:r="http://schemas.openxmlformats.org/officeDocument/2006/relationships">
+  <p:cSld>
+    <p:spTree>
+      <p:nvGrpSpPr>
+        <p:cNvPr id="1" name=""/>
+        <p:cNvGrpSpPr/>
+        <p:nvPr/>
+      </p:nvGrpSpPr>
+      <p:grpSpPr/>
+      <p:sp>
+        <p:nvSpPr>
+          <p:cNvPr id="2" name="Rounded Rectangle 1"/>
+          <p:cNvSpPr/>
+          <p:nvPr/>
+        </p:nvSpPr>
+        <p:spPr>
+          <a:xfrm>
+            <a:off x="0" y="0"/>
+            <a:ext cx="12191695" cy="1051560"/>
+          </a:xfrm>
+          <a:prstGeom prst="roundRect">
+            <a:avLst/>
+          </a:prstGeom>
+          <a:solidFill>
+            <a:srgbClr val="1F3A5F"/>
+          </a:solidFill>
+          <a:ln>
+            <a:noFill/>
+          </a:ln>
+        </p:spPr>
+        <p:style>
+          <a:lnRef idx="1">
+            <a:schemeClr val="accent1"/>
+          </a:lnRef>
+          <a:fillRef idx="3">
+            <a:schemeClr val="accent1"/>
+          </a:fillRef>
+          <a:effectRef idx="2">
+            <a:schemeClr val="accent1"/>
+          </a:effectRef>
+          <a:fontRef idx="minor">
+            <a:schemeClr val="lt1"/>
+          </a:fontRef>
+        </p:style>
+        <p:txBody>
+          <a:bodyPr rtlCol="0" anchor="ctr" wrap="square"/>
+          <a:lstStyle/>
+          <a:p>
+            <a:pPr algn="ctr"/>
+          </a:p>
+        </p:txBody>
+      </p:sp>
+      <p:sp>
+        <p:nvSpPr>
+          <p:cNvPr id="3" name="TextBox 2"/>
+          <p:cNvSpPr txBox="1"/>
+          <p:nvPr/>
+        </p:nvSpPr>
+        <p:spPr>
+          <a:xfrm>
+            <a:off x="457200" y="146304"/>
+            <a:ext cx="11247120" cy="777240"/>
+          </a:xfrm>
+          <a:prstGeom prst="rect">
+            <a:avLst/>
+          </a:prstGeom>
+          <a:noFill/>
+        </p:spPr>
+        <p:txBody>
+          <a:bodyPr wrap="square" anchor="ctr">
+            <a:spAutoFit/>
+          </a:bodyPr>
+          <a:lstStyle/>
+          <a:p>
+            <a:pPr algn="l"/>
+            <a:r>
+              <a:rPr sz="3400" b="1">
+                <a:solidFill>
+                  <a:srgbClr val="FFFFFF"/>
+                </a:solidFill>
+                <a:latin typeface="Arial"/>
+              </a:rPr>
+              <a:t>Measured vs inferred</a:t>
+            </a:r>
+          </a:p>
+        </p:txBody>
+      </p:sp>
+      <p:sp>
+        <p:nvSpPr>
+          <p:cNvPr id="4" name="Rounded Rectangle 3"/>
+          <p:cNvSpPr/>
+          <p:nvPr/>
+        </p:nvSpPr>
+        <p:spPr>
+          <a:xfrm>
+            <a:off x="9692640" y="256032"/>
+            <a:ext cx="2194560" cy="548640"/>
+          </a:xfrm>
+          <a:prstGeom prst="roundRect">
+            <a:avLst/>
+          </a:prstGeom>
+          <a:solidFill>
+            <a:srgbClr val="C05014"/>
+          </a:solidFill>
+          <a:ln>
+            <a:noFill/>
+          </a:ln>
+        </p:spPr>
+        <p:style>
+          <a:lnRef idx="1">
+            <a:schemeClr val="accent1"/>
+          </a:lnRef>
+          <a:fillRef idx="3">
+            <a:schemeClr val="accent1"/>
+          </a:fillRef>
+          <a:effectRef idx="2">
+            <a:schemeClr val="accent1"/>
+          </a:effectRef>
+          <a:fontRef idx="minor">
+            <a:schemeClr val="lt1"/>
+          </a:fontRef>
+        </p:style>
+        <p:txBody>
+          <a:bodyPr rtlCol="0" anchor="ctr" wrap="square"/>
+          <a:lstStyle/>
+          <a:p>
+            <a:pPr algn="ctr"/>
+            <a:r>
+              <a:rPr sz="1400" b="1">
+                <a:solidFill>
+                  <a:srgbClr val="FFFFFF"/>
+                </a:solidFill>
+                <a:latin typeface="Arial"/>
+              </a:rPr>
+              <a:t>REVEAL</a:t>
+            </a:r>
+          </a:p>
+        </p:txBody>
+      </p:sp>
+      <p:sp>
+        <p:nvSpPr>
+          <p:cNvPr id="5" name="Rounded Rectangle 4"/>
+          <p:cNvSpPr/>
+          <p:nvPr/>
+        </p:nvSpPr>
+        <p:spPr>
+          <a:xfrm>
+            <a:off x="822960" y="2103120"/>
+            <a:ext cx="5029200" cy="2560320"/>
+          </a:xfrm>
+          <a:prstGeom prst="roundRect">
+            <a:avLst/>
+          </a:prstGeom>
+          <a:solidFill>
+            <a:srgbClr val="E8EDF4"/>
+          </a:solidFill>
+          <a:ln>
+            <a:noFill/>
+          </a:ln>
+        </p:spPr>
+        <p:style>
+          <a:lnRef idx="1">
+            <a:schemeClr val="accent1"/>
+          </a:lnRef>
+          <a:fillRef idx="3">
+            <a:schemeClr val="accent1"/>
+          </a:fillRef>
+          <a:effectRef idx="2">
+            <a:schemeClr val="accent1"/>
+          </a:effectRef>
+          <a:fontRef idx="minor">
+            <a:schemeClr val="lt1"/>
+          </a:fontRef>
+        </p:style>
+        <p:txBody>
+          <a:bodyPr rtlCol="0" anchor="ctr" wrap="square"/>
+          <a:lstStyle/>
+          <a:p>
+            <a:pPr algn="ctr"/>
+            <a:r>
+              <a:rPr sz="2200" b="1">
+                <a:solidFill>
+                  <a:srgbClr val="1F3A5F"/>
+                </a:solidFill>
+                <a:latin typeface="Arial"/>
+              </a:rPr>
+              <a:t>MEASURED
+ramp height (books)
+cup displacement (cm)</a:t>
+            </a:r>
+          </a:p>
+        </p:txBody>
+      </p:sp>
+      <p:sp>
+        <p:nvSpPr>
+          <p:cNvPr id="6" name="Rounded Rectangle 5"/>
+          <p:cNvSpPr/>
+          <p:nvPr/>
+        </p:nvSpPr>
+        <p:spPr>
+          <a:xfrm>
+            <a:off x="6309360" y="2103120"/>
+            <a:ext cx="5029200" cy="2560320"/>
+          </a:xfrm>
+          <a:prstGeom prst="roundRect">
+            <a:avLst/>
+          </a:prstGeom>
+          <a:solidFill>
+            <a:srgbClr val="2E6B3F"/>
+          </a:solidFill>
+          <a:ln>
+            <a:noFill/>
+          </a:ln>
+        </p:spPr>
+        <p:style>
+          <a:lnRef idx="1">
+            <a:schemeClr val="accent1"/>
+          </a:lnRef>
+          <a:fillRef idx="3">
+            <a:schemeClr val="accent1"/>
+          </a:fillRef>
+          <a:effectRef idx="2">
+            <a:schemeClr val="accent1"/>
+          </a:effectRef>
+          <a:fontRef idx="minor">
+            <a:schemeClr val="lt1"/>
+          </a:fontRef>
+        </p:style>
+        <p:txBody>
+          <a:bodyPr rtlCol="0" anchor="ctr" wrap="square"/>
+          <a:lstStyle/>
+          <a:p>
+            <a:pPr algn="ctr"/>
+            <a:r>
+              <a:rPr sz="2000" b="1">
+                <a:solidFill>
+                  <a:srgbClr val="FFFFFF"/>
+                </a:solidFill>
+                <a:latin typeface="Arial"/>
+              </a:rPr>
+              <a:t>INFERRED
+relative speed
+speed ↔ energy relationship</a:t>
+            </a:r>
+          </a:p>
+        </p:txBody>
+      </p:sp>
+      <p:sp>
+        <p:nvSpPr>
+          <p:cNvPr id="7" name="TextBox 6"/>
+          <p:cNvSpPr txBox="1"/>
+          <p:nvPr/>
+        </p:nvSpPr>
+        <p:spPr>
+          <a:xfrm>
+            <a:off x="822960" y="5029200"/>
+            <a:ext cx="10515600" cy="640080"/>
+          </a:xfrm>
+          <a:prstGeom prst="rect">
+            <a:avLst/>
+          </a:prstGeom>
+          <a:noFill/>
+        </p:spPr>
+        <p:txBody>
+          <a:bodyPr wrap="square" anchor="t">
+            <a:spAutoFit/>
+          </a:bodyPr>
+          <a:lstStyle/>
+          <a:p>
+            <a:pPr algn="ctr"/>
+            <a:r>
+              <a:rPr sz="2400" b="1">
+                <a:solidFill>
+                  <a:srgbClr val="C05014"/>
+                </a:solidFill>
+                <a:latin typeface="Arial"/>
+              </a:rPr>
+              <a:t>We did NOT measure speed or energy.</a:t>
+            </a:r>
+          </a:p>
+        </p:txBody>
+      </p:sp>
+      <p:sp>
+        <p:nvSpPr>
+          <p:cNvPr id="8" name="TextBox 7"/>
+          <p:cNvSpPr txBox="1"/>
+          <p:nvPr/>
+        </p:nvSpPr>
+        <p:spPr>
+          <a:xfrm>
+            <a:off x="11338560" y="6446520"/>
+            <a:ext cx="731520" cy="365760"/>
+          </a:xfrm>
+          <a:prstGeom prst="rect">
+            <a:avLst/>
+          </a:prstGeom>
+          <a:noFill/>
+        </p:spPr>
+        <p:txBody>
+          <a:bodyPr wrap="square" anchor="t">
+            <a:spAutoFit/>
+          </a:bodyPr>
+          <a:lstStyle/>
+          <a:p>
+            <a:pPr algn="r"/>
+            <a:r>
+              <a:rPr sz="1200" b="0">
+                <a:solidFill>
+                  <a:srgbClr val="555555"/>
+                </a:solidFill>
+                <a:latin typeface="Arial"/>
+              </a:rPr>
+              <a:t>20</a:t>
+            </a:r>
+          </a:p>
+        </p:txBody>
+      </p:sp>
+    </p:spTree>
+  </p:cSld>
+  <p:clrMapOvr>
+    <a:masterClrMapping/>
+  </p:clrMapOvr>
+</p:sld>
+</file>
+
+<file path=ppt/slides/slide22.xml><?xml version="1.0" encoding="utf-8"?>
+<p:sld xmlns:a="http://schemas.openxmlformats.org/drawingml/2006/main" xmlns:p="http://schemas.openxmlformats.org/presentationml/2006/main" xmlns:r="http://schemas.openxmlformats.org/officeDocument/2006/relationships">
+  <p:cSld>
+    <p:spTree>
+      <p:nvGrpSpPr>
+        <p:cNvPr id="1" name=""/>
+        <p:cNvGrpSpPr/>
+        <p:nvPr/>
+      </p:nvGrpSpPr>
+      <p:grpSpPr/>
+      <p:sp>
+        <p:nvSpPr>
+          <p:cNvPr id="2" name="Rounded Rectangle 1"/>
+          <p:cNvSpPr/>
+          <p:nvPr/>
+        </p:nvSpPr>
+        <p:spPr>
+          <a:xfrm>
+            <a:off x="0" y="0"/>
+            <a:ext cx="12191695" cy="1051560"/>
+          </a:xfrm>
+          <a:prstGeom prst="roundRect">
+            <a:avLst/>
+          </a:prstGeom>
+          <a:solidFill>
+            <a:srgbClr val="1F3A5F"/>
+          </a:solidFill>
+          <a:ln>
+            <a:noFill/>
+          </a:ln>
+        </p:spPr>
+        <p:style>
+          <a:lnRef idx="1">
+            <a:schemeClr val="accent1"/>
+          </a:lnRef>
+          <a:fillRef idx="3">
+            <a:schemeClr val="accent1"/>
+          </a:fillRef>
+          <a:effectRef idx="2">
+            <a:schemeClr val="accent1"/>
+          </a:effectRef>
+          <a:fontRef idx="minor">
+            <a:schemeClr val="lt1"/>
+          </a:fontRef>
+        </p:style>
+        <p:txBody>
+          <a:bodyPr rtlCol="0" anchor="ctr" wrap="square"/>
+          <a:lstStyle/>
+          <a:p>
+            <a:pPr algn="ctr"/>
+          </a:p>
+        </p:txBody>
+      </p:sp>
+      <p:sp>
+        <p:nvSpPr>
+          <p:cNvPr id="3" name="TextBox 2"/>
+          <p:cNvSpPr txBox="1"/>
+          <p:nvPr/>
+        </p:nvSpPr>
+        <p:spPr>
+          <a:xfrm>
+            <a:off x="457200" y="146304"/>
+            <a:ext cx="11247120" cy="777240"/>
+          </a:xfrm>
+          <a:prstGeom prst="rect">
+            <a:avLst/>
+          </a:prstGeom>
+          <a:noFill/>
+        </p:spPr>
+        <p:txBody>
+          <a:bodyPr wrap="square" anchor="ctr">
+            <a:spAutoFit/>
+          </a:bodyPr>
+          <a:lstStyle/>
+          <a:p>
+            <a:pPr algn="l"/>
+            <a:r>
+              <a:rPr sz="3400" b="1">
+                <a:solidFill>
+                  <a:srgbClr val="FFFFFF"/>
+                </a:solidFill>
+                <a:latin typeface="Arial"/>
+              </a:rPr>
+              <a:t>Reader connection</a:t>
+            </a:r>
+          </a:p>
+        </p:txBody>
+      </p:sp>
+      <p:sp>
+        <p:nvSpPr>
+          <p:cNvPr id="4" name="Rounded Rectangle 3"/>
+          <p:cNvSpPr/>
+          <p:nvPr/>
+        </p:nvSpPr>
+        <p:spPr>
+          <a:xfrm>
+            <a:off x="914400" y="2286000"/>
+            <a:ext cx="10332720" cy="2011680"/>
+          </a:xfrm>
+          <a:prstGeom prst="roundRect">
+            <a:avLst/>
+          </a:prstGeom>
+          <a:solidFill>
+            <a:srgbClr val="E8EDF4"/>
+          </a:solidFill>
+          <a:ln>
+            <a:noFill/>
+          </a:ln>
+        </p:spPr>
+        <p:style>
+          <a:lnRef idx="1">
+            <a:schemeClr val="accent1"/>
+          </a:lnRef>
+          <a:fillRef idx="3">
+            <a:schemeClr val="accent1"/>
+          </a:fillRef>
+          <a:effectRef idx="2">
+            <a:schemeClr val="accent1"/>
+          </a:effectRef>
+          <a:fontRef idx="minor">
+            <a:schemeClr val="lt1"/>
+          </a:fontRef>
+        </p:style>
+        <p:txBody>
+          <a:bodyPr rtlCol="0" anchor="ctr" wrap="square"/>
+          <a:lstStyle/>
+          <a:p>
+            <a:pPr algn="ctr"/>
+            <a:r>
+              <a:rPr sz="2800" b="1">
+                <a:solidFill>
+                  <a:srgbClr val="1F3A5F"/>
+                </a:solidFill>
+                <a:latin typeface="Arial"/>
+              </a:rPr>
+              <a:t>Greater speed → greater change → greater energy of motion.</a:t>
+            </a:r>
+          </a:p>
+        </p:txBody>
+      </p:sp>
+      <p:sp>
+        <p:nvSpPr>
+          <p:cNvPr id="5" name="TextBox 4"/>
+          <p:cNvSpPr txBox="1"/>
+          <p:nvPr/>
+        </p:nvSpPr>
+        <p:spPr>
+          <a:xfrm>
+            <a:off x="914400" y="4663440"/>
+            <a:ext cx="10332720" cy="640080"/>
+          </a:xfrm>
+          <a:prstGeom prst="rect">
+            <a:avLst/>
+          </a:prstGeom>
+          <a:noFill/>
+        </p:spPr>
+        <p:txBody>
+          <a:bodyPr wrap="square" anchor="t">
+            <a:spAutoFit/>
+          </a:bodyPr>
+          <a:lstStyle/>
+          <a:p>
+            <a:pPr algn="ctr"/>
+            <a:r>
+              <a:rPr sz="1800" b="0">
+                <a:solidFill>
+                  <a:srgbClr val="555555"/>
+                </a:solidFill>
+                <a:latin typeface="Arial"/>
+              </a:rPr>
+              <a:t>— Student Reader, pp. 13–16 (catch a ball · ramp/bucket · bounce)</a:t>
+            </a:r>
+          </a:p>
+        </p:txBody>
+      </p:sp>
+      <p:sp>
+        <p:nvSpPr>
+          <p:cNvPr id="6" name="TextBox 5"/>
+          <p:cNvSpPr txBox="1"/>
+          <p:nvPr/>
+        </p:nvSpPr>
+        <p:spPr>
+          <a:xfrm>
+            <a:off x="11338560" y="6446520"/>
+            <a:ext cx="731520" cy="365760"/>
+          </a:xfrm>
+          <a:prstGeom prst="rect">
+            <a:avLst/>
+          </a:prstGeom>
+          <a:noFill/>
+        </p:spPr>
+        <p:txBody>
+          <a:bodyPr wrap="square" anchor="t">
+            <a:spAutoFit/>
+          </a:bodyPr>
+          <a:lstStyle/>
+          <a:p>
+            <a:pPr algn="r"/>
+            <a:r>
+              <a:rPr sz="1200" b="0">
+                <a:solidFill>
+                  <a:srgbClr val="555555"/>
+                </a:solidFill>
+                <a:latin typeface="Arial"/>
+              </a:rPr>
+              <a:t>21</a:t>
+            </a:r>
+          </a:p>
+        </p:txBody>
+      </p:sp>
+    </p:spTree>
+  </p:cSld>
+  <p:clrMapOvr>
+    <a:masterClrMapping/>
+  </p:clrMapOvr>
+</p:sld>
+</file>
+
+<file path=ppt/slides/slide23.xml><?xml version="1.0" encoding="utf-8"?>
+<p:sld xmlns:a="http://schemas.openxmlformats.org/drawingml/2006/main" xmlns:p="http://schemas.openxmlformats.org/presentationml/2006/main" xmlns:r="http://schemas.openxmlformats.org/officeDocument/2006/relationships">
+  <p:cSld>
+    <p:spTree>
+      <p:nvGrpSpPr>
+        <p:cNvPr id="1" name=""/>
+        <p:cNvGrpSpPr/>
+        <p:nvPr/>
+      </p:nvGrpSpPr>
+      <p:grpSpPr/>
+      <p:sp>
+        <p:nvSpPr>
+          <p:cNvPr id="2" name="Rounded Rectangle 1"/>
+          <p:cNvSpPr/>
+          <p:nvPr/>
+        </p:nvSpPr>
+        <p:spPr>
+          <a:xfrm>
+            <a:off x="0" y="0"/>
+            <a:ext cx="12191695" cy="1051560"/>
+          </a:xfrm>
+          <a:prstGeom prst="roundRect">
+            <a:avLst/>
+          </a:prstGeom>
+          <a:solidFill>
+            <a:srgbClr val="1F3A5F"/>
+          </a:solidFill>
+          <a:ln>
+            <a:noFill/>
+          </a:ln>
+        </p:spPr>
+        <p:style>
+          <a:lnRef idx="1">
+            <a:schemeClr val="accent1"/>
+          </a:lnRef>
+          <a:fillRef idx="3">
+            <a:schemeClr val="accent1"/>
+          </a:fillRef>
+          <a:effectRef idx="2">
+            <a:schemeClr val="accent1"/>
+          </a:effectRef>
+          <a:fontRef idx="minor">
+            <a:schemeClr val="lt1"/>
+          </a:fontRef>
+        </p:style>
+        <p:txBody>
+          <a:bodyPr rtlCol="0" anchor="ctr" wrap="square"/>
+          <a:lstStyle/>
+          <a:p>
+            <a:pPr algn="ctr"/>
+          </a:p>
+        </p:txBody>
+      </p:sp>
+      <p:sp>
+        <p:nvSpPr>
+          <p:cNvPr id="3" name="TextBox 2"/>
+          <p:cNvSpPr txBox="1"/>
+          <p:nvPr/>
+        </p:nvSpPr>
+        <p:spPr>
+          <a:xfrm>
+            <a:off x="457200" y="146304"/>
+            <a:ext cx="11247120" cy="777240"/>
+          </a:xfrm>
+          <a:prstGeom prst="rect">
+            <a:avLst/>
+          </a:prstGeom>
+          <a:noFill/>
+        </p:spPr>
+        <p:txBody>
+          <a:bodyPr wrap="square" anchor="ctr">
+            <a:spAutoFit/>
+          </a:bodyPr>
+          <a:lstStyle/>
+          <a:p>
+            <a:pPr algn="l"/>
+            <a:r>
+              <a:rPr sz="3400" b="1">
+                <a:solidFill>
+                  <a:srgbClr val="FFFFFF"/>
+                </a:solidFill>
+                <a:latin typeface="Arial"/>
+              </a:rPr>
+              <a:t>Evidence statement</a:t>
+            </a:r>
+          </a:p>
+        </p:txBody>
+      </p:sp>
+      <p:sp>
+        <p:nvSpPr>
+          <p:cNvPr id="4" name="Rounded Rectangle 3"/>
+          <p:cNvSpPr/>
+          <p:nvPr/>
+        </p:nvSpPr>
+        <p:spPr>
+          <a:xfrm>
+            <a:off x="822960" y="2286000"/>
+            <a:ext cx="2743200" cy="1371600"/>
+          </a:xfrm>
+          <a:prstGeom prst="roundRect">
+            <a:avLst/>
+          </a:prstGeom>
+          <a:solidFill>
+            <a:srgbClr val="C05014"/>
+          </a:solidFill>
+          <a:ln>
+            <a:noFill/>
+          </a:ln>
+        </p:spPr>
+        <p:style>
+          <a:lnRef idx="1">
+            <a:schemeClr val="accent1"/>
+          </a:lnRef>
+          <a:fillRef idx="3">
+            <a:schemeClr val="accent1"/>
+          </a:fillRef>
+          <a:effectRef idx="2">
+            <a:schemeClr val="accent1"/>
+          </a:effectRef>
+          <a:fontRef idx="minor">
+            <a:schemeClr val="lt1"/>
+          </a:fontRef>
+        </p:style>
+        <p:txBody>
+          <a:bodyPr rtlCol="0" anchor="ctr" wrap="square"/>
+          <a:lstStyle/>
+          <a:p>
+            <a:pPr algn="ctr"/>
+            <a:r>
+              <a:rPr sz="2000" b="1">
+                <a:solidFill>
+                  <a:srgbClr val="FFFFFF"/>
+                </a:solidFill>
+                <a:latin typeface="Arial"/>
+              </a:rPr>
+              <a:t>SAME OBJECT</a:t>
+            </a:r>
+          </a:p>
+        </p:txBody>
+      </p:sp>
+      <p:sp>
+        <p:nvSpPr>
+          <p:cNvPr id="5" name="Right Arrow 4"/>
+          <p:cNvSpPr/>
+          <p:nvPr/>
+        </p:nvSpPr>
+        <p:spPr>
+          <a:xfrm>
+            <a:off x="3657600" y="2834640"/>
+            <a:ext cx="822960" cy="548640"/>
+          </a:xfrm>
+          <a:prstGeom prst="rightArrow">
+            <a:avLst/>
+          </a:prstGeom>
+          <a:solidFill>
+            <a:srgbClr val="C05014"/>
+          </a:solidFill>
+          <a:ln>
+            <a:noFill/>
+          </a:ln>
+        </p:spPr>
+        <p:style>
+          <a:lnRef idx="1">
+            <a:schemeClr val="accent1"/>
+          </a:lnRef>
+          <a:fillRef idx="3">
+            <a:schemeClr val="accent1"/>
+          </a:fillRef>
+          <a:effectRef idx="2">
+            <a:schemeClr val="accent1"/>
+          </a:effectRef>
+          <a:fontRef idx="minor">
+            <a:schemeClr val="lt1"/>
+          </a:fontRef>
+        </p:style>
+        <p:txBody>
+          <a:bodyPr rtlCol="0" anchor="ctr"/>
+          <a:lstStyle/>
+          <a:p>
+            <a:pPr algn="ctr"/>
+          </a:p>
+        </p:txBody>
+      </p:sp>
+      <p:sp>
+        <p:nvSpPr>
+          <p:cNvPr id="6" name="Rounded Rectangle 5"/>
+          <p:cNvSpPr/>
+          <p:nvPr/>
+        </p:nvSpPr>
+        <p:spPr>
+          <a:xfrm>
+            <a:off x="4572000" y="2286000"/>
+            <a:ext cx="2743200" cy="1371600"/>
+          </a:xfrm>
+          <a:prstGeom prst="roundRect">
+            <a:avLst/>
+          </a:prstGeom>
+          <a:solidFill>
+            <a:srgbClr val="E8EDF4"/>
+          </a:solidFill>
+          <a:ln>
+            <a:noFill/>
+          </a:ln>
+        </p:spPr>
+        <p:style>
+          <a:lnRef idx="1">
+            <a:schemeClr val="accent1"/>
+          </a:lnRef>
+          <a:fillRef idx="3">
+            <a:schemeClr val="accent1"/>
+          </a:fillRef>
+          <a:effectRef idx="2">
+            <a:schemeClr val="accent1"/>
+          </a:effectRef>
+          <a:fontRef idx="minor">
+            <a:schemeClr val="lt1"/>
+          </a:fontRef>
+        </p:style>
+        <p:txBody>
+          <a:bodyPr rtlCol="0" anchor="ctr" wrap="square"/>
+          <a:lstStyle/>
+          <a:p>
+            <a:pPr algn="ctr"/>
+            <a:r>
+              <a:rPr sz="2000" b="1">
+                <a:solidFill>
+                  <a:srgbClr val="1F3A5F"/>
+                </a:solidFill>
+                <a:latin typeface="Arial"/>
+              </a:rPr>
+              <a:t>FASTER MOTION</a:t>
+            </a:r>
+          </a:p>
+        </p:txBody>
+      </p:sp>
+      <p:sp>
+        <p:nvSpPr>
+          <p:cNvPr id="7" name="Right Arrow 6"/>
+          <p:cNvSpPr/>
+          <p:nvPr/>
+        </p:nvSpPr>
+        <p:spPr>
+          <a:xfrm>
+            <a:off x="7406640" y="2834640"/>
+            <a:ext cx="822960" cy="548640"/>
+          </a:xfrm>
+          <a:prstGeom prst="rightArrow">
+            <a:avLst/>
+          </a:prstGeom>
+          <a:solidFill>
+            <a:srgbClr val="C05014"/>
+          </a:solidFill>
+          <a:ln>
+            <a:noFill/>
+          </a:ln>
+        </p:spPr>
+        <p:style>
+          <a:lnRef idx="1">
+            <a:schemeClr val="accent1"/>
+          </a:lnRef>
+          <a:fillRef idx="3">
+            <a:schemeClr val="accent1"/>
+          </a:fillRef>
+          <a:effectRef idx="2">
+            <a:schemeClr val="accent1"/>
+          </a:effectRef>
+          <a:fontRef idx="minor">
+            <a:schemeClr val="lt1"/>
+          </a:fontRef>
+        </p:style>
+        <p:txBody>
+          <a:bodyPr rtlCol="0" anchor="ctr"/>
+          <a:lstStyle/>
+          <a:p>
+            <a:pPr algn="ctr"/>
+          </a:p>
+        </p:txBody>
+      </p:sp>
+      <p:sp>
+        <p:nvSpPr>
+          <p:cNvPr id="8" name="Rounded Rectangle 7"/>
+          <p:cNvSpPr/>
+          <p:nvPr/>
+        </p:nvSpPr>
+        <p:spPr>
+          <a:xfrm>
+            <a:off x="8321040" y="2286000"/>
+            <a:ext cx="3017520" cy="1371600"/>
+          </a:xfrm>
+          <a:prstGeom prst="roundRect">
+            <a:avLst/>
+          </a:prstGeom>
+          <a:solidFill>
+            <a:srgbClr val="2E6B3F"/>
+          </a:solidFill>
+          <a:ln>
+            <a:noFill/>
+          </a:ln>
+        </p:spPr>
+        <p:style>
+          <a:lnRef idx="1">
+            <a:schemeClr val="accent1"/>
+          </a:lnRef>
+          <a:fillRef idx="3">
+            <a:schemeClr val="accent1"/>
+          </a:fillRef>
+          <a:effectRef idx="2">
+            <a:schemeClr val="accent1"/>
+          </a:effectRef>
+          <a:fontRef idx="minor">
+            <a:schemeClr val="lt1"/>
+          </a:fontRef>
+        </p:style>
+        <p:txBody>
+          <a:bodyPr rtlCol="0" anchor="ctr" wrap="square"/>
+          <a:lstStyle/>
+          <a:p>
+            <a:pPr algn="ctr"/>
+            <a:r>
+              <a:rPr sz="1800" b="1">
+                <a:solidFill>
+                  <a:srgbClr val="FFFFFF"/>
+                </a:solidFill>
+                <a:latin typeface="Arial"/>
+              </a:rPr>
+              <a:t>GREATER CHANGE</a:t>
+            </a:r>
+          </a:p>
+        </p:txBody>
+      </p:sp>
+      <p:sp>
+        <p:nvSpPr>
+          <p:cNvPr id="9" name="TextBox 8"/>
+          <p:cNvSpPr txBox="1"/>
+          <p:nvPr/>
+        </p:nvSpPr>
+        <p:spPr>
+          <a:xfrm>
+            <a:off x="822960" y="4480560"/>
+            <a:ext cx="10515600" cy="822960"/>
+          </a:xfrm>
+          <a:prstGeom prst="rect">
+            <a:avLst/>
+          </a:prstGeom>
+          <a:noFill/>
+        </p:spPr>
+        <p:txBody>
+          <a:bodyPr wrap="square" anchor="t">
+            <a:spAutoFit/>
+          </a:bodyPr>
+          <a:lstStyle/>
+          <a:p>
+            <a:pPr algn="ctr"/>
+            <a:r>
+              <a:rPr sz="2400" b="1">
+                <a:solidFill>
+                  <a:srgbClr val="1F3A5F"/>
+                </a:solidFill>
+                <a:latin typeface="Arial"/>
+              </a:rPr>
+              <a:t>→ greater energy of motion</a:t>
+            </a:r>
+          </a:p>
+        </p:txBody>
+      </p:sp>
+      <p:sp>
+        <p:nvSpPr>
+          <p:cNvPr id="10" name="TextBox 9"/>
+          <p:cNvSpPr txBox="1"/>
+          <p:nvPr/>
+        </p:nvSpPr>
+        <p:spPr>
+          <a:xfrm>
+            <a:off x="11338560" y="6446520"/>
+            <a:ext cx="731520" cy="365760"/>
+          </a:xfrm>
+          <a:prstGeom prst="rect">
+            <a:avLst/>
+          </a:prstGeom>
+          <a:noFill/>
+        </p:spPr>
+        <p:txBody>
+          <a:bodyPr wrap="square" anchor="t">
+            <a:spAutoFit/>
+          </a:bodyPr>
+          <a:lstStyle/>
+          <a:p>
+            <a:pPr algn="r"/>
+            <a:r>
+              <a:rPr sz="1200" b="0">
+                <a:solidFill>
+                  <a:srgbClr val="555555"/>
+                </a:solidFill>
+                <a:latin typeface="Arial"/>
+              </a:rPr>
+              <a:t>22</a:t>
+            </a:r>
+          </a:p>
+        </p:txBody>
+      </p:sp>
+    </p:spTree>
+  </p:cSld>
+  <p:clrMapOvr>
+    <a:masterClrMapping/>
+  </p:clrMapOvr>
+</p:sld>
+</file>
+
+<file path=ppt/slides/slide24.xml><?xml version="1.0" encoding="utf-8"?>
+<p:sld xmlns:a="http://schemas.openxmlformats.org/drawingml/2006/main" xmlns:p="http://schemas.openxmlformats.org/presentationml/2006/main" xmlns:r="http://schemas.openxmlformats.org/officeDocument/2006/relationships">
+  <p:cSld>
+    <p:spTree>
+      <p:nvGrpSpPr>
+        <p:cNvPr id="1" name=""/>
+        <p:cNvGrpSpPr/>
+        <p:nvPr/>
+      </p:nvGrpSpPr>
+      <p:grpSpPr/>
+      <p:sp>
+        <p:nvSpPr>
+          <p:cNvPr id="2" name="Rounded Rectangle 1"/>
+          <p:cNvSpPr/>
+          <p:nvPr/>
+        </p:nvSpPr>
+        <p:spPr>
+          <a:xfrm>
+            <a:off x="0" y="0"/>
+            <a:ext cx="12191695" cy="1051560"/>
+          </a:xfrm>
+          <a:prstGeom prst="roundRect">
+            <a:avLst/>
+          </a:prstGeom>
+          <a:solidFill>
+            <a:srgbClr val="1F3A5F"/>
+          </a:solidFill>
+          <a:ln>
+            <a:noFill/>
+          </a:ln>
+        </p:spPr>
+        <p:style>
+          <a:lnRef idx="1">
+            <a:schemeClr val="accent1"/>
+          </a:lnRef>
+          <a:fillRef idx="3">
+            <a:schemeClr val="accent1"/>
+          </a:fillRef>
+          <a:effectRef idx="2">
+            <a:schemeClr val="accent1"/>
+          </a:effectRef>
+          <a:fontRef idx="minor">
+            <a:schemeClr val="lt1"/>
+          </a:fontRef>
+        </p:style>
+        <p:txBody>
+          <a:bodyPr rtlCol="0" anchor="ctr" wrap="square"/>
+          <a:lstStyle/>
+          <a:p>
+            <a:pPr algn="ctr"/>
+          </a:p>
+        </p:txBody>
+      </p:sp>
+      <p:sp>
+        <p:nvSpPr>
+          <p:cNvPr id="3" name="TextBox 2"/>
+          <p:cNvSpPr txBox="1"/>
+          <p:nvPr/>
+        </p:nvSpPr>
+        <p:spPr>
+          <a:xfrm>
+            <a:off x="457200" y="146304"/>
+            <a:ext cx="11247120" cy="777240"/>
+          </a:xfrm>
+          <a:prstGeom prst="rect">
+            <a:avLst/>
+          </a:prstGeom>
+          <a:noFill/>
+        </p:spPr>
+        <p:txBody>
+          <a:bodyPr wrap="square" anchor="ctr">
+            <a:spAutoFit/>
+          </a:bodyPr>
+          <a:lstStyle/>
+          <a:p>
+            <a:pPr algn="l"/>
+            <a:r>
+              <a:rPr sz="3400" b="1">
+                <a:solidFill>
+                  <a:srgbClr val="FFFFFF"/>
+                </a:solidFill>
+                <a:latin typeface="Arial"/>
+              </a:rPr>
+              <a:t>Misconception check</a:t>
+            </a:r>
+          </a:p>
+        </p:txBody>
+      </p:sp>
+      <p:sp>
+        <p:nvSpPr>
+          <p:cNvPr id="4" name="Rounded Rectangle 3"/>
+          <p:cNvSpPr/>
+          <p:nvPr/>
+        </p:nvSpPr>
+        <p:spPr>
+          <a:xfrm>
+            <a:off x="9692640" y="256032"/>
+            <a:ext cx="2194560" cy="548640"/>
+          </a:xfrm>
+          <a:prstGeom prst="roundRect">
+            <a:avLst/>
+          </a:prstGeom>
+          <a:solidFill>
+            <a:srgbClr val="C05014"/>
+          </a:solidFill>
+          <a:ln>
+            <a:noFill/>
+          </a:ln>
+        </p:spPr>
+        <p:style>
+          <a:lnRef idx="1">
+            <a:schemeClr val="accent1"/>
+          </a:lnRef>
+          <a:fillRef idx="3">
+            <a:schemeClr val="accent1"/>
+          </a:fillRef>
+          <a:effectRef idx="2">
+            <a:schemeClr val="accent1"/>
+          </a:effectRef>
+          <a:fontRef idx="minor">
+            <a:schemeClr val="lt1"/>
+          </a:fontRef>
+        </p:style>
+        <p:txBody>
+          <a:bodyPr rtlCol="0" anchor="ctr" wrap="square"/>
+          <a:lstStyle/>
+          <a:p>
+            <a:pPr algn="ctr"/>
+            <a:r>
+              <a:rPr sz="1400" b="1">
+                <a:solidFill>
+                  <a:srgbClr val="FFFFFF"/>
+                </a:solidFill>
+                <a:latin typeface="Arial"/>
+              </a:rPr>
+              <a:t>REVEAL</a:t>
+            </a:r>
+          </a:p>
+        </p:txBody>
+      </p:sp>
+      <p:sp>
+        <p:nvSpPr>
+          <p:cNvPr id="5" name="Rounded Rectangle 4"/>
+          <p:cNvSpPr/>
+          <p:nvPr/>
+        </p:nvSpPr>
+        <p:spPr>
+          <a:xfrm>
+            <a:off x="914400" y="2286000"/>
+            <a:ext cx="10332720" cy="1280160"/>
+          </a:xfrm>
+          <a:prstGeom prst="roundRect">
+            <a:avLst/>
+          </a:prstGeom>
+          <a:solidFill>
+            <a:srgbClr val="1F3A5F"/>
+          </a:solidFill>
+          <a:ln>
+            <a:noFill/>
+          </a:ln>
+        </p:spPr>
+        <p:style>
+          <a:lnRef idx="1">
+            <a:schemeClr val="accent1"/>
+          </a:lnRef>
+          <a:fillRef idx="3">
+            <a:schemeClr val="accent1"/>
+          </a:fillRef>
+          <a:effectRef idx="2">
+            <a:schemeClr val="accent1"/>
+          </a:effectRef>
+          <a:fontRef idx="minor">
+            <a:schemeClr val="lt1"/>
+          </a:fontRef>
+        </p:style>
+        <p:txBody>
+          <a:bodyPr rtlCol="0" anchor="ctr" wrap="square"/>
+          <a:lstStyle/>
+          <a:p>
+            <a:pPr algn="ctr"/>
+            <a:r>
+              <a:rPr sz="2800" b="1">
+                <a:solidFill>
+                  <a:srgbClr val="FFFFFF"/>
+                </a:solidFill>
+                <a:latin typeface="Arial"/>
+              </a:rPr>
+              <a:t>Did we directly measure speed or energy?</a:t>
+            </a:r>
+          </a:p>
+        </p:txBody>
+      </p:sp>
+      <p:sp>
+        <p:nvSpPr>
+          <p:cNvPr id="6" name="Rounded Rectangle 5"/>
+          <p:cNvSpPr/>
+          <p:nvPr/>
+        </p:nvSpPr>
+        <p:spPr>
+          <a:xfrm>
+            <a:off x="914400" y="3931920"/>
+            <a:ext cx="10332720" cy="1280160"/>
+          </a:xfrm>
+          <a:prstGeom prst="roundRect">
+            <a:avLst/>
+          </a:prstGeom>
+          <a:solidFill>
+            <a:srgbClr val="C05014"/>
+          </a:solidFill>
+          <a:ln>
+            <a:noFill/>
+          </a:ln>
+        </p:spPr>
+        <p:style>
+          <a:lnRef idx="1">
+            <a:schemeClr val="accent1"/>
+          </a:lnRef>
+          <a:fillRef idx="3">
+            <a:schemeClr val="accent1"/>
+          </a:fillRef>
+          <a:effectRef idx="2">
+            <a:schemeClr val="accent1"/>
+          </a:effectRef>
+          <a:fontRef idx="minor">
+            <a:schemeClr val="lt1"/>
+          </a:fontRef>
+        </p:style>
+        <p:txBody>
+          <a:bodyPr rtlCol="0" anchor="ctr" wrap="square"/>
+          <a:lstStyle/>
+          <a:p>
+            <a:pPr algn="ctr"/>
+            <a:r>
+              <a:rPr sz="2600" b="1">
+                <a:solidFill>
+                  <a:srgbClr val="FFFFFF"/>
+                </a:solidFill>
+                <a:latin typeface="Arial"/>
+              </a:rPr>
+              <a:t>NO — we measured the change and inferred the relationship.</a:t>
+            </a:r>
+          </a:p>
+        </p:txBody>
+      </p:sp>
+      <p:sp>
+        <p:nvSpPr>
+          <p:cNvPr id="7" name="TextBox 6"/>
+          <p:cNvSpPr txBox="1"/>
+          <p:nvPr/>
+        </p:nvSpPr>
+        <p:spPr>
+          <a:xfrm>
+            <a:off x="11338560" y="6446520"/>
+            <a:ext cx="731520" cy="365760"/>
+          </a:xfrm>
+          <a:prstGeom prst="rect">
+            <a:avLst/>
+          </a:prstGeom>
+          <a:noFill/>
+        </p:spPr>
+        <p:txBody>
+          <a:bodyPr wrap="square" anchor="t">
+            <a:spAutoFit/>
+          </a:bodyPr>
+          <a:lstStyle/>
+          <a:p>
+            <a:pPr algn="r"/>
+            <a:r>
+              <a:rPr sz="1200" b="0">
+                <a:solidFill>
+                  <a:srgbClr val="555555"/>
+                </a:solidFill>
+                <a:latin typeface="Arial"/>
+              </a:rPr>
+              <a:t>23</a:t>
+            </a:r>
+          </a:p>
+        </p:txBody>
+      </p:sp>
+    </p:spTree>
+  </p:cSld>
+  <p:clrMapOvr>
+    <a:masterClrMapping/>
+  </p:clrMapOvr>
+</p:sld>
+</file>
+
+<file path=ppt/slides/slide25.xml><?xml version="1.0" encoding="utf-8"?>
+<p:sld xmlns:a="http://schemas.openxmlformats.org/drawingml/2006/main" xmlns:p="http://schemas.openxmlformats.org/presentationml/2006/main" xmlns:r="http://schemas.openxmlformats.org/officeDocument/2006/relationships">
+  <p:cSld>
+    <p:spTree>
+      <p:nvGrpSpPr>
+        <p:cNvPr id="1" name=""/>
+        <p:cNvGrpSpPr/>
+        <p:nvPr/>
+      </p:nvGrpSpPr>
+      <p:grpSpPr/>
+      <p:sp>
+        <p:nvSpPr>
+          <p:cNvPr id="2" name="Rounded Rectangle 1"/>
+          <p:cNvSpPr/>
+          <p:nvPr/>
+        </p:nvSpPr>
+        <p:spPr>
+          <a:xfrm>
+            <a:off x="0" y="0"/>
+            <a:ext cx="12191695" cy="1051560"/>
+          </a:xfrm>
+          <a:prstGeom prst="roundRect">
+            <a:avLst/>
+          </a:prstGeom>
+          <a:solidFill>
+            <a:srgbClr val="1F3A5F"/>
+          </a:solidFill>
+          <a:ln>
+            <a:noFill/>
+          </a:ln>
+        </p:spPr>
+        <p:style>
+          <a:lnRef idx="1">
+            <a:schemeClr val="accent1"/>
+          </a:lnRef>
+          <a:fillRef idx="3">
+            <a:schemeClr val="accent1"/>
+          </a:fillRef>
+          <a:effectRef idx="2">
+            <a:schemeClr val="accent1"/>
+          </a:effectRef>
+          <a:fontRef idx="minor">
+            <a:schemeClr val="lt1"/>
+          </a:fontRef>
+        </p:style>
+        <p:txBody>
+          <a:bodyPr rtlCol="0" anchor="ctr" wrap="square"/>
+          <a:lstStyle/>
+          <a:p>
+            <a:pPr algn="ctr"/>
+          </a:p>
+        </p:txBody>
+      </p:sp>
+      <p:sp>
+        <p:nvSpPr>
+          <p:cNvPr id="3" name="TextBox 2"/>
+          <p:cNvSpPr txBox="1"/>
+          <p:nvPr/>
+        </p:nvSpPr>
+        <p:spPr>
+          <a:xfrm>
+            <a:off x="457200" y="146304"/>
+            <a:ext cx="11247120" cy="777240"/>
+          </a:xfrm>
+          <a:prstGeom prst="rect">
+            <a:avLst/>
+          </a:prstGeom>
+          <a:noFill/>
+        </p:spPr>
+        <p:txBody>
+          <a:bodyPr wrap="square" anchor="ctr">
+            <a:spAutoFit/>
+          </a:bodyPr>
+          <a:lstStyle/>
+          <a:p>
+            <a:pPr algn="l"/>
+            <a:r>
+              <a:rPr sz="3400" b="1">
+                <a:solidFill>
+                  <a:srgbClr val="FFFFFF"/>
+                </a:solidFill>
+                <a:latin typeface="Arial"/>
+              </a:rPr>
+              <a:t>Drop It — prediction</a:t>
+            </a:r>
+          </a:p>
+        </p:txBody>
+      </p:sp>
+      <p:sp>
+        <p:nvSpPr>
+          <p:cNvPr id="4" name="TextBox 3"/>
+          <p:cNvSpPr txBox="1"/>
+          <p:nvPr/>
+        </p:nvSpPr>
+        <p:spPr>
+          <a:xfrm>
+            <a:off x="502920" y="1170432"/>
+            <a:ext cx="11247120" cy="457200"/>
+          </a:xfrm>
+          <a:prstGeom prst="rect">
+            <a:avLst/>
+          </a:prstGeom>
+          <a:noFill/>
+        </p:spPr>
+        <p:txBody>
+          <a:bodyPr wrap="square" anchor="t">
+            <a:spAutoFit/>
+          </a:bodyPr>
+          <a:lstStyle/>
+          <a:p>
+            <a:pPr algn="l"/>
+            <a:r>
+              <a:rPr sz="1600" b="0">
+                <a:solidFill>
+                  <a:srgbClr val="555555"/>
+                </a:solidFill>
+                <a:latin typeface="Arial"/>
+              </a:rPr>
+              <a:t>Application</a:t>
+            </a:r>
+          </a:p>
+        </p:txBody>
+      </p:sp>
+      <p:sp>
+        <p:nvSpPr>
+          <p:cNvPr id="5" name="Rounded Rectangle 4"/>
+          <p:cNvSpPr/>
+          <p:nvPr/>
+        </p:nvSpPr>
+        <p:spPr>
+          <a:xfrm>
+            <a:off x="1097280" y="2377440"/>
+            <a:ext cx="9966960" cy="1828800"/>
+          </a:xfrm>
+          <a:prstGeom prst="roundRect">
+            <a:avLst/>
+          </a:prstGeom>
+          <a:solidFill>
+            <a:srgbClr val="E8EDF4"/>
+          </a:solidFill>
+          <a:ln>
+            <a:noFill/>
+          </a:ln>
+        </p:spPr>
+        <p:style>
+          <a:lnRef idx="1">
+            <a:schemeClr val="accent1"/>
+          </a:lnRef>
+          <a:fillRef idx="3">
+            <a:schemeClr val="accent1"/>
+          </a:fillRef>
+          <a:effectRef idx="2">
+            <a:schemeClr val="accent1"/>
+          </a:effectRef>
+          <a:fontRef idx="minor">
+            <a:schemeClr val="lt1"/>
+          </a:fontRef>
+        </p:style>
+        <p:txBody>
+          <a:bodyPr rtlCol="0" anchor="ctr" wrap="square"/>
+          <a:lstStyle/>
+          <a:p>
+            <a:pPr algn="ctr"/>
+            <a:r>
+              <a:rPr sz="2800" b="1">
+                <a:solidFill>
+                  <a:srgbClr val="1F3A5F"/>
+                </a:solidFill>
+                <a:latin typeface="Arial"/>
+              </a:rPr>
+              <a:t>At which height will the ball make the biggest crater?</a:t>
+            </a:r>
+          </a:p>
+        </p:txBody>
+      </p:sp>
+      <p:sp>
+        <p:nvSpPr>
+          <p:cNvPr id="6" name="TextBox 5"/>
+          <p:cNvSpPr txBox="1"/>
+          <p:nvPr/>
+        </p:nvSpPr>
+        <p:spPr>
+          <a:xfrm>
+            <a:off x="11338560" y="6446520"/>
+            <a:ext cx="731520" cy="365760"/>
+          </a:xfrm>
+          <a:prstGeom prst="rect">
+            <a:avLst/>
+          </a:prstGeom>
+          <a:noFill/>
+        </p:spPr>
+        <p:txBody>
+          <a:bodyPr wrap="square" anchor="t">
+            <a:spAutoFit/>
+          </a:bodyPr>
+          <a:lstStyle/>
+          <a:p>
+            <a:pPr algn="r"/>
+            <a:r>
+              <a:rPr sz="1200" b="0">
+                <a:solidFill>
+                  <a:srgbClr val="555555"/>
+                </a:solidFill>
+                <a:latin typeface="Arial"/>
+              </a:rPr>
+              <a:t>24</a:t>
+            </a:r>
+          </a:p>
+        </p:txBody>
+      </p:sp>
+    </p:spTree>
+  </p:cSld>
+  <p:clrMapOvr>
+    <a:masterClrMapping/>
+  </p:clrMapOvr>
+</p:sld>
+</file>
+
+<file path=ppt/slides/slide26.xml><?xml version="1.0" encoding="utf-8"?>
+<p:sld xmlns:a="http://schemas.openxmlformats.org/drawingml/2006/main" xmlns:p="http://schemas.openxmlformats.org/presentationml/2006/main" xmlns:r="http://schemas.openxmlformats.org/officeDocument/2006/relationships">
+  <p:cSld>
+    <p:spTree>
+      <p:nvGrpSpPr>
+        <p:cNvPr id="1" name=""/>
+        <p:cNvGrpSpPr/>
+        <p:nvPr/>
+      </p:nvGrpSpPr>
+      <p:grpSpPr/>
+      <p:sp>
+        <p:nvSpPr>
+          <p:cNvPr id="2" name="Rounded Rectangle 1"/>
+          <p:cNvSpPr/>
+          <p:nvPr/>
+        </p:nvSpPr>
+        <p:spPr>
+          <a:xfrm>
+            <a:off x="0" y="0"/>
+            <a:ext cx="12191695" cy="1051560"/>
+          </a:xfrm>
+          <a:prstGeom prst="roundRect">
+            <a:avLst/>
+          </a:prstGeom>
+          <a:solidFill>
+            <a:srgbClr val="1F3A5F"/>
+          </a:solidFill>
+          <a:ln>
+            <a:noFill/>
+          </a:ln>
+        </p:spPr>
+        <p:style>
+          <a:lnRef idx="1">
+            <a:schemeClr val="accent1"/>
+          </a:lnRef>
+          <a:fillRef idx="3">
+            <a:schemeClr val="accent1"/>
+          </a:fillRef>
+          <a:effectRef idx="2">
+            <a:schemeClr val="accent1"/>
+          </a:effectRef>
+          <a:fontRef idx="minor">
+            <a:schemeClr val="lt1"/>
+          </a:fontRef>
+        </p:style>
+        <p:txBody>
+          <a:bodyPr rtlCol="0" anchor="ctr" wrap="square"/>
+          <a:lstStyle/>
+          <a:p>
+            <a:pPr algn="ctr"/>
+          </a:p>
+        </p:txBody>
+      </p:sp>
+      <p:sp>
+        <p:nvSpPr>
+          <p:cNvPr id="3" name="TextBox 2"/>
+          <p:cNvSpPr txBox="1"/>
+          <p:nvPr/>
+        </p:nvSpPr>
+        <p:spPr>
+          <a:xfrm>
+            <a:off x="457200" y="146304"/>
+            <a:ext cx="11247120" cy="777240"/>
+          </a:xfrm>
+          <a:prstGeom prst="rect">
+            <a:avLst/>
+          </a:prstGeom>
+          <a:noFill/>
+        </p:spPr>
+        <p:txBody>
+          <a:bodyPr wrap="square" anchor="ctr">
+            <a:spAutoFit/>
+          </a:bodyPr>
+          <a:lstStyle/>
+          <a:p>
+            <a:pPr algn="l"/>
+            <a:r>
+              <a:rPr sz="3400" b="1">
+                <a:solidFill>
+                  <a:srgbClr val="FFFFFF"/>
+                </a:solidFill>
+                <a:latin typeface="Arial"/>
+              </a:rPr>
+              <a:t>Drop It — setup</a:t>
+            </a:r>
+          </a:p>
+        </p:txBody>
+      </p:sp>
+      <p:sp>
+        <p:nvSpPr>
+          <p:cNvPr id="4" name="TextBox 3"/>
+          <p:cNvSpPr txBox="1"/>
+          <p:nvPr/>
+        </p:nvSpPr>
+        <p:spPr>
+          <a:xfrm>
+            <a:off x="502920" y="1170432"/>
+            <a:ext cx="11247120" cy="457200"/>
+          </a:xfrm>
+          <a:prstGeom prst="rect">
+            <a:avLst/>
+          </a:prstGeom>
+          <a:noFill/>
+        </p:spPr>
+        <p:txBody>
+          <a:bodyPr wrap="square" anchor="t">
+            <a:spAutoFit/>
+          </a:bodyPr>
+          <a:lstStyle/>
+          <a:p>
+            <a:pPr algn="l"/>
+            <a:r>
+              <a:rPr sz="1600" b="0">
+                <a:solidFill>
+                  <a:srgbClr val="555555"/>
+                </a:solidFill>
+                <a:latin typeface="Arial"/>
+              </a:rPr>
+              <a:t>Application</a:t>
+            </a:r>
+          </a:p>
+        </p:txBody>
+      </p:sp>
+      <p:sp>
+        <p:nvSpPr>
+          <p:cNvPr id="5" name="Rounded Rectangle 4"/>
+          <p:cNvSpPr/>
+          <p:nvPr/>
+        </p:nvSpPr>
+        <p:spPr>
+          <a:xfrm>
+            <a:off x="1371600" y="2103120"/>
+            <a:ext cx="9418320" cy="914400"/>
+          </a:xfrm>
+          <a:prstGeom prst="roundRect">
+            <a:avLst/>
+          </a:prstGeom>
+          <a:solidFill>
+            <a:srgbClr val="E8EDF4"/>
+          </a:solidFill>
+          <a:ln>
+            <a:noFill/>
+          </a:ln>
+        </p:spPr>
+        <p:style>
+          <a:lnRef idx="1">
+            <a:schemeClr val="accent1"/>
+          </a:lnRef>
+          <a:fillRef idx="3">
+            <a:schemeClr val="accent1"/>
+          </a:fillRef>
+          <a:effectRef idx="2">
+            <a:schemeClr val="accent1"/>
+          </a:effectRef>
+          <a:fontRef idx="minor">
+            <a:schemeClr val="lt1"/>
+          </a:fontRef>
+        </p:style>
+        <p:txBody>
+          <a:bodyPr rtlCol="0" anchor="ctr" wrap="square"/>
+          <a:lstStyle/>
+          <a:p>
+            <a:pPr algn="l"/>
+            <a:r>
+              <a:rPr sz="2400" b="1">
+                <a:solidFill>
+                  <a:srgbClr val="1F3A5F"/>
+                </a:solidFill>
+                <a:latin typeface="Arial"/>
+              </a:rPr>
+              <a:t>•  Same ball · same sand tray</a:t>
+            </a:r>
+          </a:p>
+        </p:txBody>
+      </p:sp>
+      <p:sp>
+        <p:nvSpPr>
+          <p:cNvPr id="6" name="Rounded Rectangle 5"/>
+          <p:cNvSpPr/>
+          <p:nvPr/>
+        </p:nvSpPr>
+        <p:spPr>
+          <a:xfrm>
+            <a:off x="1371600" y="3291839"/>
+            <a:ext cx="9418320" cy="914400"/>
+          </a:xfrm>
+          <a:prstGeom prst="roundRect">
+            <a:avLst/>
+          </a:prstGeom>
+          <a:solidFill>
+            <a:srgbClr val="E8EDF4"/>
+          </a:solidFill>
+          <a:ln>
+            <a:noFill/>
+          </a:ln>
+        </p:spPr>
+        <p:style>
+          <a:lnRef idx="1">
+            <a:schemeClr val="accent1"/>
+          </a:lnRef>
+          <a:fillRef idx="3">
+            <a:schemeClr val="accent1"/>
+          </a:fillRef>
+          <a:effectRef idx="2">
+            <a:schemeClr val="accent1"/>
+          </a:effectRef>
+          <a:fontRef idx="minor">
+            <a:schemeClr val="lt1"/>
+          </a:fontRef>
+        </p:style>
+        <p:txBody>
+          <a:bodyPr rtlCol="0" anchor="ctr" wrap="square"/>
+          <a:lstStyle/>
+          <a:p>
+            <a:pPr algn="l"/>
+            <a:r>
+              <a:rPr sz="2400" b="1">
+                <a:solidFill>
+                  <a:srgbClr val="1F3A5F"/>
+                </a:solidFill>
+                <a:latin typeface="Arial"/>
+              </a:rPr>
+              <a:t>•  Fixed heights: 30 cm · 60 cm (optional 90 cm)</a:t>
+            </a:r>
+          </a:p>
+        </p:txBody>
+      </p:sp>
+      <p:sp>
+        <p:nvSpPr>
+          <p:cNvPr id="7" name="Rounded Rectangle 6"/>
+          <p:cNvSpPr/>
+          <p:nvPr/>
+        </p:nvSpPr>
+        <p:spPr>
+          <a:xfrm>
+            <a:off x="1371600" y="4480560"/>
+            <a:ext cx="9418320" cy="914400"/>
+          </a:xfrm>
+          <a:prstGeom prst="roundRect">
+            <a:avLst/>
+          </a:prstGeom>
+          <a:solidFill>
+            <a:srgbClr val="E8EDF4"/>
+          </a:solidFill>
+          <a:ln>
+            <a:noFill/>
+          </a:ln>
+        </p:spPr>
+        <p:style>
+          <a:lnRef idx="1">
+            <a:schemeClr val="accent1"/>
+          </a:lnRef>
+          <a:fillRef idx="3">
+            <a:schemeClr val="accent1"/>
+          </a:fillRef>
+          <a:effectRef idx="2">
+            <a:schemeClr val="accent1"/>
+          </a:effectRef>
+          <a:fontRef idx="minor">
+            <a:schemeClr val="lt1"/>
+          </a:fontRef>
+        </p:style>
+        <p:txBody>
+          <a:bodyPr rtlCol="0" anchor="ctr" wrap="square"/>
+          <a:lstStyle/>
+          <a:p>
+            <a:pPr algn="l"/>
+            <a:r>
+              <a:rPr sz="2400" b="1">
+                <a:solidFill>
+                  <a:srgbClr val="1F3A5F"/>
+                </a:solidFill>
+                <a:latin typeface="Arial"/>
+              </a:rPr>
+              <a:t>•  Measure crater width (cm) · depth = shallow/medium/deep</a:t>
+            </a:r>
+          </a:p>
+        </p:txBody>
+      </p:sp>
+      <p:sp>
+        <p:nvSpPr>
+          <p:cNvPr id="8" name="TextBox 7"/>
+          <p:cNvSpPr txBox="1"/>
+          <p:nvPr/>
+        </p:nvSpPr>
+        <p:spPr>
+          <a:xfrm>
+            <a:off x="11338560" y="6446520"/>
+            <a:ext cx="731520" cy="365760"/>
+          </a:xfrm>
+          <a:prstGeom prst="rect">
+            <a:avLst/>
+          </a:prstGeom>
+          <a:noFill/>
+        </p:spPr>
+        <p:txBody>
+          <a:bodyPr wrap="square" anchor="t">
+            <a:spAutoFit/>
+          </a:bodyPr>
+          <a:lstStyle/>
+          <a:p>
+            <a:pPr algn="r"/>
+            <a:r>
+              <a:rPr sz="1200" b="0">
+                <a:solidFill>
+                  <a:srgbClr val="555555"/>
+                </a:solidFill>
+                <a:latin typeface="Arial"/>
+              </a:rPr>
+              <a:t>25</a:t>
+            </a:r>
+          </a:p>
+        </p:txBody>
+      </p:sp>
+    </p:spTree>
+  </p:cSld>
+  <p:clrMapOvr>
+    <a:masterClrMapping/>
+  </p:clrMapOvr>
+</p:sld>
+</file>
+
+<file path=ppt/slides/slide27.xml><?xml version="1.0" encoding="utf-8"?>
+<p:sld xmlns:a="http://schemas.openxmlformats.org/drawingml/2006/main" xmlns:p="http://schemas.openxmlformats.org/presentationml/2006/main" xmlns:r="http://schemas.openxmlformats.org/officeDocument/2006/relationships">
+  <p:cSld>
+    <p:spTree>
+      <p:nvGrpSpPr>
+        <p:cNvPr id="1" name=""/>
+        <p:cNvGrpSpPr/>
+        <p:nvPr/>
+      </p:nvGrpSpPr>
+      <p:grpSpPr/>
+      <p:sp>
+        <p:nvSpPr>
+          <p:cNvPr id="2" name="Rounded Rectangle 1"/>
+          <p:cNvSpPr/>
+          <p:nvPr/>
+        </p:nvSpPr>
+        <p:spPr>
+          <a:xfrm>
+            <a:off x="0" y="0"/>
+            <a:ext cx="12191695" cy="1051560"/>
+          </a:xfrm>
+          <a:prstGeom prst="roundRect">
+            <a:avLst/>
+          </a:prstGeom>
+          <a:solidFill>
+            <a:srgbClr val="1F3A5F"/>
+          </a:solidFill>
+          <a:ln>
+            <a:noFill/>
+          </a:ln>
+        </p:spPr>
+        <p:style>
+          <a:lnRef idx="1">
+            <a:schemeClr val="accent1"/>
+          </a:lnRef>
+          <a:fillRef idx="3">
+            <a:schemeClr val="accent1"/>
+          </a:fillRef>
+          <a:effectRef idx="2">
+            <a:schemeClr val="accent1"/>
+          </a:effectRef>
+          <a:fontRef idx="minor">
+            <a:schemeClr val="lt1"/>
+          </a:fontRef>
+        </p:style>
+        <p:txBody>
+          <a:bodyPr rtlCol="0" anchor="ctr" wrap="square"/>
+          <a:lstStyle/>
+          <a:p>
+            <a:pPr algn="ctr"/>
+          </a:p>
+        </p:txBody>
+      </p:sp>
+      <p:sp>
+        <p:nvSpPr>
+          <p:cNvPr id="3" name="TextBox 2"/>
+          <p:cNvSpPr txBox="1"/>
+          <p:nvPr/>
+        </p:nvSpPr>
+        <p:spPr>
+          <a:xfrm>
+            <a:off x="457200" y="146304"/>
+            <a:ext cx="11247120" cy="777240"/>
+          </a:xfrm>
+          <a:prstGeom prst="rect">
+            <a:avLst/>
+          </a:prstGeom>
+          <a:noFill/>
+        </p:spPr>
+        <p:txBody>
+          <a:bodyPr wrap="square" anchor="ctr">
+            <a:spAutoFit/>
+          </a:bodyPr>
+          <a:lstStyle/>
+          <a:p>
+            <a:pPr algn="l"/>
+            <a:r>
+              <a:rPr sz="3400" b="1">
+                <a:solidFill>
+                  <a:srgbClr val="FFFFFF"/>
+                </a:solidFill>
+                <a:latin typeface="Arial"/>
+              </a:rPr>
+              <a:t>Drop It — evidence</a:t>
+            </a:r>
+          </a:p>
+        </p:txBody>
+      </p:sp>
+      <p:sp>
+        <p:nvSpPr>
+          <p:cNvPr id="4" name="Rounded Rectangle 3"/>
+          <p:cNvSpPr/>
+          <p:nvPr/>
+        </p:nvSpPr>
+        <p:spPr>
+          <a:xfrm>
+            <a:off x="914400" y="2377440"/>
+            <a:ext cx="10332720" cy="1828800"/>
+          </a:xfrm>
+          <a:prstGeom prst="roundRect">
+            <a:avLst/>
+          </a:prstGeom>
+          <a:solidFill>
+            <a:srgbClr val="2E6B3F"/>
+          </a:solidFill>
+          <a:ln>
+            <a:noFill/>
+          </a:ln>
+        </p:spPr>
+        <p:style>
+          <a:lnRef idx="1">
+            <a:schemeClr val="accent1"/>
+          </a:lnRef>
+          <a:fillRef idx="3">
+            <a:schemeClr val="accent1"/>
+          </a:fillRef>
+          <a:effectRef idx="2">
+            <a:schemeClr val="accent1"/>
+          </a:effectRef>
+          <a:fontRef idx="minor">
+            <a:schemeClr val="lt1"/>
+          </a:fontRef>
+        </p:style>
+        <p:txBody>
+          <a:bodyPr rtlCol="0" anchor="ctr" wrap="square"/>
+          <a:lstStyle/>
+          <a:p>
+            <a:pPr algn="ctr"/>
+            <a:r>
+              <a:rPr sz="2600" b="1">
+                <a:solidFill>
+                  <a:srgbClr val="FFFFFF"/>
+                </a:solidFill>
+                <a:latin typeface="Arial"/>
+              </a:rPr>
+              <a:t>Higher drop → faster → bigger crater → greater energy of motion.</a:t>
+            </a:r>
+          </a:p>
+        </p:txBody>
+      </p:sp>
+      <p:sp>
+        <p:nvSpPr>
+          <p:cNvPr id="5" name="TextBox 4"/>
+          <p:cNvSpPr txBox="1"/>
+          <p:nvPr/>
+        </p:nvSpPr>
+        <p:spPr>
+          <a:xfrm>
+            <a:off x="11338560" y="6446520"/>
+            <a:ext cx="731520" cy="365760"/>
+          </a:xfrm>
+          <a:prstGeom prst="rect">
+            <a:avLst/>
+          </a:prstGeom>
+          <a:noFill/>
+        </p:spPr>
+        <p:txBody>
+          <a:bodyPr wrap="square" anchor="t">
+            <a:spAutoFit/>
+          </a:bodyPr>
+          <a:lstStyle/>
+          <a:p>
+            <a:pPr algn="r"/>
+            <a:r>
+              <a:rPr sz="1200" b="0">
+                <a:solidFill>
+                  <a:srgbClr val="555555"/>
+                </a:solidFill>
+                <a:latin typeface="Arial"/>
+              </a:rPr>
+              <a:t>26</a:t>
+            </a:r>
+          </a:p>
+        </p:txBody>
+      </p:sp>
+    </p:spTree>
+  </p:cSld>
+  <p:clrMapOvr>
+    <a:masterClrMapping/>
+  </p:clrMapOvr>
+</p:sld>
+</file>
+
+<file path=ppt/slides/slide28.xml><?xml version="1.0" encoding="utf-8"?>
+<p:sld xmlns:a="http://schemas.openxmlformats.org/drawingml/2006/main" xmlns:p="http://schemas.openxmlformats.org/presentationml/2006/main" xmlns:r="http://schemas.openxmlformats.org/officeDocument/2006/relationships">
+  <p:cSld>
+    <p:spTree>
+      <p:nvGrpSpPr>
+        <p:cNvPr id="1" name=""/>
+        <p:cNvGrpSpPr/>
+        <p:nvPr/>
+      </p:nvGrpSpPr>
+      <p:grpSpPr/>
+      <p:sp>
+        <p:nvSpPr>
+          <p:cNvPr id="2" name="Rounded Rectangle 1"/>
+          <p:cNvSpPr/>
+          <p:nvPr/>
+        </p:nvSpPr>
+        <p:spPr>
+          <a:xfrm>
+            <a:off x="0" y="0"/>
+            <a:ext cx="12191695" cy="1051560"/>
+          </a:xfrm>
+          <a:prstGeom prst="roundRect">
+            <a:avLst/>
+          </a:prstGeom>
+          <a:solidFill>
+            <a:srgbClr val="1F3A5F"/>
+          </a:solidFill>
+          <a:ln>
+            <a:noFill/>
+          </a:ln>
+        </p:spPr>
+        <p:style>
+          <a:lnRef idx="1">
+            <a:schemeClr val="accent1"/>
+          </a:lnRef>
+          <a:fillRef idx="3">
+            <a:schemeClr val="accent1"/>
+          </a:fillRef>
+          <a:effectRef idx="2">
+            <a:schemeClr val="accent1"/>
+          </a:effectRef>
+          <a:fontRef idx="minor">
+            <a:schemeClr val="lt1"/>
+          </a:fontRef>
+        </p:style>
+        <p:txBody>
+          <a:bodyPr rtlCol="0" anchor="ctr" wrap="square"/>
+          <a:lstStyle/>
+          <a:p>
+            <a:pPr algn="ctr"/>
+          </a:p>
+        </p:txBody>
+      </p:sp>
+      <p:sp>
+        <p:nvSpPr>
+          <p:cNvPr id="3" name="TextBox 2"/>
+          <p:cNvSpPr txBox="1"/>
+          <p:nvPr/>
+        </p:nvSpPr>
+        <p:spPr>
+          <a:xfrm>
+            <a:off x="457200" y="146304"/>
+            <a:ext cx="11247120" cy="777240"/>
+          </a:xfrm>
+          <a:prstGeom prst="rect">
+            <a:avLst/>
+          </a:prstGeom>
+          <a:noFill/>
+        </p:spPr>
+        <p:txBody>
+          <a:bodyPr wrap="square" anchor="ctr">
+            <a:spAutoFit/>
+          </a:bodyPr>
+          <a:lstStyle/>
+          <a:p>
+            <a:pPr algn="l"/>
+            <a:r>
+              <a:rPr sz="3400" b="1">
+                <a:solidFill>
+                  <a:srgbClr val="FFFFFF"/>
+                </a:solidFill>
+                <a:latin typeface="Arial"/>
+              </a:rPr>
+              <a:t>Bring it together</a:t>
+            </a:r>
+          </a:p>
+        </p:txBody>
+      </p:sp>
+      <p:sp>
+        <p:nvSpPr>
+          <p:cNvPr id="4" name="Rounded Rectangle 3"/>
+          <p:cNvSpPr/>
+          <p:nvPr/>
+        </p:nvSpPr>
+        <p:spPr>
+          <a:xfrm>
+            <a:off x="822960" y="2286000"/>
+            <a:ext cx="2743200" cy="1371600"/>
+          </a:xfrm>
+          <a:prstGeom prst="roundRect">
+            <a:avLst/>
+          </a:prstGeom>
+          <a:solidFill>
+            <a:srgbClr val="C05014"/>
+          </a:solidFill>
+          <a:ln>
+            <a:noFill/>
+          </a:ln>
+        </p:spPr>
+        <p:style>
+          <a:lnRef idx="1">
+            <a:schemeClr val="accent1"/>
+          </a:lnRef>
+          <a:fillRef idx="3">
+            <a:schemeClr val="accent1"/>
+          </a:fillRef>
+          <a:effectRef idx="2">
+            <a:schemeClr val="accent1"/>
+          </a:effectRef>
+          <a:fontRef idx="minor">
+            <a:schemeClr val="lt1"/>
+          </a:fontRef>
+        </p:style>
+        <p:txBody>
+          <a:bodyPr rtlCol="0" anchor="ctr" wrap="square"/>
+          <a:lstStyle/>
+          <a:p>
+            <a:pPr algn="ctr"/>
+            <a:r>
+              <a:rPr sz="2000" b="1">
+                <a:solidFill>
+                  <a:srgbClr val="FFFFFF"/>
+                </a:solidFill>
+                <a:latin typeface="Arial"/>
+              </a:rPr>
+              <a:t>SAME OBJECT</a:t>
+            </a:r>
+          </a:p>
+        </p:txBody>
+      </p:sp>
+      <p:sp>
+        <p:nvSpPr>
+          <p:cNvPr id="5" name="Right Arrow 4"/>
+          <p:cNvSpPr/>
+          <p:nvPr/>
+        </p:nvSpPr>
+        <p:spPr>
+          <a:xfrm>
+            <a:off x="3657600" y="2834640"/>
+            <a:ext cx="822960" cy="548640"/>
+          </a:xfrm>
+          <a:prstGeom prst="rightArrow">
+            <a:avLst/>
+          </a:prstGeom>
+          <a:solidFill>
+            <a:srgbClr val="C05014"/>
+          </a:solidFill>
+          <a:ln>
+            <a:noFill/>
+          </a:ln>
+        </p:spPr>
+        <p:style>
+          <a:lnRef idx="1">
+            <a:schemeClr val="accent1"/>
+          </a:lnRef>
+          <a:fillRef idx="3">
+            <a:schemeClr val="accent1"/>
+          </a:fillRef>
+          <a:effectRef idx="2">
+            <a:schemeClr val="accent1"/>
+          </a:effectRef>
+          <a:fontRef idx="minor">
+            <a:schemeClr val="lt1"/>
+          </a:fontRef>
+        </p:style>
+        <p:txBody>
+          <a:bodyPr rtlCol="0" anchor="ctr"/>
+          <a:lstStyle/>
+          <a:p>
+            <a:pPr algn="ctr"/>
+          </a:p>
+        </p:txBody>
+      </p:sp>
+      <p:sp>
+        <p:nvSpPr>
+          <p:cNvPr id="6" name="Rounded Rectangle 5"/>
+          <p:cNvSpPr/>
+          <p:nvPr/>
+        </p:nvSpPr>
+        <p:spPr>
+          <a:xfrm>
+            <a:off x="4572000" y="2286000"/>
+            <a:ext cx="2743200" cy="1371600"/>
+          </a:xfrm>
+          <a:prstGeom prst="roundRect">
+            <a:avLst/>
+          </a:prstGeom>
+          <a:solidFill>
+            <a:srgbClr val="E8EDF4"/>
+          </a:solidFill>
+          <a:ln>
+            <a:noFill/>
+          </a:ln>
+        </p:spPr>
+        <p:style>
+          <a:lnRef idx="1">
+            <a:schemeClr val="accent1"/>
+          </a:lnRef>
+          <a:fillRef idx="3">
+            <a:schemeClr val="accent1"/>
+          </a:fillRef>
+          <a:effectRef idx="2">
+            <a:schemeClr val="accent1"/>
+          </a:effectRef>
+          <a:fontRef idx="minor">
+            <a:schemeClr val="lt1"/>
+          </a:fontRef>
+        </p:style>
+        <p:txBody>
+          <a:bodyPr rtlCol="0" anchor="ctr" wrap="square"/>
+          <a:lstStyle/>
+          <a:p>
+            <a:pPr algn="ctr"/>
+            <a:r>
+              <a:rPr sz="2000" b="1">
+                <a:solidFill>
+                  <a:srgbClr val="1F3A5F"/>
+                </a:solidFill>
+                <a:latin typeface="Arial"/>
+              </a:rPr>
+              <a:t>FASTER MOTION</a:t>
+            </a:r>
+          </a:p>
+        </p:txBody>
+      </p:sp>
+      <p:sp>
+        <p:nvSpPr>
+          <p:cNvPr id="7" name="Right Arrow 6"/>
+          <p:cNvSpPr/>
+          <p:nvPr/>
+        </p:nvSpPr>
+        <p:spPr>
+          <a:xfrm>
+            <a:off x="7406640" y="2834640"/>
+            <a:ext cx="822960" cy="548640"/>
+          </a:xfrm>
+          <a:prstGeom prst="rightArrow">
+            <a:avLst/>
+          </a:prstGeom>
+          <a:solidFill>
+            <a:srgbClr val="C05014"/>
+          </a:solidFill>
+          <a:ln>
+            <a:noFill/>
+          </a:ln>
+        </p:spPr>
+        <p:style>
+          <a:lnRef idx="1">
+            <a:schemeClr val="accent1"/>
+          </a:lnRef>
+          <a:fillRef idx="3">
+            <a:schemeClr val="accent1"/>
+          </a:fillRef>
+          <a:effectRef idx="2">
+            <a:schemeClr val="accent1"/>
+          </a:effectRef>
+          <a:fontRef idx="minor">
+            <a:schemeClr val="lt1"/>
+          </a:fontRef>
+        </p:style>
+        <p:txBody>
+          <a:bodyPr rtlCol="0" anchor="ctr"/>
+          <a:lstStyle/>
+          <a:p>
+            <a:pPr algn="ctr"/>
+          </a:p>
+        </p:txBody>
+      </p:sp>
+      <p:sp>
+        <p:nvSpPr>
+          <p:cNvPr id="8" name="Rounded Rectangle 7"/>
+          <p:cNvSpPr/>
+          <p:nvPr/>
+        </p:nvSpPr>
+        <p:spPr>
+          <a:xfrm>
+            <a:off x="8321040" y="2286000"/>
+            <a:ext cx="3017520" cy="1371600"/>
+          </a:xfrm>
+          <a:prstGeom prst="roundRect">
+            <a:avLst/>
+          </a:prstGeom>
+          <a:solidFill>
+            <a:srgbClr val="2E6B3F"/>
+          </a:solidFill>
+          <a:ln>
+            <a:noFill/>
+          </a:ln>
+        </p:spPr>
+        <p:style>
+          <a:lnRef idx="1">
+            <a:schemeClr val="accent1"/>
+          </a:lnRef>
+          <a:fillRef idx="3">
+            <a:schemeClr val="accent1"/>
+          </a:fillRef>
+          <a:effectRef idx="2">
+            <a:schemeClr val="accent1"/>
+          </a:effectRef>
+          <a:fontRef idx="minor">
+            <a:schemeClr val="lt1"/>
+          </a:fontRef>
+        </p:style>
+        <p:txBody>
+          <a:bodyPr rtlCol="0" anchor="ctr" wrap="square"/>
+          <a:lstStyle/>
+          <a:p>
+            <a:pPr algn="ctr"/>
+            <a:r>
+              <a:rPr sz="1800" b="1">
+                <a:solidFill>
+                  <a:srgbClr val="FFFFFF"/>
+                </a:solidFill>
+                <a:latin typeface="Arial"/>
+              </a:rPr>
+              <a:t>GREATER ENERGY</a:t>
+            </a:r>
+          </a:p>
+        </p:txBody>
+      </p:sp>
+      <p:sp>
+        <p:nvSpPr>
+          <p:cNvPr id="9" name="TextBox 8"/>
+          <p:cNvSpPr txBox="1"/>
+          <p:nvPr/>
+        </p:nvSpPr>
+        <p:spPr>
+          <a:xfrm>
+            <a:off x="822960" y="4480560"/>
+            <a:ext cx="10515600" cy="822960"/>
+          </a:xfrm>
+          <a:prstGeom prst="rect">
+            <a:avLst/>
+          </a:prstGeom>
+          <a:noFill/>
+        </p:spPr>
+        <p:txBody>
+          <a:bodyPr wrap="square" anchor="t">
+            <a:spAutoFit/>
+          </a:bodyPr>
+          <a:lstStyle/>
+          <a:p>
+            <a:pPr algn="ctr"/>
+            <a:r>
+              <a:rPr sz="2400" b="1">
+                <a:solidFill>
+                  <a:srgbClr val="1F3A5F"/>
+                </a:solidFill>
+                <a:latin typeface="Arial"/>
+              </a:rPr>
+              <a:t>…shown by a greater observed change.</a:t>
+            </a:r>
+          </a:p>
+        </p:txBody>
+      </p:sp>
+      <p:sp>
+        <p:nvSpPr>
+          <p:cNvPr id="10" name="TextBox 9"/>
+          <p:cNvSpPr txBox="1"/>
+          <p:nvPr/>
+        </p:nvSpPr>
+        <p:spPr>
+          <a:xfrm>
+            <a:off x="11338560" y="6446520"/>
+            <a:ext cx="731520" cy="365760"/>
+          </a:xfrm>
+          <a:prstGeom prst="rect">
+            <a:avLst/>
+          </a:prstGeom>
+          <a:noFill/>
+        </p:spPr>
+        <p:txBody>
+          <a:bodyPr wrap="square" anchor="t">
+            <a:spAutoFit/>
+          </a:bodyPr>
+          <a:lstStyle/>
+          <a:p>
+            <a:pPr algn="r"/>
+            <a:r>
+              <a:rPr sz="1200" b="0">
+                <a:solidFill>
+                  <a:srgbClr val="555555"/>
+                </a:solidFill>
+                <a:latin typeface="Arial"/>
+              </a:rPr>
+              <a:t>27</a:t>
+            </a:r>
+          </a:p>
+        </p:txBody>
+      </p:sp>
+    </p:spTree>
+  </p:cSld>
+  <p:clrMapOvr>
+    <a:masterClrMapping/>
+  </p:clrMapOvr>
+</p:sld>
+</file>
+
+<file path=ppt/slides/slide29.xml><?xml version="1.0" encoding="utf-8"?>
+<p:sld xmlns:a="http://schemas.openxmlformats.org/drawingml/2006/main" xmlns:p="http://schemas.openxmlformats.org/presentationml/2006/main" xmlns:r="http://schemas.openxmlformats.org/officeDocument/2006/relationships">
+  <p:cSld>
+    <p:spTree>
+      <p:nvGrpSpPr>
+        <p:cNvPr id="1" name=""/>
+        <p:cNvGrpSpPr/>
+        <p:nvPr/>
+      </p:nvGrpSpPr>
+      <p:grpSpPr/>
+      <p:sp>
+        <p:nvSpPr>
+          <p:cNvPr id="2" name="Rounded Rectangle 1"/>
+          <p:cNvSpPr/>
+          <p:nvPr/>
+        </p:nvSpPr>
+        <p:spPr>
+          <a:xfrm>
+            <a:off x="0" y="0"/>
+            <a:ext cx="12191695" cy="1051560"/>
+          </a:xfrm>
+          <a:prstGeom prst="roundRect">
+            <a:avLst/>
+          </a:prstGeom>
+          <a:solidFill>
+            <a:srgbClr val="1F3A5F"/>
+          </a:solidFill>
+          <a:ln>
+            <a:noFill/>
+          </a:ln>
+        </p:spPr>
+        <p:style>
+          <a:lnRef idx="1">
+            <a:schemeClr val="accent1"/>
+          </a:lnRef>
+          <a:fillRef idx="3">
+            <a:schemeClr val="accent1"/>
+          </a:fillRef>
+          <a:effectRef idx="2">
+            <a:schemeClr val="accent1"/>
+          </a:effectRef>
+          <a:fontRef idx="minor">
+            <a:schemeClr val="lt1"/>
+          </a:fontRef>
+        </p:style>
+        <p:txBody>
+          <a:bodyPr rtlCol="0" anchor="ctr" wrap="square"/>
+          <a:lstStyle/>
+          <a:p>
+            <a:pPr algn="ctr"/>
+          </a:p>
+        </p:txBody>
+      </p:sp>
+      <p:sp>
+        <p:nvSpPr>
+          <p:cNvPr id="3" name="TextBox 2"/>
+          <p:cNvSpPr txBox="1"/>
+          <p:nvPr/>
+        </p:nvSpPr>
+        <p:spPr>
+          <a:xfrm>
+            <a:off x="457200" y="146304"/>
+            <a:ext cx="11247120" cy="777240"/>
+          </a:xfrm>
+          <a:prstGeom prst="rect">
+            <a:avLst/>
+          </a:prstGeom>
+          <a:noFill/>
+        </p:spPr>
+        <p:txBody>
+          <a:bodyPr wrap="square" anchor="ctr">
+            <a:spAutoFit/>
+          </a:bodyPr>
+          <a:lstStyle/>
+          <a:p>
+            <a:pPr algn="l"/>
+            <a:r>
+              <a:rPr sz="3400" b="1">
+                <a:solidFill>
+                  <a:srgbClr val="FFFFFF"/>
+                </a:solidFill>
+                <a:latin typeface="Arial"/>
+              </a:rPr>
+              <a:t>Exit check</a:t>
+            </a:r>
+          </a:p>
+        </p:txBody>
+      </p:sp>
+      <p:sp>
+        <p:nvSpPr>
+          <p:cNvPr id="4" name="Rounded Rectangle 3"/>
+          <p:cNvSpPr/>
+          <p:nvPr/>
+        </p:nvSpPr>
+        <p:spPr>
+          <a:xfrm>
+            <a:off x="914400" y="2286000"/>
+            <a:ext cx="10332720" cy="1097280"/>
+          </a:xfrm>
+          <a:prstGeom prst="roundRect">
+            <a:avLst/>
+          </a:prstGeom>
+          <a:solidFill>
+            <a:srgbClr val="E8EDF4"/>
+          </a:solidFill>
+          <a:ln>
+            <a:noFill/>
+          </a:ln>
+        </p:spPr>
+        <p:style>
+          <a:lnRef idx="1">
+            <a:schemeClr val="accent1"/>
+          </a:lnRef>
+          <a:fillRef idx="3">
+            <a:schemeClr val="accent1"/>
+          </a:fillRef>
+          <a:effectRef idx="2">
+            <a:schemeClr val="accent1"/>
+          </a:effectRef>
+          <a:fontRef idx="minor">
+            <a:schemeClr val="lt1"/>
+          </a:fontRef>
+        </p:style>
+        <p:txBody>
+          <a:bodyPr rtlCol="0" anchor="ctr" wrap="square"/>
+          <a:lstStyle/>
+          <a:p>
+            <a:pPr algn="ctr"/>
+            <a:r>
+              <a:rPr sz="2600" b="1">
+                <a:solidFill>
+                  <a:srgbClr val="1F3A5F"/>
+                </a:solidFill>
+                <a:latin typeface="Arial"/>
+              </a:rPr>
+              <a:t>Name one thing we MEASURED and one thing we INFERRED.</a:t>
+            </a:r>
+          </a:p>
+        </p:txBody>
+      </p:sp>
+      <p:sp>
+        <p:nvSpPr>
+          <p:cNvPr id="5" name="TextBox 4"/>
+          <p:cNvSpPr txBox="1"/>
+          <p:nvPr/>
+        </p:nvSpPr>
+        <p:spPr>
+          <a:xfrm>
+            <a:off x="914400" y="4206240"/>
+            <a:ext cx="10332720" cy="822960"/>
+          </a:xfrm>
+          <a:prstGeom prst="rect">
+            <a:avLst/>
+          </a:prstGeom>
+          <a:noFill/>
+        </p:spPr>
+        <p:txBody>
+          <a:bodyPr wrap="square" anchor="t">
+            <a:spAutoFit/>
+          </a:bodyPr>
+          <a:lstStyle/>
+          <a:p>
+            <a:pPr algn="ctr"/>
+            <a:r>
+              <a:rPr sz="2400" b="0">
+                <a:solidFill>
+                  <a:srgbClr val="555555"/>
+                </a:solidFill>
+                <a:latin typeface="Arial"/>
+              </a:rPr>
+              <a:t>MEASURED: ___________    INFERRED: ___________</a:t>
+            </a:r>
+          </a:p>
+        </p:txBody>
+      </p:sp>
+      <p:sp>
+        <p:nvSpPr>
+          <p:cNvPr id="6" name="TextBox 5"/>
+          <p:cNvSpPr txBox="1"/>
+          <p:nvPr/>
+        </p:nvSpPr>
+        <p:spPr>
+          <a:xfrm>
+            <a:off x="11338560" y="6446520"/>
+            <a:ext cx="731520" cy="365760"/>
+          </a:xfrm>
+          <a:prstGeom prst="rect">
+            <a:avLst/>
+          </a:prstGeom>
+          <a:noFill/>
+        </p:spPr>
+        <p:txBody>
+          <a:bodyPr wrap="square" anchor="t">
+            <a:spAutoFit/>
+          </a:bodyPr>
+          <a:lstStyle/>
+          <a:p>
+            <a:pPr algn="r"/>
+            <a:r>
+              <a:rPr sz="1200" b="0">
+                <a:solidFill>
+                  <a:srgbClr val="555555"/>
+                </a:solidFill>
+                <a:latin typeface="Arial"/>
+              </a:rPr>
+              <a:t>28</a:t>
             </a:r>
           </a:p>
         </p:txBody>
@@ -11512,4 +11947,324 @@
   </a:objectDefaults>
   <a:extraClrSchemeLst/>
 </a:theme>
+</file>
+
+<file path=ppt/theme/theme2.xml><?xml version="1.0" encoding="utf-8"?>
+<a:theme xmlns:a="http://schemas.openxmlformats.org/drawingml/2006/main" name="Office Theme">
+  <a:themeElements>
+    <a:clrScheme name="Office">
+      <a:dk1>
+        <a:sysClr val="windowText" lastClr="000000"/>
+      </a:dk1>
+      <a:lt1>
+        <a:sysClr val="window" lastClr="FFFFFF"/>
+      </a:lt1>
+      <a:dk2>
+        <a:srgbClr val="1F497D"/>
+      </a:dk2>
+      <a:lt2>
+        <a:srgbClr val="EEECE1"/>
+      </a:lt2>
+      <a:accent1>
+        <a:srgbClr val="4F81BD"/>
+      </a:accent1>
+      <a:accent2>
+        <a:srgbClr val="C0504D"/>
+      </a:accent2>
+      <a:accent3>
+        <a:srgbClr val="9BBB59"/>
+      </a:accent3>
+      <a:accent4>
+        <a:srgbClr val="8064A2"/>
+      </a:accent4>
+      <a:accent5>
+        <a:srgbClr val="4BACC6"/>
+      </a:accent5>
+      <a:accent6>
+        <a:srgbClr val="F79646"/>
+      </a:accent6>
+      <a:hlink>
+        <a:srgbClr val="0000FF"/>
+      </a:hlink>
+      <a:folHlink>
+        <a:srgbClr val="800080"/>
+      </a:folHlink>
+    </a:clrScheme>
+    <a:fontScheme name="Office">
+      <a:majorFont>
+        <a:latin typeface="Calibri"/>
+        <a:ea typeface=""/>
+        <a:cs typeface=""/>
+        <a:font script="Jpan" typeface="ＭＳ Ｐゴシック"/>
+        <a:font script="Hang" typeface="맑은 고딕"/>
+        <a:font script="Hans" typeface="宋体"/>
+        <a:font script="Hant" typeface="新細明體"/>
+        <a:font script="Arab" typeface="Times New Roman"/>
+        <a:font script="Hebr" typeface="Times New Roman"/>
+        <a:font script="Thai" typeface="Angsana New"/>
+        <a:font script="Ethi" typeface="Nyala"/>
+        <a:font script="Beng" typeface="Vrinda"/>
+        <a:font script="Gujr" typeface="Shruti"/>
+        <a:font script="Khmr" typeface="MoolBoran"/>
+        <a:font script="Knda" typeface="Tunga"/>
+        <a:font script="Guru" typeface="Raavi"/>
+        <a:font script="Cans" typeface="Euphemia"/>
+        <a:font script="Cher" typeface="Plantagenet Cherokee"/>
+        <a:font script="Yiii" typeface="Microsoft Yi Baiti"/>
+        <a:font script="Tibt" typeface="Microsoft Himalaya"/>
+        <a:font script="Thaa" typeface="MV Boli"/>
+        <a:font script="Deva" typeface="Mangal"/>
+        <a:font script="Telu" typeface="Gautami"/>
+        <a:font script="Taml" typeface="Latha"/>
+        <a:font script="Syrc" typeface="Estrangelo Edessa"/>
+        <a:font script="Orya" typeface="Kalinga"/>
+        <a:font script="Mlym" typeface="Kartika"/>
+        <a:font script="Laoo" typeface="DokChampa"/>
+        <a:font script="Sinh" typeface="Iskoola Pota"/>
+        <a:font script="Mong" typeface="Mongolian Baiti"/>
+        <a:font script="Viet" typeface="Times New Roman"/>
+        <a:font script="Uigh" typeface="Microsoft Uighur"/>
+        <a:font script="Geor" typeface="Sylfaen"/>
+      </a:majorFont>
+      <a:minorFont>
+        <a:latin typeface="Calibri"/>
+        <a:ea typeface=""/>
+        <a:cs typeface=""/>
+        <a:font script="Jpan" typeface="ＭＳ Ｐゴシック"/>
+        <a:font script="Hang" typeface="맑은 고딕"/>
+        <a:font script="Hans" typeface="宋体"/>
+        <a:font script="Hant" typeface="新細明體"/>
+        <a:font script="Arab" typeface="Arial"/>
+        <a:font script="Hebr" typeface="Arial"/>
+        <a:font script="Thai" typeface="Cordia New"/>
+        <a:font script="Ethi" typeface="Nyala"/>
+        <a:font script="Beng" typeface="Vrinda"/>
+        <a:font script="Gujr" typeface="Shruti"/>
+        <a:font script="Khmr" typeface="DaunPenh"/>
+        <a:font script="Knda" typeface="Tunga"/>
+        <a:font script="Guru" typeface="Raavi"/>
+        <a:font script="Cans" typeface="Euphemia"/>
+        <a:font script="Cher" typeface="Plantagenet Cherokee"/>
+        <a:font script="Yiii" typeface="Microsoft Yi Baiti"/>
+        <a:font script="Tibt" typeface="Microsoft Himalaya"/>
+        <a:font script="Thaa" typeface="MV Boli"/>
+        <a:font script="Deva" typeface="Mangal"/>
+        <a:font script="Telu" typeface="Gautami"/>
+        <a:font script="Taml" typeface="Latha"/>
+        <a:font script="Syrc" typeface="Estrangelo Edessa"/>
+        <a:font script="Orya" typeface="Kalinga"/>
+        <a:font script="Mlym" typeface="Kartika"/>
+        <a:font script="Laoo" typeface="DokChampa"/>
+        <a:font script="Sinh" typeface="Iskoola Pota"/>
+        <a:font script="Mong" typeface="Mongolian Baiti"/>
+        <a:font script="Viet" typeface="Arial"/>
+        <a:font script="Uigh" typeface="Microsoft Uighur"/>
+        <a:font script="Geor" typeface="Sylfaen"/>
+      </a:minorFont>
+    </a:fontScheme>
+    <a:fmtScheme name="Office">
+      <a:fillStyleLst>
+        <a:solidFill>
+          <a:schemeClr val="phClr"/>
+        </a:solidFill>
+        <a:gradFill rotWithShape="1">
+          <a:gsLst>
+            <a:gs pos="0">
+              <a:schemeClr val="phClr">
+                <a:tint val="50000"/>
+                <a:satMod val="300000"/>
+              </a:schemeClr>
+            </a:gs>
+            <a:gs pos="35000">
+              <a:schemeClr val="phClr">
+                <a:tint val="37000"/>
+                <a:satMod val="300000"/>
+              </a:schemeClr>
+            </a:gs>
+            <a:gs pos="100000">
+              <a:schemeClr val="phClr">
+                <a:tint val="15000"/>
+                <a:satMod val="350000"/>
+              </a:schemeClr>
+            </a:gs>
+          </a:gsLst>
+          <a:lin ang="16200000" scaled="1"/>
+        </a:gradFill>
+        <a:gradFill rotWithShape="1">
+          <a:gsLst>
+            <a:gs pos="0">
+              <a:schemeClr val="phClr">
+                <a:tint val="100000"/>
+                <a:shade val="100000"/>
+                <a:satMod val="130000"/>
+              </a:schemeClr>
+            </a:gs>
+            <a:gs pos="100000">
+              <a:schemeClr val="phClr">
+                <a:tint val="50000"/>
+                <a:shade val="100000"/>
+                <a:satMod val="350000"/>
+              </a:schemeClr>
+            </a:gs>
+          </a:gsLst>
+          <a:lin ang="16200000" scaled="0"/>
+        </a:gradFill>
+      </a:fillStyleLst>
+      <a:lnStyleLst>
+        <a:ln w="9525" cap="flat" cmpd="sng" algn="ctr">
+          <a:solidFill>
+            <a:schemeClr val="phClr">
+              <a:shade val="95000"/>
+              <a:satMod val="105000"/>
+            </a:schemeClr>
+          </a:solidFill>
+          <a:prstDash val="solid"/>
+        </a:ln>
+        <a:ln w="25400" cap="flat" cmpd="sng" algn="ctr">
+          <a:solidFill>
+            <a:schemeClr val="phClr"/>
+          </a:solidFill>
+          <a:prstDash val="solid"/>
+        </a:ln>
+        <a:ln w="38100" cap="flat" cmpd="sng" algn="ctr">
+          <a:solidFill>
+            <a:schemeClr val="phClr"/>
+          </a:solidFill>
+          <a:prstDash val="solid"/>
+        </a:ln>
+      </a:lnStyleLst>
+      <a:effectStyleLst>
+        <a:effectStyle>
+          <a:effectLst>
+            <a:outerShdw blurRad="40000" dist="20000" dir="5400000" rotWithShape="0">
+              <a:srgbClr val="000000">
+                <a:alpha val="38000"/>
+              </a:srgbClr>
+            </a:outerShdw>
+          </a:effectLst>
+        </a:effectStyle>
+        <a:effectStyle>
+          <a:effectLst>
+            <a:outerShdw blurRad="40000" dist="23000" dir="5400000" rotWithShape="0">
+              <a:srgbClr val="000000">
+                <a:alpha val="35000"/>
+              </a:srgbClr>
+            </a:outerShdw>
+          </a:effectLst>
+        </a:effectStyle>
+        <a:effectStyle>
+          <a:effectLst>
+            <a:outerShdw blurRad="40000" dist="23000" dir="5400000" rotWithShape="0">
+              <a:srgbClr val="000000">
+                <a:alpha val="35000"/>
+              </a:srgbClr>
+            </a:outerShdw>
+          </a:effectLst>
+          <a:scene3d>
+            <a:camera prst="orthographicFront">
+              <a:rot lat="0" lon="0" rev="0"/>
+            </a:camera>
+            <a:lightRig rig="threePt" dir="t">
+              <a:rot lat="0" lon="0" rev="1200000"/>
+            </a:lightRig>
+          </a:scene3d>
+          <a:sp3d>
+            <a:bevelT w="63500" h="25400"/>
+          </a:sp3d>
+        </a:effectStyle>
+      </a:effectStyleLst>
+      <a:bgFillStyleLst>
+        <a:solidFill>
+          <a:schemeClr val="phClr"/>
+        </a:solidFill>
+        <a:gradFill rotWithShape="1">
+          <a:gsLst>
+            <a:gs pos="0">
+              <a:schemeClr val="phClr">
+                <a:tint val="40000"/>
+                <a:satMod val="350000"/>
+              </a:schemeClr>
+            </a:gs>
+            <a:gs pos="40000">
+              <a:schemeClr val="phClr">
+                <a:tint val="45000"/>
+                <a:shade val="99000"/>
+                <a:satMod val="350000"/>
+              </a:schemeClr>
+            </a:gs>
+            <a:gs pos="100000">
+              <a:schemeClr val="phClr">
+                <a:shade val="20000"/>
+                <a:satMod val="255000"/>
+              </a:schemeClr>
+            </a:gs>
+          </a:gsLst>
+          <a:path path="circle">
+            <a:fillToRect l="50000" t="-80000" r="50000" b="180000"/>
+          </a:path>
+        </a:gradFill>
+        <a:gradFill rotWithShape="1">
+          <a:gsLst>
+            <a:gs pos="0">
+              <a:schemeClr val="phClr">
+                <a:tint val="80000"/>
+                <a:satMod val="300000"/>
+              </a:schemeClr>
+            </a:gs>
+            <a:gs pos="100000">
+              <a:schemeClr val="phClr">
+                <a:shade val="30000"/>
+                <a:satMod val="200000"/>
+              </a:schemeClr>
+            </a:gs>
+          </a:gsLst>
+          <a:path path="circle">
+            <a:fillToRect l="50000" t="50000" r="50000" b="50000"/>
+          </a:path>
+        </a:gradFill>
+      </a:bgFillStyleLst>
+    </a:fmtScheme>
+  </a:themeElements>
+  <a:objectDefaults>
+    <a:spDef>
+      <a:spPr/>
+      <a:bodyPr/>
+      <a:lstStyle/>
+      <a:style>
+        <a:lnRef idx="1">
+          <a:schemeClr val="accent1"/>
+        </a:lnRef>
+        <a:fillRef idx="3">
+          <a:schemeClr val="accent1"/>
+        </a:fillRef>
+        <a:effectRef idx="2">
+          <a:schemeClr val="accent1"/>
+        </a:effectRef>
+        <a:fontRef idx="minor">
+          <a:schemeClr val="lt1"/>
+        </a:fontRef>
+      </a:style>
+    </a:spDef>
+    <a:lnDef>
+      <a:spPr/>
+      <a:bodyPr/>
+      <a:lstStyle/>
+      <a:style>
+        <a:lnRef idx="2">
+          <a:schemeClr val="accent1"/>
+        </a:lnRef>
+        <a:fillRef idx="0">
+          <a:schemeClr val="accent1"/>
+        </a:fillRef>
+        <a:effectRef idx="1">
+          <a:schemeClr val="accent1"/>
+        </a:effectRef>
+        <a:fontRef idx="minor">
+          <a:schemeClr val="tx1"/>
+        </a:fontRef>
+      </a:style>
+    </a:lnDef>
+  </a:objectDefaults>
+  <a:extraClrSchemeLst/>
+</a:theme>
 </file>
--- a/production/slides/03-ch3-energy-speed-slides.pptx
+++ b/production/slides/03-ch3-energy-speed-slides.pptx
@@ -7305,7 +7305,7 @@
         <p:spPr>
           <a:xfrm>
             <a:off x="548640" y="1051560"/>
-            <a:ext cx="1234440" cy="420624"/>
+            <a:ext cx="1371600" cy="420624"/>
           </a:xfrm>
           <a:prstGeom prst="roundRect">
             <a:avLst>
@@ -7340,7 +7340,7 @@
           <a:p>
             <a:pPr algn="ctr"/>
             <a:r>
-              <a:rPr sz="1800" b="1">
+              <a:rPr sz="1600" b="1">
                 <a:solidFill>
                   <a:srgbClr val="FFFFFF"/>
                 </a:solidFill>
@@ -7626,7 +7626,7 @@
         <p:spPr>
           <a:xfrm>
             <a:off x="548640" y="1051560"/>
-            <a:ext cx="1234440" cy="420624"/>
+            <a:ext cx="1371600" cy="420624"/>
           </a:xfrm>
           <a:prstGeom prst="roundRect">
             <a:avLst>
@@ -7661,7 +7661,7 @@
           <a:p>
             <a:pPr algn="ctr"/>
             <a:r>
-              <a:rPr sz="1800" b="1">
+              <a:rPr sz="1600" b="1">
                 <a:solidFill>
                   <a:srgbClr val="FFFFFF"/>
                 </a:solidFill>
@@ -7979,7 +7979,7 @@
         <p:spPr>
           <a:xfrm>
             <a:off x="548640" y="1051560"/>
-            <a:ext cx="1234440" cy="420624"/>
+            <a:ext cx="1371600" cy="420624"/>
           </a:xfrm>
           <a:prstGeom prst="roundRect">
             <a:avLst>
@@ -8014,7 +8014,7 @@
           <a:p>
             <a:pPr algn="ctr"/>
             <a:r>
-              <a:rPr sz="1800" b="1">
+              <a:rPr sz="1600" b="1">
                 <a:solidFill>
                   <a:srgbClr val="FFFFFF"/>
                 </a:solidFill>
@@ -8316,7 +8316,7 @@
         <p:spPr>
           <a:xfrm>
             <a:off x="548640" y="1051560"/>
-            <a:ext cx="1234440" cy="420624"/>
+            <a:ext cx="1371600" cy="420624"/>
           </a:xfrm>
           <a:prstGeom prst="roundRect">
             <a:avLst>
@@ -8351,7 +8351,7 @@
           <a:p>
             <a:pPr algn="ctr"/>
             <a:r>
-              <a:rPr sz="1800" b="1">
+              <a:rPr sz="1600" b="1">
                 <a:solidFill>
                   <a:srgbClr val="FFFFFF"/>
                 </a:solidFill>
@@ -8637,7 +8637,7 @@
         <p:spPr>
           <a:xfrm>
             <a:off x="548640" y="1051560"/>
-            <a:ext cx="1234440" cy="420624"/>
+            <a:ext cx="1371600" cy="420624"/>
           </a:xfrm>
           <a:prstGeom prst="roundRect">
             <a:avLst>
@@ -8672,7 +8672,7 @@
           <a:p>
             <a:pPr algn="ctr"/>
             <a:r>
-              <a:rPr sz="1800" b="1">
+              <a:rPr sz="1600" b="1">
                 <a:solidFill>
                   <a:srgbClr val="FFFFFF"/>
                 </a:solidFill>
@@ -8958,7 +8958,7 @@
         <p:spPr>
           <a:xfrm>
             <a:off x="548640" y="1051560"/>
-            <a:ext cx="1234440" cy="420624"/>
+            <a:ext cx="1371600" cy="420624"/>
           </a:xfrm>
           <a:prstGeom prst="roundRect">
             <a:avLst>
@@ -8993,7 +8993,7 @@
           <a:p>
             <a:pPr algn="ctr"/>
             <a:r>
-              <a:rPr sz="1800" b="1">
+              <a:rPr sz="1600" b="1">
                 <a:solidFill>
                   <a:srgbClr val="FFFFFF"/>
                 </a:solidFill>
@@ -9279,7 +9279,7 @@
         <p:spPr>
           <a:xfrm>
             <a:off x="548640" y="1051560"/>
-            <a:ext cx="1234440" cy="420624"/>
+            <a:ext cx="1371600" cy="420624"/>
           </a:xfrm>
           <a:prstGeom prst="roundRect">
             <a:avLst>
@@ -9314,7 +9314,7 @@
           <a:p>
             <a:pPr algn="ctr"/>
             <a:r>
-              <a:rPr sz="1800" b="1">
+              <a:rPr sz="1600" b="1">
                 <a:solidFill>
                   <a:srgbClr val="FFFFFF"/>
                 </a:solidFill>
@@ -9485,7 +9485,23 @@
                 </a:solidFill>
                 <a:latin typeface="Avenir Next"/>
               </a:rPr>
-              <a:t>We ________ the speed relationship from that change.</a:t>
+              <a:t>We measure how far the ________ moves in centimeters.</a:t>
+            </a:r>
+          </a:p>
+          <a:p>
+            <a:pPr algn="l">
+              <a:spcAft>
+                <a:spcPts val="1000"/>
+              </a:spcAft>
+            </a:pPr>
+            <a:r>
+              <a:rPr sz="2800" b="1">
+                <a:solidFill>
+                  <a:srgbClr val="1A1D26"/>
+                </a:solidFill>
+                <a:latin typeface="Avenir Next"/>
+              </a:rPr>
+              <a:t>We do not measure a speed number.</a:t>
             </a:r>
           </a:p>
           <a:p>
@@ -9648,7 +9664,7 @@
         <p:spPr>
           <a:xfrm>
             <a:off x="548640" y="1051560"/>
-            <a:ext cx="1234440" cy="420624"/>
+            <a:ext cx="1371600" cy="420624"/>
           </a:xfrm>
           <a:prstGeom prst="roundRect">
             <a:avLst>
@@ -9683,7 +9699,7 @@
           <a:p>
             <a:pPr algn="ctr"/>
             <a:r>
-              <a:rPr sz="1800" b="1">
+              <a:rPr sz="1600" b="1">
                 <a:solidFill>
                   <a:srgbClr val="FFFFFF"/>
                 </a:solidFill>
@@ -9838,7 +9854,23 @@
                 </a:solidFill>
                 <a:latin typeface="Avenir Next"/>
               </a:rPr>
-              <a:t>We infer the speed relationship from that change.</a:t>
+              <a:t>We measure how far the cup moves in centimeters.</a:t>
+            </a:r>
+          </a:p>
+          <a:p>
+            <a:pPr algn="l">
+              <a:spcAft>
+                <a:spcPts val="1000"/>
+              </a:spcAft>
+            </a:pPr>
+            <a:r>
+              <a:rPr sz="2800" b="1">
+                <a:solidFill>
+                  <a:srgbClr val="1A1D26"/>
+                </a:solidFill>
+                <a:latin typeface="Avenir Next"/>
+              </a:rPr>
+              <a:t>We do not measure a speed number.</a:t>
             </a:r>
           </a:p>
           <a:p>
@@ -10001,7 +10033,7 @@
         <p:spPr>
           <a:xfrm>
             <a:off x="548640" y="1051560"/>
-            <a:ext cx="1234440" cy="420624"/>
+            <a:ext cx="1371600" cy="420624"/>
           </a:xfrm>
           <a:prstGeom prst="roundRect">
             <a:avLst>
@@ -10036,7 +10068,7 @@
           <a:p>
             <a:pPr algn="ctr"/>
             <a:r>
-              <a:rPr sz="1800" b="1">
+              <a:rPr sz="1600" b="1">
                 <a:solidFill>
                   <a:srgbClr val="FFFFFF"/>
                 </a:solidFill>
@@ -10338,7 +10370,7 @@
         <p:spPr>
           <a:xfrm>
             <a:off x="548640" y="1051560"/>
-            <a:ext cx="1234440" cy="420624"/>
+            <a:ext cx="1371600" cy="420624"/>
           </a:xfrm>
           <a:prstGeom prst="roundRect">
             <a:avLst>
@@ -10373,7 +10405,7 @@
           <a:p>
             <a:pPr algn="ctr"/>
             <a:r>
-              <a:rPr sz="1800" b="1">
+              <a:rPr sz="1600" b="1">
                 <a:solidFill>
                   <a:srgbClr val="FFFFFF"/>
                 </a:solidFill>
@@ -10659,7 +10691,7 @@
         <p:spPr>
           <a:xfrm>
             <a:off x="548640" y="1051560"/>
-            <a:ext cx="1234440" cy="420624"/>
+            <a:ext cx="1371600" cy="420624"/>
           </a:xfrm>
           <a:prstGeom prst="roundRect">
             <a:avLst>
@@ -10694,7 +10726,7 @@
           <a:p>
             <a:pPr algn="ctr"/>
             <a:r>
-              <a:rPr sz="1800" b="1">
+              <a:rPr sz="1600" b="1">
                 <a:solidFill>
                   <a:srgbClr val="FFFFFF"/>
                 </a:solidFill>
@@ -10980,7 +11012,7 @@
         <p:spPr>
           <a:xfrm>
             <a:off x="548640" y="1051560"/>
-            <a:ext cx="1234440" cy="420624"/>
+            <a:ext cx="1371600" cy="420624"/>
           </a:xfrm>
           <a:prstGeom prst="roundRect">
             <a:avLst>
@@ -11015,7 +11047,7 @@
           <a:p>
             <a:pPr algn="ctr"/>
             <a:r>
-              <a:rPr sz="1800" b="1">
+              <a:rPr sz="1600" b="1">
                 <a:solidFill>
                   <a:srgbClr val="FFFFFF"/>
                 </a:solidFill>
@@ -11317,7 +11349,7 @@
         <p:spPr>
           <a:xfrm>
             <a:off x="548640" y="1051560"/>
-            <a:ext cx="1234440" cy="420624"/>
+            <a:ext cx="1371600" cy="420624"/>
           </a:xfrm>
           <a:prstGeom prst="roundRect">
             <a:avLst>
@@ -11352,7 +11384,7 @@
           <a:p>
             <a:pPr algn="ctr"/>
             <a:r>
-              <a:rPr sz="1800" b="1">
+              <a:rPr sz="1600" b="1">
                 <a:solidFill>
                   <a:srgbClr val="FFFFFF"/>
                 </a:solidFill>
@@ -11638,7 +11670,7 @@
         <p:spPr>
           <a:xfrm>
             <a:off x="548640" y="1051560"/>
-            <a:ext cx="1234440" cy="420624"/>
+            <a:ext cx="1371600" cy="420624"/>
           </a:xfrm>
           <a:prstGeom prst="roundRect">
             <a:avLst>
@@ -11673,7 +11705,7 @@
           <a:p>
             <a:pPr algn="ctr"/>
             <a:r>
-              <a:rPr sz="1800" b="1">
+              <a:rPr sz="1600" b="1">
                 <a:solidFill>
                   <a:srgbClr val="FFFFFF"/>
                 </a:solidFill>
@@ -11943,7 +11975,7 @@
         <p:spPr>
           <a:xfrm>
             <a:off x="548640" y="1051560"/>
-            <a:ext cx="1234440" cy="420624"/>
+            <a:ext cx="1371600" cy="420624"/>
           </a:xfrm>
           <a:prstGeom prst="roundRect">
             <a:avLst>
@@ -11978,7 +12010,7 @@
           <a:p>
             <a:pPr algn="ctr"/>
             <a:r>
-              <a:rPr sz="1800" b="1">
+              <a:rPr sz="1600" b="1">
                 <a:solidFill>
                   <a:srgbClr val="FFFFFF"/>
                 </a:solidFill>
@@ -12248,7 +12280,7 @@
         <p:spPr>
           <a:xfrm>
             <a:off x="548640" y="1051560"/>
-            <a:ext cx="1234440" cy="420624"/>
+            <a:ext cx="1371600" cy="420624"/>
           </a:xfrm>
           <a:prstGeom prst="roundRect">
             <a:avLst>
@@ -12283,7 +12315,7 @@
           <a:p>
             <a:pPr algn="ctr"/>
             <a:r>
-              <a:rPr sz="1800" b="1">
+              <a:rPr sz="1600" b="1">
                 <a:solidFill>
                   <a:srgbClr val="FFFFFF"/>
                 </a:solidFill>
@@ -12601,7 +12633,7 @@
         <p:spPr>
           <a:xfrm>
             <a:off x="548640" y="1051560"/>
-            <a:ext cx="1234440" cy="420624"/>
+            <a:ext cx="1371600" cy="420624"/>
           </a:xfrm>
           <a:prstGeom prst="roundRect">
             <a:avLst>
@@ -12636,7 +12668,7 @@
           <a:p>
             <a:pPr algn="ctr"/>
             <a:r>
-              <a:rPr sz="1800" b="1">
+              <a:rPr sz="1600" b="1">
                 <a:solidFill>
                   <a:srgbClr val="FFFFFF"/>
                 </a:solidFill>
@@ -12922,7 +12954,7 @@
         <p:spPr>
           <a:xfrm>
             <a:off x="548640" y="1051560"/>
-            <a:ext cx="1234440" cy="420624"/>
+            <a:ext cx="1371600" cy="420624"/>
           </a:xfrm>
           <a:prstGeom prst="roundRect">
             <a:avLst>
@@ -12957,7 +12989,7 @@
           <a:p>
             <a:pPr algn="ctr"/>
             <a:r>
-              <a:rPr sz="1800" b="1">
+              <a:rPr sz="1600" b="1">
                 <a:solidFill>
                   <a:srgbClr val="FFFFFF"/>
                 </a:solidFill>
@@ -13243,7 +13275,7 @@
         <p:spPr>
           <a:xfrm>
             <a:off x="548640" y="1051560"/>
-            <a:ext cx="1234440" cy="420624"/>
+            <a:ext cx="1371600" cy="420624"/>
           </a:xfrm>
           <a:prstGeom prst="roundRect">
             <a:avLst>
@@ -13278,7 +13310,7 @@
           <a:p>
             <a:pPr algn="ctr"/>
             <a:r>
-              <a:rPr sz="1800" b="1">
+              <a:rPr sz="1600" b="1">
                 <a:solidFill>
                   <a:srgbClr val="FFFFFF"/>
                 </a:solidFill>
@@ -13580,7 +13612,7 @@
         <p:spPr>
           <a:xfrm>
             <a:off x="548640" y="1051560"/>
-            <a:ext cx="1234440" cy="420624"/>
+            <a:ext cx="1371600" cy="420624"/>
           </a:xfrm>
           <a:prstGeom prst="roundRect">
             <a:avLst>
@@ -13615,7 +13647,7 @@
           <a:p>
             <a:pPr algn="ctr"/>
             <a:r>
-              <a:rPr sz="1800" b="1">
+              <a:rPr sz="1600" b="1">
                 <a:solidFill>
                   <a:srgbClr val="FFFFFF"/>
                 </a:solidFill>
@@ -13770,7 +13802,7 @@
                 </a:solidFill>
                 <a:latin typeface="Avenir Next"/>
               </a:rPr>
-              <a:t>We inferred the speed relationship from that change.</a:t>
+              <a:t>The cup moved farther. That is a greater change.</a:t>
             </a:r>
           </a:p>
         </p:txBody>
@@ -13901,7 +13933,7 @@
         <p:spPr>
           <a:xfrm>
             <a:off x="548640" y="1051560"/>
-            <a:ext cx="1234440" cy="420624"/>
+            <a:ext cx="1371600" cy="420624"/>
           </a:xfrm>
           <a:prstGeom prst="roundRect">
             <a:avLst>
@@ -13936,7 +13968,7 @@
           <a:p>
             <a:pPr algn="ctr"/>
             <a:r>
-              <a:rPr sz="1800" b="1">
+              <a:rPr sz="1600" b="1">
                 <a:solidFill>
                   <a:srgbClr val="FFFFFF"/>
                 </a:solidFill>
@@ -14222,7 +14254,7 @@
         <p:spPr>
           <a:xfrm>
             <a:off x="548640" y="1051560"/>
-            <a:ext cx="1234440" cy="420624"/>
+            <a:ext cx="1371600" cy="420624"/>
           </a:xfrm>
           <a:prstGeom prst="roundRect">
             <a:avLst>
@@ -14257,7 +14289,7 @@
           <a:p>
             <a:pPr algn="ctr"/>
             <a:r>
-              <a:rPr sz="1800" b="1">
+              <a:rPr sz="1600" b="1">
                 <a:solidFill>
                   <a:srgbClr val="FFFFFF"/>
                 </a:solidFill>
@@ -14543,7 +14575,7 @@
         <p:spPr>
           <a:xfrm>
             <a:off x="548640" y="1051560"/>
-            <a:ext cx="1234440" cy="420624"/>
+            <a:ext cx="1371600" cy="420624"/>
           </a:xfrm>
           <a:prstGeom prst="roundRect">
             <a:avLst>
@@ -14578,7 +14610,7 @@
           <a:p>
             <a:pPr algn="ctr"/>
             <a:r>
-              <a:rPr sz="1800" b="1">
+              <a:rPr sz="1600" b="1">
                 <a:solidFill>
                   <a:srgbClr val="FFFFFF"/>
                 </a:solidFill>
@@ -14718,6 +14750,22 @@
                 <a:latin typeface="Avenir Next"/>
               </a:rPr>
               <a:t>A steeper ramp. One ball.</a:t>
+            </a:r>
+          </a:p>
+          <a:p>
+            <a:pPr algn="l">
+              <a:spcAft>
+                <a:spcPts val="1000"/>
+              </a:spcAft>
+            </a:pPr>
+            <a:r>
+              <a:rPr sz="2800" b="1">
+                <a:solidFill>
+                  <a:srgbClr val="1A1D26"/>
+                </a:solidFill>
+                <a:latin typeface="Avenir Next"/>
+              </a:rPr>
+              <a:t>The Reader says objects pick up more speed on steeper ramps.</a:t>
             </a:r>
           </a:p>
           <a:p>
@@ -14864,7 +14912,7 @@
         <p:spPr>
           <a:xfrm>
             <a:off x="548640" y="1051560"/>
-            <a:ext cx="1234440" cy="420624"/>
+            <a:ext cx="1371600" cy="420624"/>
           </a:xfrm>
           <a:prstGeom prst="roundRect">
             <a:avLst>
@@ -14899,7 +14947,7 @@
           <a:p>
             <a:pPr algn="ctr"/>
             <a:r>
-              <a:rPr sz="1800" b="1">
+              <a:rPr sz="1600" b="1">
                 <a:solidFill>
                   <a:srgbClr val="FFFFFF"/>
                 </a:solidFill>
@@ -15038,7 +15086,23 @@
                 </a:solidFill>
                 <a:latin typeface="Avenir Next"/>
               </a:rPr>
-              <a:t>Write the missing word.</a:t>
+              <a:t>Write the missing words.</a:t>
+            </a:r>
+          </a:p>
+          <a:p>
+            <a:pPr algn="l">
+              <a:spcAft>
+                <a:spcPts val="1000"/>
+              </a:spcAft>
+            </a:pPr>
+            <a:r>
+              <a:rPr sz="2800" b="1">
+                <a:solidFill>
+                  <a:srgbClr val="1A1D26"/>
+                </a:solidFill>
+                <a:latin typeface="Avenir Next"/>
+              </a:rPr>
+              <a:t>Objects pick up more ________ on steeper ramps.</a:t>
             </a:r>
           </a:p>
           <a:p>
@@ -15185,7 +15249,7 @@
         <p:spPr>
           <a:xfrm>
             <a:off x="548640" y="1051560"/>
-            <a:ext cx="1234440" cy="420624"/>
+            <a:ext cx="1371600" cy="420624"/>
           </a:xfrm>
           <a:prstGeom prst="roundRect">
             <a:avLst>
@@ -15220,7 +15284,7 @@
           <a:p>
             <a:pPr algn="ctr"/>
             <a:r>
-              <a:rPr sz="1800" b="1">
+              <a:rPr sz="1600" b="1">
                 <a:solidFill>
                   <a:srgbClr val="FFFFFF"/>
                 </a:solidFill>
@@ -15346,6 +15410,22 @@
             <a:spAutoFit/>
           </a:bodyPr>
           <a:lstStyle/>
+          <a:p>
+            <a:pPr algn="l">
+              <a:spcAft>
+                <a:spcPts val="1000"/>
+              </a:spcAft>
+            </a:pPr>
+            <a:r>
+              <a:rPr sz="2800" b="1">
+                <a:solidFill>
+                  <a:srgbClr val="1A1D26"/>
+                </a:solidFill>
+                <a:latin typeface="Avenir Next"/>
+              </a:rPr>
+              <a:t>Objects pick up more speed on steeper ramps.</a:t>
+            </a:r>
+          </a:p>
           <a:p>
             <a:pPr algn="l">
               <a:spcAft>
@@ -15490,7 +15570,7 @@
         <p:spPr>
           <a:xfrm>
             <a:off x="548640" y="1051560"/>
-            <a:ext cx="1234440" cy="420624"/>
+            <a:ext cx="1371600" cy="420624"/>
           </a:xfrm>
           <a:prstGeom prst="roundRect">
             <a:avLst>
@@ -15525,7 +15605,7 @@
           <a:p>
             <a:pPr algn="ctr"/>
             <a:r>
-              <a:rPr sz="1800" b="1">
+              <a:rPr sz="1600" b="1">
                 <a:solidFill>
                   <a:srgbClr val="FFFFFF"/>
                 </a:solidFill>
@@ -15811,7 +15891,7 @@
         <p:spPr>
           <a:xfrm>
             <a:off x="548640" y="1051560"/>
-            <a:ext cx="1234440" cy="420624"/>
+            <a:ext cx="1371600" cy="420624"/>
           </a:xfrm>
           <a:prstGeom prst="roundRect">
             <a:avLst>
@@ -15846,7 +15926,7 @@
           <a:p>
             <a:pPr algn="ctr"/>
             <a:r>
-              <a:rPr sz="1800" b="1">
+              <a:rPr sz="1600" b="1">
                 <a:solidFill>
                   <a:srgbClr val="FFFFFF"/>
                 </a:solidFill>
@@ -16132,7 +16212,7 @@
         <p:spPr>
           <a:xfrm>
             <a:off x="548640" y="1051560"/>
-            <a:ext cx="1234440" cy="420624"/>
+            <a:ext cx="1371600" cy="420624"/>
           </a:xfrm>
           <a:prstGeom prst="roundRect">
             <a:avLst>
@@ -16167,7 +16247,7 @@
           <a:p>
             <a:pPr algn="ctr"/>
             <a:r>
-              <a:rPr sz="1800" b="1">
+              <a:rPr sz="1600" b="1">
                 <a:solidFill>
                   <a:srgbClr val="FFFFFF"/>
                 </a:solidFill>
@@ -16453,7 +16533,7 @@
         <p:spPr>
           <a:xfrm>
             <a:off x="548640" y="1051560"/>
-            <a:ext cx="1234440" cy="420624"/>
+            <a:ext cx="1371600" cy="420624"/>
           </a:xfrm>
           <a:prstGeom prst="roundRect">
             <a:avLst>
@@ -16488,7 +16568,7 @@
           <a:p>
             <a:pPr algn="ctr"/>
             <a:r>
-              <a:rPr sz="1800" b="1">
+              <a:rPr sz="1600" b="1">
                 <a:solidFill>
                   <a:srgbClr val="FFFFFF"/>
                 </a:solidFill>
@@ -16790,7 +16870,7 @@
         <p:spPr>
           <a:xfrm>
             <a:off x="548640" y="1051560"/>
-            <a:ext cx="1234440" cy="420624"/>
+            <a:ext cx="1371600" cy="420624"/>
           </a:xfrm>
           <a:prstGeom prst="roundRect">
             <a:avLst>
@@ -16825,7 +16905,7 @@
           <a:p>
             <a:pPr algn="ctr"/>
             <a:r>
-              <a:rPr sz="1800" b="1">
+              <a:rPr sz="1600" b="1">
                 <a:solidFill>
                   <a:srgbClr val="FFFFFF"/>
                 </a:solidFill>
@@ -17111,7 +17191,7 @@
         <p:spPr>
           <a:xfrm>
             <a:off x="548640" y="1051560"/>
-            <a:ext cx="1234440" cy="420624"/>
+            <a:ext cx="1371600" cy="420624"/>
           </a:xfrm>
           <a:prstGeom prst="roundRect">
             <a:avLst>
@@ -17146,13 +17226,13 @@
           <a:p>
             <a:pPr algn="ctr"/>
             <a:r>
-              <a:rPr sz="1800" b="1">
+              <a:rPr sz="1600" b="1">
                 <a:solidFill>
                   <a:srgbClr val="FFFFFF"/>
                 </a:solidFill>
                 <a:latin typeface="Avenir Next"/>
               </a:rPr>
-              <a:t>BQ_NOW</a:t>
+              <a:t>BQ NOW</a:t>
             </a:r>
           </a:p>
         </p:txBody>
@@ -17448,7 +17528,7 @@
         <p:spPr>
           <a:xfrm>
             <a:off x="548640" y="1051560"/>
-            <a:ext cx="1234440" cy="420624"/>
+            <a:ext cx="1371600" cy="420624"/>
           </a:xfrm>
           <a:prstGeom prst="roundRect">
             <a:avLst>
@@ -17483,13 +17563,13 @@
           <a:p>
             <a:pPr algn="ctr"/>
             <a:r>
-              <a:rPr sz="1800" b="1">
+              <a:rPr sz="1600" b="1">
                 <a:solidFill>
                   <a:srgbClr val="FFFFFF"/>
                 </a:solidFill>
                 <a:latin typeface="Avenir Next"/>
               </a:rPr>
-              <a:t>BQ_NOW</a:t>
+              <a:t>BQ NOW</a:t>
             </a:r>
           </a:p>
         </p:txBody>
@@ -17769,7 +17849,7 @@
         <p:spPr>
           <a:xfrm>
             <a:off x="548640" y="1051560"/>
-            <a:ext cx="1234440" cy="420624"/>
+            <a:ext cx="1371600" cy="420624"/>
           </a:xfrm>
           <a:prstGeom prst="roundRect">
             <a:avLst>
@@ -17804,7 +17884,7 @@
           <a:p>
             <a:pPr algn="ctr"/>
             <a:r>
-              <a:rPr sz="1800" b="1">
+              <a:rPr sz="1600" b="1">
                 <a:solidFill>
                   <a:srgbClr val="FFFFFF"/>
                 </a:solidFill>
@@ -18106,7 +18186,7 @@
         <p:spPr>
           <a:xfrm>
             <a:off x="548640" y="1051560"/>
-            <a:ext cx="1234440" cy="420624"/>
+            <a:ext cx="1371600" cy="420624"/>
           </a:xfrm>
           <a:prstGeom prst="roundRect">
             <a:avLst>
@@ -18141,13 +18221,13 @@
           <a:p>
             <a:pPr algn="ctr"/>
             <a:r>
-              <a:rPr sz="1800" b="1">
+              <a:rPr sz="1600" b="1">
                 <a:solidFill>
                   <a:srgbClr val="FFFFFF"/>
                 </a:solidFill>
                 <a:latin typeface="Avenir Next"/>
               </a:rPr>
-              <a:t>DROP</a:t>
+              <a:t>DROP IT</a:t>
             </a:r>
           </a:p>
         </p:txBody>
@@ -18443,7 +18523,7 @@
         <p:spPr>
           <a:xfrm>
             <a:off x="548640" y="1051560"/>
-            <a:ext cx="1234440" cy="420624"/>
+            <a:ext cx="1371600" cy="420624"/>
           </a:xfrm>
           <a:prstGeom prst="roundRect">
             <a:avLst>
@@ -18478,7 +18558,7 @@
           <a:p>
             <a:pPr algn="ctr"/>
             <a:r>
-              <a:rPr sz="1800" b="1">
+              <a:rPr sz="1600" b="1">
                 <a:solidFill>
                   <a:srgbClr val="FFFFFF"/>
                 </a:solidFill>
@@ -18780,7 +18860,7 @@
         <p:spPr>
           <a:xfrm>
             <a:off x="548640" y="1051560"/>
-            <a:ext cx="1234440" cy="420624"/>
+            <a:ext cx="1371600" cy="420624"/>
           </a:xfrm>
           <a:prstGeom prst="roundRect">
             <a:avLst>
@@ -18815,7 +18895,7 @@
           <a:p>
             <a:pPr algn="ctr"/>
             <a:r>
-              <a:rPr sz="1800" b="1">
+              <a:rPr sz="1600" b="1">
                 <a:solidFill>
                   <a:srgbClr val="FFFFFF"/>
                 </a:solidFill>
@@ -19117,7 +19197,7 @@
         <p:spPr>
           <a:xfrm>
             <a:off x="548640" y="1051560"/>
-            <a:ext cx="1234440" cy="420624"/>
+            <a:ext cx="1371600" cy="420624"/>
           </a:xfrm>
           <a:prstGeom prst="roundRect">
             <a:avLst>
@@ -19152,7 +19232,7 @@
           <a:p>
             <a:pPr algn="ctr"/>
             <a:r>
-              <a:rPr sz="1800" b="1">
+              <a:rPr sz="1600" b="1">
                 <a:solidFill>
                   <a:srgbClr val="FFFFFF"/>
                 </a:solidFill>
@@ -19438,7 +19518,7 @@
         <p:spPr>
           <a:xfrm>
             <a:off x="548640" y="1051560"/>
-            <a:ext cx="1234440" cy="420624"/>
+            <a:ext cx="1371600" cy="420624"/>
           </a:xfrm>
           <a:prstGeom prst="roundRect">
             <a:avLst>
@@ -19473,7 +19553,7 @@
           <a:p>
             <a:pPr algn="ctr"/>
             <a:r>
-              <a:rPr sz="1800" b="1">
+              <a:rPr sz="1600" b="1">
                 <a:solidFill>
                   <a:srgbClr val="FFFFFF"/>
                 </a:solidFill>
@@ -19743,7 +19823,7 @@
         <p:spPr>
           <a:xfrm>
             <a:off x="548640" y="1051560"/>
-            <a:ext cx="1234440" cy="420624"/>
+            <a:ext cx="1371600" cy="420624"/>
           </a:xfrm>
           <a:prstGeom prst="roundRect">
             <a:avLst>
@@ -19778,7 +19858,7 @@
           <a:p>
             <a:pPr algn="ctr"/>
             <a:r>
-              <a:rPr sz="1800" b="1">
+              <a:rPr sz="1600" b="1">
                 <a:solidFill>
                   <a:srgbClr val="FFFFFF"/>
                 </a:solidFill>
@@ -20080,7 +20160,7 @@
         <p:spPr>
           <a:xfrm>
             <a:off x="548640" y="1051560"/>
-            <a:ext cx="1234440" cy="420624"/>
+            <a:ext cx="1371600" cy="420624"/>
           </a:xfrm>
           <a:prstGeom prst="roundRect">
             <a:avLst>
@@ -20115,7 +20195,7 @@
           <a:p>
             <a:pPr algn="ctr"/>
             <a:r>
-              <a:rPr sz="1800" b="1">
+              <a:rPr sz="1600" b="1">
                 <a:solidFill>
                   <a:srgbClr val="FFFFFF"/>
                 </a:solidFill>

--- a/production/slides/03-ch3-energy-speed-slides.pptx
+++ b/production/slides/03-ch3-energy-speed-slides.pptx
@@ -812,7 +812,7 @@
           </a:p>
           <a:p>
             <a:r>
-              <a:t>SAY Say we will measure the ramp and the cup movement in centimeters. Do not say the Tuesday missing words.</a:t>
+              <a:t>SAY Say we will measure the ramp height and how far the target moves, in centimeters. Do not say the Tuesday missing words.</a:t>
             </a:r>
           </a:p>
         </p:txBody>
@@ -1237,7 +1237,7 @@
           </a:p>
           <a:p>
             <a:r>
-              <a:t>SAY The words are height, infer, and same.</a:t>
+              <a:t>SAY The words are height, cup, height, and same.</a:t>
             </a:r>
           </a:p>
         </p:txBody>
@@ -2257,7 +2257,7 @@
           </a:p>
           <a:p>
             <a:r>
-              <a:t>SAY Ask which height made the bigger change. Speed is inferred from that change.</a:t>
+              <a:t>SAY Ask which setup moved the cup farther. Cup movement is evidence of change, not a speed measurement.</a:t>
             </a:r>
           </a:p>
         </p:txBody>
@@ -2512,7 +2512,7 @@
           </a:p>
           <a:p>
             <a:r>
-              <a:t>SAY Steeper ramp. One ball. The bucket or cup moves farther. Do not say the missing word.</a:t>
+              <a:t>SAY Steeper ramp. One ball. The bucket or cup moves farther. Do not say either missing word.</a:t>
             </a:r>
           </a:p>
         </p:txBody>
@@ -2597,7 +2597,7 @@
           </a:p>
           <a:p>
             <a:r>
-              <a:t>SAY Students write the missing word.</a:t>
+              <a:t>SAY Students write both missing words.</a:t>
             </a:r>
           </a:p>
         </p:txBody>
@@ -2682,7 +2682,7 @@
           </a:p>
           <a:p>
             <a:r>
-              <a:t>SAY The word is greater.</a:t>
+              <a:t>SAY The words are speed and greater.</a:t>
             </a:r>
           </a:p>
         </p:txBody>
@@ -7359,8 +7359,8 @@
         </p:nvSpPr>
         <p:spPr>
           <a:xfrm>
-            <a:off x="1920240" y="1005840"/>
-            <a:ext cx="7498079" cy="512064"/>
+            <a:off x="2057400" y="1005840"/>
+            <a:ext cx="7863840" cy="512064"/>
           </a:xfrm>
           <a:prstGeom prst="rect">
             <a:avLst/>
@@ -7680,8 +7680,8 @@
         </p:nvSpPr>
         <p:spPr>
           <a:xfrm>
-            <a:off x="1920240" y="1005840"/>
-            <a:ext cx="7498079" cy="512064"/>
+            <a:off x="2057400" y="1005840"/>
+            <a:ext cx="7863840" cy="512064"/>
           </a:xfrm>
           <a:prstGeom prst="rect">
             <a:avLst/>
@@ -8033,8 +8033,8 @@
         </p:nvSpPr>
         <p:spPr>
           <a:xfrm>
-            <a:off x="1920240" y="1005840"/>
-            <a:ext cx="7498079" cy="512064"/>
+            <a:off x="2057400" y="1005840"/>
+            <a:ext cx="7863840" cy="512064"/>
           </a:xfrm>
           <a:prstGeom prst="rect">
             <a:avLst/>
@@ -8153,7 +8153,7 @@
                 </a:solidFill>
                 <a:latin typeface="Avenir Next"/>
               </a:rPr>
-              <a:t>Tomorrow we measure the ramp and how far the cup moves.</a:t>
+              <a:t>Tomorrow we measure the ramp height and how far the target moves.</a:t>
             </a:r>
           </a:p>
           <a:p>
@@ -8370,8 +8370,8 @@
         </p:nvSpPr>
         <p:spPr>
           <a:xfrm>
-            <a:off x="1920240" y="1005840"/>
-            <a:ext cx="7498079" cy="512064"/>
+            <a:off x="2057400" y="1005840"/>
+            <a:ext cx="7863840" cy="512064"/>
           </a:xfrm>
           <a:prstGeom prst="rect">
             <a:avLst/>
@@ -8691,8 +8691,8 @@
         </p:nvSpPr>
         <p:spPr>
           <a:xfrm>
-            <a:off x="1920240" y="1005840"/>
-            <a:ext cx="7498079" cy="512064"/>
+            <a:off x="2057400" y="1005840"/>
+            <a:ext cx="7863840" cy="512064"/>
           </a:xfrm>
           <a:prstGeom prst="rect">
             <a:avLst/>
@@ -9012,8 +9012,8 @@
         </p:nvSpPr>
         <p:spPr>
           <a:xfrm>
-            <a:off x="1920240" y="1005840"/>
-            <a:ext cx="7498079" cy="512064"/>
+            <a:off x="2057400" y="1005840"/>
+            <a:ext cx="7863840" cy="512064"/>
           </a:xfrm>
           <a:prstGeom prst="rect">
             <a:avLst/>
@@ -9333,8 +9333,8 @@
         </p:nvSpPr>
         <p:spPr>
           <a:xfrm>
-            <a:off x="1920240" y="1005840"/>
-            <a:ext cx="7498079" cy="512064"/>
+            <a:off x="2057400" y="1005840"/>
+            <a:ext cx="7863840" cy="512064"/>
           </a:xfrm>
           <a:prstGeom prst="rect">
             <a:avLst/>
@@ -9718,8 +9718,8 @@
         </p:nvSpPr>
         <p:spPr>
           <a:xfrm>
-            <a:off x="1920240" y="1005840"/>
-            <a:ext cx="7498079" cy="512064"/>
+            <a:off x="2057400" y="1005840"/>
+            <a:ext cx="7863840" cy="512064"/>
           </a:xfrm>
           <a:prstGeom prst="rect">
             <a:avLst/>
@@ -10087,8 +10087,8 @@
         </p:nvSpPr>
         <p:spPr>
           <a:xfrm>
-            <a:off x="1920240" y="1005840"/>
-            <a:ext cx="7498079" cy="512064"/>
+            <a:off x="2057400" y="1005840"/>
+            <a:ext cx="7863840" cy="512064"/>
           </a:xfrm>
           <a:prstGeom prst="rect">
             <a:avLst/>
@@ -10424,8 +10424,8 @@
         </p:nvSpPr>
         <p:spPr>
           <a:xfrm>
-            <a:off x="1920240" y="1005840"/>
-            <a:ext cx="7498079" cy="512064"/>
+            <a:off x="2057400" y="1005840"/>
+            <a:ext cx="7863840" cy="512064"/>
           </a:xfrm>
           <a:prstGeom prst="rect">
             <a:avLst/>
@@ -10745,8 +10745,8 @@
         </p:nvSpPr>
         <p:spPr>
           <a:xfrm>
-            <a:off x="1920240" y="1005840"/>
-            <a:ext cx="7498079" cy="512064"/>
+            <a:off x="2057400" y="1005840"/>
+            <a:ext cx="7863840" cy="512064"/>
           </a:xfrm>
           <a:prstGeom prst="rect">
             <a:avLst/>
@@ -11066,8 +11066,8 @@
         </p:nvSpPr>
         <p:spPr>
           <a:xfrm>
-            <a:off x="1920240" y="1005840"/>
-            <a:ext cx="7498079" cy="512064"/>
+            <a:off x="2057400" y="1005840"/>
+            <a:ext cx="7863840" cy="512064"/>
           </a:xfrm>
           <a:prstGeom prst="rect">
             <a:avLst/>
@@ -11403,8 +11403,8 @@
         </p:nvSpPr>
         <p:spPr>
           <a:xfrm>
-            <a:off x="1920240" y="1005840"/>
-            <a:ext cx="7498079" cy="512064"/>
+            <a:off x="2057400" y="1005840"/>
+            <a:ext cx="7863840" cy="512064"/>
           </a:xfrm>
           <a:prstGeom prst="rect">
             <a:avLst/>
@@ -11724,8 +11724,8 @@
         </p:nvSpPr>
         <p:spPr>
           <a:xfrm>
-            <a:off x="1920240" y="1005840"/>
-            <a:ext cx="7498079" cy="512064"/>
+            <a:off x="2057400" y="1005840"/>
+            <a:ext cx="7863840" cy="512064"/>
           </a:xfrm>
           <a:prstGeom prst="rect">
             <a:avLst/>
@@ -12029,8 +12029,8 @@
         </p:nvSpPr>
         <p:spPr>
           <a:xfrm>
-            <a:off x="1920240" y="1005840"/>
-            <a:ext cx="7498079" cy="512064"/>
+            <a:off x="2057400" y="1005840"/>
+            <a:ext cx="7863840" cy="512064"/>
           </a:xfrm>
           <a:prstGeom prst="rect">
             <a:avLst/>
@@ -12280,7 +12280,7 @@
         <p:spPr>
           <a:xfrm>
             <a:off x="548640" y="1051560"/>
-            <a:ext cx="1371600" cy="420624"/>
+            <a:ext cx="1417320" cy="420624"/>
           </a:xfrm>
           <a:prstGeom prst="roundRect">
             <a:avLst>
@@ -12334,8 +12334,8 @@
         </p:nvSpPr>
         <p:spPr>
           <a:xfrm>
-            <a:off x="1920240" y="1005840"/>
-            <a:ext cx="7498079" cy="512064"/>
+            <a:off x="2103120" y="1005840"/>
+            <a:ext cx="7818119" cy="512064"/>
           </a:xfrm>
           <a:prstGeom prst="rect">
             <a:avLst/>
@@ -12633,7 +12633,7 @@
         <p:spPr>
           <a:xfrm>
             <a:off x="548640" y="1051560"/>
-            <a:ext cx="1371600" cy="420624"/>
+            <a:ext cx="1417320" cy="420624"/>
           </a:xfrm>
           <a:prstGeom prst="roundRect">
             <a:avLst>
@@ -12687,8 +12687,8 @@
         </p:nvSpPr>
         <p:spPr>
           <a:xfrm>
-            <a:off x="1920240" y="1005840"/>
-            <a:ext cx="7498079" cy="512064"/>
+            <a:off x="2103120" y="1005840"/>
+            <a:ext cx="7818119" cy="512064"/>
           </a:xfrm>
           <a:prstGeom prst="rect">
             <a:avLst/>
@@ -13008,8 +13008,8 @@
         </p:nvSpPr>
         <p:spPr>
           <a:xfrm>
-            <a:off x="1920240" y="1005840"/>
-            <a:ext cx="7498079" cy="512064"/>
+            <a:off x="2057400" y="1005840"/>
+            <a:ext cx="7863840" cy="512064"/>
           </a:xfrm>
           <a:prstGeom prst="rect">
             <a:avLst/>
@@ -13329,8 +13329,8 @@
         </p:nvSpPr>
         <p:spPr>
           <a:xfrm>
-            <a:off x="1920240" y="1005840"/>
-            <a:ext cx="7498079" cy="512064"/>
+            <a:off x="2057400" y="1005840"/>
+            <a:ext cx="7863840" cy="512064"/>
           </a:xfrm>
           <a:prstGeom prst="rect">
             <a:avLst/>
@@ -13666,8 +13666,8 @@
         </p:nvSpPr>
         <p:spPr>
           <a:xfrm>
-            <a:off x="1920240" y="1005840"/>
-            <a:ext cx="7498079" cy="512064"/>
+            <a:off x="2057400" y="1005840"/>
+            <a:ext cx="7863840" cy="512064"/>
           </a:xfrm>
           <a:prstGeom prst="rect">
             <a:avLst/>
@@ -13786,7 +13786,7 @@
                 </a:solidFill>
                 <a:latin typeface="Avenir Next"/>
               </a:rPr>
-              <a:t>Which setup made the bigger change?</a:t>
+              <a:t>Which setup moved the cup farther?</a:t>
             </a:r>
           </a:p>
           <a:p>
@@ -13802,7 +13802,7 @@
                 </a:solidFill>
                 <a:latin typeface="Avenir Next"/>
               </a:rPr>
-              <a:t>The cup moved farther. That is a greater change.</a:t>
+              <a:t>A farther cup move is a bigger change.</a:t>
             </a:r>
           </a:p>
         </p:txBody>
@@ -13987,8 +13987,8 @@
         </p:nvSpPr>
         <p:spPr>
           <a:xfrm>
-            <a:off x="1920240" y="1005840"/>
-            <a:ext cx="7498079" cy="512064"/>
+            <a:off x="2057400" y="1005840"/>
+            <a:ext cx="7863840" cy="512064"/>
           </a:xfrm>
           <a:prstGeom prst="rect">
             <a:avLst/>
@@ -14308,8 +14308,8 @@
         </p:nvSpPr>
         <p:spPr>
           <a:xfrm>
-            <a:off x="1920240" y="1005840"/>
-            <a:ext cx="7498079" cy="512064"/>
+            <a:off x="2057400" y="1005840"/>
+            <a:ext cx="7863840" cy="512064"/>
           </a:xfrm>
           <a:prstGeom prst="rect">
             <a:avLst/>
@@ -14629,8 +14629,8 @@
         </p:nvSpPr>
         <p:spPr>
           <a:xfrm>
-            <a:off x="1920240" y="1005840"/>
-            <a:ext cx="7498079" cy="512064"/>
+            <a:off x="2057400" y="1005840"/>
+            <a:ext cx="7863840" cy="512064"/>
           </a:xfrm>
           <a:prstGeom prst="rect">
             <a:avLst/>
@@ -14765,7 +14765,7 @@
                 </a:solidFill>
                 <a:latin typeface="Avenir Next"/>
               </a:rPr>
-              <a:t>The Reader says objects pick up more speed on steeper ramps.</a:t>
+              <a:t>The Reader tells us what happens when the same ball rolls down a steeper ramp.</a:t>
             </a:r>
           </a:p>
           <a:p>
@@ -14966,8 +14966,8 @@
         </p:nvSpPr>
         <p:spPr>
           <a:xfrm>
-            <a:off x="1920240" y="1005840"/>
-            <a:ext cx="7498079" cy="512064"/>
+            <a:off x="2057400" y="1005840"/>
+            <a:ext cx="7863840" cy="512064"/>
           </a:xfrm>
           <a:prstGeom prst="rect">
             <a:avLst/>
@@ -15303,8 +15303,8 @@
         </p:nvSpPr>
         <p:spPr>
           <a:xfrm>
-            <a:off x="1920240" y="1005840"/>
-            <a:ext cx="7498079" cy="512064"/>
+            <a:off x="2057400" y="1005840"/>
+            <a:ext cx="7863840" cy="512064"/>
           </a:xfrm>
           <a:prstGeom prst="rect">
             <a:avLst/>
@@ -15624,8 +15624,8 @@
         </p:nvSpPr>
         <p:spPr>
           <a:xfrm>
-            <a:off x="1920240" y="1005840"/>
-            <a:ext cx="7498079" cy="512064"/>
+            <a:off x="2057400" y="1005840"/>
+            <a:ext cx="7863840" cy="512064"/>
           </a:xfrm>
           <a:prstGeom prst="rect">
             <a:avLst/>
@@ -15945,8 +15945,8 @@
         </p:nvSpPr>
         <p:spPr>
           <a:xfrm>
-            <a:off x="1920240" y="1005840"/>
-            <a:ext cx="7498079" cy="512064"/>
+            <a:off x="2057400" y="1005840"/>
+            <a:ext cx="7863840" cy="512064"/>
           </a:xfrm>
           <a:prstGeom prst="rect">
             <a:avLst/>
@@ -16266,8 +16266,8 @@
         </p:nvSpPr>
         <p:spPr>
           <a:xfrm>
-            <a:off x="1920240" y="1005840"/>
-            <a:ext cx="7498079" cy="512064"/>
+            <a:off x="2057400" y="1005840"/>
+            <a:ext cx="7863840" cy="512064"/>
           </a:xfrm>
           <a:prstGeom prst="rect">
             <a:avLst/>
@@ -16533,7 +16533,7 @@
         <p:spPr>
           <a:xfrm>
             <a:off x="548640" y="1051560"/>
-            <a:ext cx="1371600" cy="420624"/>
+            <a:ext cx="1417320" cy="420624"/>
           </a:xfrm>
           <a:prstGeom prst="roundRect">
             <a:avLst>
@@ -16587,8 +16587,8 @@
         </p:nvSpPr>
         <p:spPr>
           <a:xfrm>
-            <a:off x="1920240" y="1005840"/>
-            <a:ext cx="7498079" cy="512064"/>
+            <a:off x="2103120" y="1005840"/>
+            <a:ext cx="7818119" cy="512064"/>
           </a:xfrm>
           <a:prstGeom prst="rect">
             <a:avLst/>
@@ -16870,7 +16870,7 @@
         <p:spPr>
           <a:xfrm>
             <a:off x="548640" y="1051560"/>
-            <a:ext cx="1371600" cy="420624"/>
+            <a:ext cx="1417320" cy="420624"/>
           </a:xfrm>
           <a:prstGeom prst="roundRect">
             <a:avLst>
@@ -16924,8 +16924,8 @@
         </p:nvSpPr>
         <p:spPr>
           <a:xfrm>
-            <a:off x="1920240" y="1005840"/>
-            <a:ext cx="7498079" cy="512064"/>
+            <a:off x="2103120" y="1005840"/>
+            <a:ext cx="7818119" cy="512064"/>
           </a:xfrm>
           <a:prstGeom prst="rect">
             <a:avLst/>
@@ -17191,7 +17191,7 @@
         <p:spPr>
           <a:xfrm>
             <a:off x="548640" y="1051560"/>
-            <a:ext cx="1371600" cy="420624"/>
+            <a:ext cx="1600200" cy="420624"/>
           </a:xfrm>
           <a:prstGeom prst="roundRect">
             <a:avLst>
@@ -17245,8 +17245,8 @@
         </p:nvSpPr>
         <p:spPr>
           <a:xfrm>
-            <a:off x="1920240" y="1005840"/>
-            <a:ext cx="7498079" cy="512064"/>
+            <a:off x="2286000" y="1005840"/>
+            <a:ext cx="7635240" cy="512064"/>
           </a:xfrm>
           <a:prstGeom prst="rect">
             <a:avLst/>
@@ -17528,7 +17528,7 @@
         <p:spPr>
           <a:xfrm>
             <a:off x="548640" y="1051560"/>
-            <a:ext cx="1371600" cy="420624"/>
+            <a:ext cx="1600200" cy="420624"/>
           </a:xfrm>
           <a:prstGeom prst="roundRect">
             <a:avLst>
@@ -17582,8 +17582,8 @@
         </p:nvSpPr>
         <p:spPr>
           <a:xfrm>
-            <a:off x="1920240" y="1005840"/>
-            <a:ext cx="7498079" cy="512064"/>
+            <a:off x="2286000" y="1005840"/>
+            <a:ext cx="7635240" cy="512064"/>
           </a:xfrm>
           <a:prstGeom prst="rect">
             <a:avLst/>
@@ -17903,8 +17903,8 @@
         </p:nvSpPr>
         <p:spPr>
           <a:xfrm>
-            <a:off x="1920240" y="1005840"/>
-            <a:ext cx="7498079" cy="512064"/>
+            <a:off x="2057400" y="1005840"/>
+            <a:ext cx="7863840" cy="512064"/>
           </a:xfrm>
           <a:prstGeom prst="rect">
             <a:avLst/>
@@ -18186,7 +18186,7 @@
         <p:spPr>
           <a:xfrm>
             <a:off x="548640" y="1051560"/>
-            <a:ext cx="1371600" cy="420624"/>
+            <a:ext cx="1783080" cy="420624"/>
           </a:xfrm>
           <a:prstGeom prst="roundRect">
             <a:avLst>
@@ -18240,8 +18240,8 @@
         </p:nvSpPr>
         <p:spPr>
           <a:xfrm>
-            <a:off x="1920240" y="1005840"/>
-            <a:ext cx="7498079" cy="512064"/>
+            <a:off x="2468880" y="1005840"/>
+            <a:ext cx="7452359" cy="512064"/>
           </a:xfrm>
           <a:prstGeom prst="rect">
             <a:avLst/>
@@ -18523,7 +18523,7 @@
         <p:spPr>
           <a:xfrm>
             <a:off x="548640" y="1051560"/>
-            <a:ext cx="1371600" cy="420624"/>
+            <a:ext cx="1783080" cy="420624"/>
           </a:xfrm>
           <a:prstGeom prst="roundRect">
             <a:avLst>
@@ -18577,8 +18577,8 @@
         </p:nvSpPr>
         <p:spPr>
           <a:xfrm>
-            <a:off x="1920240" y="1005840"/>
-            <a:ext cx="7498079" cy="512064"/>
+            <a:off x="2468880" y="1005840"/>
+            <a:ext cx="7452359" cy="512064"/>
           </a:xfrm>
           <a:prstGeom prst="rect">
             <a:avLst/>
@@ -18914,8 +18914,8 @@
         </p:nvSpPr>
         <p:spPr>
           <a:xfrm>
-            <a:off x="1920240" y="1005840"/>
-            <a:ext cx="7498079" cy="512064"/>
+            <a:off x="2057400" y="1005840"/>
+            <a:ext cx="7863840" cy="512064"/>
           </a:xfrm>
           <a:prstGeom prst="rect">
             <a:avLst/>
@@ -19251,8 +19251,8 @@
         </p:nvSpPr>
         <p:spPr>
           <a:xfrm>
-            <a:off x="1920240" y="1005840"/>
-            <a:ext cx="7498079" cy="512064"/>
+            <a:off x="2057400" y="1005840"/>
+            <a:ext cx="7863840" cy="512064"/>
           </a:xfrm>
           <a:prstGeom prst="rect">
             <a:avLst/>
@@ -19572,8 +19572,8 @@
         </p:nvSpPr>
         <p:spPr>
           <a:xfrm>
-            <a:off x="1920240" y="1005840"/>
-            <a:ext cx="7498079" cy="512064"/>
+            <a:off x="2057400" y="1005840"/>
+            <a:ext cx="7863840" cy="512064"/>
           </a:xfrm>
           <a:prstGeom prst="rect">
             <a:avLst/>
@@ -19877,8 +19877,8 @@
         </p:nvSpPr>
         <p:spPr>
           <a:xfrm>
-            <a:off x="1920240" y="1005840"/>
-            <a:ext cx="7498079" cy="512064"/>
+            <a:off x="2057400" y="1005840"/>
+            <a:ext cx="7863840" cy="512064"/>
           </a:xfrm>
           <a:prstGeom prst="rect">
             <a:avLst/>
@@ -20214,8 +20214,8 @@
         </p:nvSpPr>
         <p:spPr>
           <a:xfrm>
-            <a:off x="1920240" y="1005840"/>
-            <a:ext cx="7498079" cy="512064"/>
+            <a:off x="2057400" y="1005840"/>
+            <a:ext cx="7863840" cy="512064"/>
           </a:xfrm>
           <a:prstGeom prst="rect">
             <a:avLst/>

--- a/production/slides/03-ch3-energy-speed-slides.pptx
+++ b/production/slides/03-ch3-energy-speed-slides.pptx
@@ -47,7 +47,7 @@
     <p:sldId id="295" r:id="rId47"/>
     <p:sldId id="296" r:id="rId48"/>
   </p:sldIdLst>
-  <p:sldSz cx="12191695" cy="6858000" type="screen4x3"/>
+  <p:sldSz cx="12191695" cy="6858000" type="screen16x9"/>
   <p:notesSz cx="6858000" cy="9144000"/>
   <p:defaultTextStyle>
     <a:defPPr>
